--- a/public/course-materials/pptx/Module-04-Comprendre-la-blockchain-sans-jargon.pptx
+++ b/public/course-materials/pptx/Module-04-Comprendre-la-blockchain-sans-jargon.pptx
@@ -19,9 +19,14 @@
     <p:sldId id="267" r:id="rId13"/>
     <p:sldId id="268" r:id="rId14"/>
     <p:sldId id="269" r:id="rId15"/>
+    <p:sldId id="270" r:id="rId16"/>
+    <p:sldId id="271" r:id="rId17"/>
+    <p:sldId id="272" r:id="rId18"/>
+    <p:sldId id="273" r:id="rId19"/>
+    <p:sldId id="274" r:id="rId20"/>
   </p:sldIdLst>
   <p:notesMasterIdLst>
-    <p:notesMasterId r:id="rId16"/>
+    <p:notesMasterId r:id="rId21"/>
   </p:notesMasterIdLst>
   <p:sldSz cx="9144000" cy="5143500"/>
   <p:notesSz cx="5143500" cy="9144000"/>
@@ -979,6 +984,446 @@
             <a:fld id="{F7021451-1387-4CA6-816F-3879F97B5CBC}" type="slidenum">
               <a:rPr lang="en-US"/>
               <a:t>14</a:t>
+            </a:fld>
+            <a:endParaRPr lang="en-US"/>
+          </a:p>
+        </p:txBody>
+      </p:sp>
+    </p:spTree>
+    <p:extLst>
+      <p:ext uri="{BB962C8B-B14F-4D97-AF65-F5344CB8AC3E}">
+        <p14:creationId xmlns:p14="http://schemas.microsoft.com/office/powerpoint/2010/main" val="1024086991"/>
+      </p:ext>
+    </p:extLst>
+  </p:cSld>
+  <p:clrMapOvr>
+    <a:masterClrMapping/>
+  </p:clrMapOvr>
+</p:notes>
+</file>
+
+<file path=ppt/notesSlides/notesSlide15.xml><?xml version="1.0" encoding="utf-8"?>
+<p:notes xmlns:a="http://schemas.openxmlformats.org/drawingml/2006/main" xmlns:r="http://schemas.openxmlformats.org/officeDocument/2006/relationships" xmlns:p="http://schemas.openxmlformats.org/presentationml/2006/main">
+  <p:cSld>
+    <p:spTree>
+      <p:nvGrpSpPr>
+        <p:cNvPr id="1" name=""/>
+        <p:cNvGrpSpPr/>
+        <p:nvPr/>
+      </p:nvGrpSpPr>
+      <p:grpSpPr>
+        <a:xfrm>
+          <a:off x="0" y="0"/>
+          <a:ext cx="0" cy="0"/>
+          <a:chOff x="0" y="0"/>
+          <a:chExt cx="0" cy="0"/>
+        </a:xfrm>
+      </p:grpSpPr>
+      <p:sp>
+        <p:nvSpPr>
+          <p:cNvPr id="2" name="Slide Image Placeholder 1"/>
+          <p:cNvSpPr>
+            <a:spLocks noGrp="1" noRot="1" noChangeAspect="1"/>
+          </p:cNvSpPr>
+          <p:nvPr>
+            <p:ph type="sldImg"/>
+          </p:nvPr>
+        </p:nvSpPr>
+        <p:spPr/>
+      </p:sp>
+      <p:sp>
+        <p:nvSpPr>
+          <p:cNvPr id="3" name="Notes Placeholder 2"/>
+          <p:cNvSpPr>
+            <a:spLocks noGrp="1"/>
+          </p:cNvSpPr>
+          <p:nvPr>
+            <p:ph type="body" idx="1"/>
+          </p:nvPr>
+        </p:nvSpPr>
+        <p:spPr/>
+        <p:txBody>
+          <a:bodyPr/>
+          <a:lstStyle/>
+          <a:p>
+            <a:r>
+              <a:rPr lang="en-US" dirty="0"/>
+              <a:t/>
+            </a:r>
+            <a:endParaRPr lang="en-US" dirty="0"/>
+          </a:p>
+        </p:txBody>
+      </p:sp>
+      <p:sp>
+        <p:nvSpPr>
+          <p:cNvPr id="4" name="Slide Number Placeholder 3"/>
+          <p:cNvSpPr>
+            <a:spLocks noGrp="1"/>
+          </p:cNvSpPr>
+          <p:nvPr>
+            <p:ph type="sldNum" sz="quarter" idx="10"/>
+          </p:nvPr>
+        </p:nvSpPr>
+        <p:spPr/>
+        <p:txBody>
+          <a:bodyPr/>
+          <a:lstStyle/>
+          <a:p>
+            <a:fld id="{F7021451-1387-4CA6-816F-3879F97B5CBC}" type="slidenum">
+              <a:rPr lang="en-US"/>
+              <a:t>15</a:t>
+            </a:fld>
+            <a:endParaRPr lang="en-US"/>
+          </a:p>
+        </p:txBody>
+      </p:sp>
+    </p:spTree>
+    <p:extLst>
+      <p:ext uri="{BB962C8B-B14F-4D97-AF65-F5344CB8AC3E}">
+        <p14:creationId xmlns:p14="http://schemas.microsoft.com/office/powerpoint/2010/main" val="1024086991"/>
+      </p:ext>
+    </p:extLst>
+  </p:cSld>
+  <p:clrMapOvr>
+    <a:masterClrMapping/>
+  </p:clrMapOvr>
+</p:notes>
+</file>
+
+<file path=ppt/notesSlides/notesSlide16.xml><?xml version="1.0" encoding="utf-8"?>
+<p:notes xmlns:a="http://schemas.openxmlformats.org/drawingml/2006/main" xmlns:r="http://schemas.openxmlformats.org/officeDocument/2006/relationships" xmlns:p="http://schemas.openxmlformats.org/presentationml/2006/main">
+  <p:cSld>
+    <p:spTree>
+      <p:nvGrpSpPr>
+        <p:cNvPr id="1" name=""/>
+        <p:cNvGrpSpPr/>
+        <p:nvPr/>
+      </p:nvGrpSpPr>
+      <p:grpSpPr>
+        <a:xfrm>
+          <a:off x="0" y="0"/>
+          <a:ext cx="0" cy="0"/>
+          <a:chOff x="0" y="0"/>
+          <a:chExt cx="0" cy="0"/>
+        </a:xfrm>
+      </p:grpSpPr>
+      <p:sp>
+        <p:nvSpPr>
+          <p:cNvPr id="2" name="Slide Image Placeholder 1"/>
+          <p:cNvSpPr>
+            <a:spLocks noGrp="1" noRot="1" noChangeAspect="1"/>
+          </p:cNvSpPr>
+          <p:nvPr>
+            <p:ph type="sldImg"/>
+          </p:nvPr>
+        </p:nvSpPr>
+        <p:spPr/>
+      </p:sp>
+      <p:sp>
+        <p:nvSpPr>
+          <p:cNvPr id="3" name="Notes Placeholder 2"/>
+          <p:cNvSpPr>
+            <a:spLocks noGrp="1"/>
+          </p:cNvSpPr>
+          <p:nvPr>
+            <p:ph type="body" idx="1"/>
+          </p:nvPr>
+        </p:nvSpPr>
+        <p:spPr/>
+        <p:txBody>
+          <a:bodyPr/>
+          <a:lstStyle/>
+          <a:p>
+            <a:r>
+              <a:rPr lang="en-US" dirty="0"/>
+              <a:t/>
+            </a:r>
+            <a:endParaRPr lang="en-US" dirty="0"/>
+          </a:p>
+        </p:txBody>
+      </p:sp>
+      <p:sp>
+        <p:nvSpPr>
+          <p:cNvPr id="4" name="Slide Number Placeholder 3"/>
+          <p:cNvSpPr>
+            <a:spLocks noGrp="1"/>
+          </p:cNvSpPr>
+          <p:nvPr>
+            <p:ph type="sldNum" sz="quarter" idx="10"/>
+          </p:nvPr>
+        </p:nvSpPr>
+        <p:spPr/>
+        <p:txBody>
+          <a:bodyPr/>
+          <a:lstStyle/>
+          <a:p>
+            <a:fld id="{F7021451-1387-4CA6-816F-3879F97B5CBC}" type="slidenum">
+              <a:rPr lang="en-US"/>
+              <a:t>16</a:t>
+            </a:fld>
+            <a:endParaRPr lang="en-US"/>
+          </a:p>
+        </p:txBody>
+      </p:sp>
+    </p:spTree>
+    <p:extLst>
+      <p:ext uri="{BB962C8B-B14F-4D97-AF65-F5344CB8AC3E}">
+        <p14:creationId xmlns:p14="http://schemas.microsoft.com/office/powerpoint/2010/main" val="1024086991"/>
+      </p:ext>
+    </p:extLst>
+  </p:cSld>
+  <p:clrMapOvr>
+    <a:masterClrMapping/>
+  </p:clrMapOvr>
+</p:notes>
+</file>
+
+<file path=ppt/notesSlides/notesSlide17.xml><?xml version="1.0" encoding="utf-8"?>
+<p:notes xmlns:a="http://schemas.openxmlformats.org/drawingml/2006/main" xmlns:r="http://schemas.openxmlformats.org/officeDocument/2006/relationships" xmlns:p="http://schemas.openxmlformats.org/presentationml/2006/main">
+  <p:cSld>
+    <p:spTree>
+      <p:nvGrpSpPr>
+        <p:cNvPr id="1" name=""/>
+        <p:cNvGrpSpPr/>
+        <p:nvPr/>
+      </p:nvGrpSpPr>
+      <p:grpSpPr>
+        <a:xfrm>
+          <a:off x="0" y="0"/>
+          <a:ext cx="0" cy="0"/>
+          <a:chOff x="0" y="0"/>
+          <a:chExt cx="0" cy="0"/>
+        </a:xfrm>
+      </p:grpSpPr>
+      <p:sp>
+        <p:nvSpPr>
+          <p:cNvPr id="2" name="Slide Image Placeholder 1"/>
+          <p:cNvSpPr>
+            <a:spLocks noGrp="1" noRot="1" noChangeAspect="1"/>
+          </p:cNvSpPr>
+          <p:nvPr>
+            <p:ph type="sldImg"/>
+          </p:nvPr>
+        </p:nvSpPr>
+        <p:spPr/>
+      </p:sp>
+      <p:sp>
+        <p:nvSpPr>
+          <p:cNvPr id="3" name="Notes Placeholder 2"/>
+          <p:cNvSpPr>
+            <a:spLocks noGrp="1"/>
+          </p:cNvSpPr>
+          <p:nvPr>
+            <p:ph type="body" idx="1"/>
+          </p:nvPr>
+        </p:nvSpPr>
+        <p:spPr/>
+        <p:txBody>
+          <a:bodyPr/>
+          <a:lstStyle/>
+          <a:p>
+            <a:r>
+              <a:rPr lang="en-US" dirty="0"/>
+              <a:t/>
+            </a:r>
+            <a:endParaRPr lang="en-US" dirty="0"/>
+          </a:p>
+        </p:txBody>
+      </p:sp>
+      <p:sp>
+        <p:nvSpPr>
+          <p:cNvPr id="4" name="Slide Number Placeholder 3"/>
+          <p:cNvSpPr>
+            <a:spLocks noGrp="1"/>
+          </p:cNvSpPr>
+          <p:nvPr>
+            <p:ph type="sldNum" sz="quarter" idx="10"/>
+          </p:nvPr>
+        </p:nvSpPr>
+        <p:spPr/>
+        <p:txBody>
+          <a:bodyPr/>
+          <a:lstStyle/>
+          <a:p>
+            <a:fld id="{F7021451-1387-4CA6-816F-3879F97B5CBC}" type="slidenum">
+              <a:rPr lang="en-US"/>
+              <a:t>17</a:t>
+            </a:fld>
+            <a:endParaRPr lang="en-US"/>
+          </a:p>
+        </p:txBody>
+      </p:sp>
+    </p:spTree>
+    <p:extLst>
+      <p:ext uri="{BB962C8B-B14F-4D97-AF65-F5344CB8AC3E}">
+        <p14:creationId xmlns:p14="http://schemas.microsoft.com/office/powerpoint/2010/main" val="1024086991"/>
+      </p:ext>
+    </p:extLst>
+  </p:cSld>
+  <p:clrMapOvr>
+    <a:masterClrMapping/>
+  </p:clrMapOvr>
+</p:notes>
+</file>
+
+<file path=ppt/notesSlides/notesSlide18.xml><?xml version="1.0" encoding="utf-8"?>
+<p:notes xmlns:a="http://schemas.openxmlformats.org/drawingml/2006/main" xmlns:r="http://schemas.openxmlformats.org/officeDocument/2006/relationships" xmlns:p="http://schemas.openxmlformats.org/presentationml/2006/main">
+  <p:cSld>
+    <p:spTree>
+      <p:nvGrpSpPr>
+        <p:cNvPr id="1" name=""/>
+        <p:cNvGrpSpPr/>
+        <p:nvPr/>
+      </p:nvGrpSpPr>
+      <p:grpSpPr>
+        <a:xfrm>
+          <a:off x="0" y="0"/>
+          <a:ext cx="0" cy="0"/>
+          <a:chOff x="0" y="0"/>
+          <a:chExt cx="0" cy="0"/>
+        </a:xfrm>
+      </p:grpSpPr>
+      <p:sp>
+        <p:nvSpPr>
+          <p:cNvPr id="2" name="Slide Image Placeholder 1"/>
+          <p:cNvSpPr>
+            <a:spLocks noGrp="1" noRot="1" noChangeAspect="1"/>
+          </p:cNvSpPr>
+          <p:nvPr>
+            <p:ph type="sldImg"/>
+          </p:nvPr>
+        </p:nvSpPr>
+        <p:spPr/>
+      </p:sp>
+      <p:sp>
+        <p:nvSpPr>
+          <p:cNvPr id="3" name="Notes Placeholder 2"/>
+          <p:cNvSpPr>
+            <a:spLocks noGrp="1"/>
+          </p:cNvSpPr>
+          <p:nvPr>
+            <p:ph type="body" idx="1"/>
+          </p:nvPr>
+        </p:nvSpPr>
+        <p:spPr/>
+        <p:txBody>
+          <a:bodyPr/>
+          <a:lstStyle/>
+          <a:p>
+            <a:r>
+              <a:rPr lang="en-US" dirty="0"/>
+              <a:t/>
+            </a:r>
+            <a:endParaRPr lang="en-US" dirty="0"/>
+          </a:p>
+        </p:txBody>
+      </p:sp>
+      <p:sp>
+        <p:nvSpPr>
+          <p:cNvPr id="4" name="Slide Number Placeholder 3"/>
+          <p:cNvSpPr>
+            <a:spLocks noGrp="1"/>
+          </p:cNvSpPr>
+          <p:nvPr>
+            <p:ph type="sldNum" sz="quarter" idx="10"/>
+          </p:nvPr>
+        </p:nvSpPr>
+        <p:spPr/>
+        <p:txBody>
+          <a:bodyPr/>
+          <a:lstStyle/>
+          <a:p>
+            <a:fld id="{F7021451-1387-4CA6-816F-3879F97B5CBC}" type="slidenum">
+              <a:rPr lang="en-US"/>
+              <a:t>18</a:t>
+            </a:fld>
+            <a:endParaRPr lang="en-US"/>
+          </a:p>
+        </p:txBody>
+      </p:sp>
+    </p:spTree>
+    <p:extLst>
+      <p:ext uri="{BB962C8B-B14F-4D97-AF65-F5344CB8AC3E}">
+        <p14:creationId xmlns:p14="http://schemas.microsoft.com/office/powerpoint/2010/main" val="1024086991"/>
+      </p:ext>
+    </p:extLst>
+  </p:cSld>
+  <p:clrMapOvr>
+    <a:masterClrMapping/>
+  </p:clrMapOvr>
+</p:notes>
+</file>
+
+<file path=ppt/notesSlides/notesSlide19.xml><?xml version="1.0" encoding="utf-8"?>
+<p:notes xmlns:a="http://schemas.openxmlformats.org/drawingml/2006/main" xmlns:r="http://schemas.openxmlformats.org/officeDocument/2006/relationships" xmlns:p="http://schemas.openxmlformats.org/presentationml/2006/main">
+  <p:cSld>
+    <p:spTree>
+      <p:nvGrpSpPr>
+        <p:cNvPr id="1" name=""/>
+        <p:cNvGrpSpPr/>
+        <p:nvPr/>
+      </p:nvGrpSpPr>
+      <p:grpSpPr>
+        <a:xfrm>
+          <a:off x="0" y="0"/>
+          <a:ext cx="0" cy="0"/>
+          <a:chOff x="0" y="0"/>
+          <a:chExt cx="0" cy="0"/>
+        </a:xfrm>
+      </p:grpSpPr>
+      <p:sp>
+        <p:nvSpPr>
+          <p:cNvPr id="2" name="Slide Image Placeholder 1"/>
+          <p:cNvSpPr>
+            <a:spLocks noGrp="1" noRot="1" noChangeAspect="1"/>
+          </p:cNvSpPr>
+          <p:nvPr>
+            <p:ph type="sldImg"/>
+          </p:nvPr>
+        </p:nvSpPr>
+        <p:spPr/>
+      </p:sp>
+      <p:sp>
+        <p:nvSpPr>
+          <p:cNvPr id="3" name="Notes Placeholder 2"/>
+          <p:cNvSpPr>
+            <a:spLocks noGrp="1"/>
+          </p:cNvSpPr>
+          <p:nvPr>
+            <p:ph type="body" idx="1"/>
+          </p:nvPr>
+        </p:nvSpPr>
+        <p:spPr/>
+        <p:txBody>
+          <a:bodyPr/>
+          <a:lstStyle/>
+          <a:p>
+            <a:r>
+              <a:rPr lang="en-US" dirty="0"/>
+              <a:t/>
+            </a:r>
+            <a:endParaRPr lang="en-US" dirty="0"/>
+          </a:p>
+        </p:txBody>
+      </p:sp>
+      <p:sp>
+        <p:nvSpPr>
+          <p:cNvPr id="4" name="Slide Number Placeholder 3"/>
+          <p:cNvSpPr>
+            <a:spLocks noGrp="1"/>
+          </p:cNvSpPr>
+          <p:nvPr>
+            <p:ph type="sldNum" sz="quarter" idx="10"/>
+          </p:nvPr>
+        </p:nvSpPr>
+        <p:spPr/>
+        <p:txBody>
+          <a:bodyPr/>
+          <a:lstStyle/>
+          <a:p>
+            <a:fld id="{F7021451-1387-4CA6-816F-3879F97B5CBC}" type="slidenum">
+              <a:rPr lang="en-US"/>
+              <a:t>19</a:t>
             </a:fld>
             <a:endParaRPr lang="en-US"/>
           </a:p>
@@ -2040,28 +2485,96 @@
         </p:nvSpPr>
         <p:spPr>
           <a:xfrm>
+            <a:off x="6400800" y="-457200"/>
+            <a:ext cx="3657600" cy="3657600"/>
+          </a:xfrm>
+          <a:prstGeom prst="ellipse">
+            <a:avLst/>
+          </a:prstGeom>
+          <a:solidFill>
+            <a:srgbClr val="F59E0B">
+              <a:alpha val="8000"/>
+            </a:srgbClr>
+          </a:solidFill>
+          <a:ln/>
+        </p:spPr>
+      </p:sp>
+      <p:sp>
+        <p:nvSpPr>
+          <p:cNvPr id="3" name="Shape 1"/>
+          <p:cNvSpPr/>
+          <p:nvPr/>
+        </p:nvSpPr>
+        <p:spPr>
+          <a:xfrm>
+            <a:off x="7315200" y="2286000"/>
+            <a:ext cx="2743200" cy="2743200"/>
+          </a:xfrm>
+          <a:prstGeom prst="ellipse">
+            <a:avLst/>
+          </a:prstGeom>
+          <a:solidFill>
+            <a:srgbClr val="F59E0B">
+              <a:alpha val="5000"/>
+            </a:srgbClr>
+          </a:solidFill>
+          <a:ln/>
+        </p:spPr>
+      </p:sp>
+      <p:sp>
+        <p:nvSpPr>
+          <p:cNvPr id="4" name="Shape 2"/>
+          <p:cNvSpPr/>
+          <p:nvPr/>
+        </p:nvSpPr>
+        <p:spPr>
+          <a:xfrm>
             <a:off x="0" y="0"/>
-            <a:ext cx="9144000" cy="54864"/>
+            <a:ext cx="9144000" cy="45720"/>
           </a:xfrm>
           <a:prstGeom prst="rect">
             <a:avLst/>
           </a:prstGeom>
           <a:solidFill>
-            <a:srgbClr val="00BFA6"/>
+            <a:srgbClr val="F59E0B"/>
           </a:solidFill>
           <a:ln/>
         </p:spPr>
       </p:sp>
-      <p:sp>
-        <p:nvSpPr>
-          <p:cNvPr id="3" name="Text 1"/>
+      <p:pic>
+        <p:nvPicPr>
+          <p:cNvPr id="5" name="Image 0" descr="preencoded.png">    </p:cNvPr>
+          <p:cNvPicPr>
+            <a:picLocks noChangeAspect="1"/>
+          </p:cNvPicPr>
+          <p:nvPr/>
+        </p:nvPicPr>
+        <p:blipFill>
+          <a:blip r:embed="rId1"/>
+          <a:stretch>
+            <a:fillRect/>
+          </a:stretch>
+        </p:blipFill>
+        <p:spPr>
+          <a:xfrm>
+            <a:off x="7132320" y="1097280"/>
+            <a:ext cx="1463040" cy="1463040"/>
+          </a:xfrm>
+          <a:prstGeom prst="rect">
+            <a:avLst/>
+          </a:prstGeom>
+        </p:spPr>
+      </p:pic>
+      <p:sp>
+        <p:nvSpPr>
+          <p:cNvPr id="6" name="Text 3"/>
           <p:cNvSpPr txBox="1"/>
           <p:nvPr/>
         </p:nvSpPr>
         <p:spPr>
           <a:xfrm>
-            <a:off x="731520" y="1097280"/>
-            <a:ext cx="2286000" cy="457200"/>
+            <a:off x="731520" y="914400"/>
+            <a:ext cx="2286000" cy="365760"/>
           </a:xfrm>
           <a:prstGeom prst="rect">
             <a:avLst/>
@@ -2077,9 +2590,9 @@
               <a:buNone/>
             </a:pPr>
             <a:r>
-              <a:rPr lang="en-US" sz="1400" b="1" spc="400" kern="0" dirty="0">
-                <a:solidFill>
-                  <a:srgbClr val="00BFA6"/>
+              <a:rPr lang="en-US" sz="1300" b="1" spc="400" kern="0" dirty="0">
+                <a:solidFill>
+                  <a:srgbClr val="F59E0B"/>
                 </a:solidFill>
                 <a:latin typeface="Calibri" pitchFamily="34" charset="0"/>
                 <a:ea typeface="Calibri" pitchFamily="34" charset="-122"/>
@@ -2087,20 +2600,20 @@
               </a:rPr>
               <a:t>MODULE 4</a:t>
             </a:r>
-            <a:endParaRPr lang="en-US" sz="1400" dirty="0"/>
-          </a:p>
-        </p:txBody>
-      </p:sp>
-      <p:sp>
-        <p:nvSpPr>
-          <p:cNvPr id="4" name="Text 2"/>
+            <a:endParaRPr lang="en-US" sz="1300" dirty="0"/>
+          </a:p>
+        </p:txBody>
+      </p:sp>
+      <p:sp>
+        <p:nvSpPr>
+          <p:cNvPr id="7" name="Text 4"/>
           <p:cNvSpPr txBox="1"/>
           <p:nvPr/>
         </p:nvSpPr>
         <p:spPr>
           <a:xfrm>
-            <a:off x="731520" y="1645920"/>
-            <a:ext cx="7680960" cy="1463040"/>
+            <a:off x="731520" y="1371600"/>
+            <a:ext cx="5943600" cy="1645920"/>
           </a:xfrm>
           <a:prstGeom prst="rect">
             <a:avLst/>
@@ -2132,14 +2645,34 @@
       </p:sp>
       <p:sp>
         <p:nvSpPr>
-          <p:cNvPr id="5" name="Text 3"/>
+          <p:cNvPr id="8" name="Shape 5"/>
+          <p:cNvSpPr/>
+          <p:nvPr/>
+        </p:nvSpPr>
+        <p:spPr>
+          <a:xfrm>
+            <a:off x="731520" y="3291840"/>
+            <a:ext cx="1828800" cy="36576"/>
+          </a:xfrm>
+          <a:prstGeom prst="rect">
+            <a:avLst/>
+          </a:prstGeom>
+          <a:solidFill>
+            <a:srgbClr val="F59E0B"/>
+          </a:solidFill>
+          <a:ln/>
+        </p:spPr>
+      </p:sp>
+      <p:sp>
+        <p:nvSpPr>
+          <p:cNvPr id="9" name="Text 6"/>
           <p:cNvSpPr txBox="1"/>
           <p:nvPr/>
         </p:nvSpPr>
         <p:spPr>
           <a:xfrm>
-            <a:off x="731520" y="4023360"/>
-            <a:ext cx="2743200" cy="365760"/>
+            <a:off x="731520" y="3566160"/>
+            <a:ext cx="2743200" cy="320040"/>
           </a:xfrm>
           <a:prstGeom prst="rect">
             <a:avLst/>
@@ -2155,7 +2688,7 @@
               <a:buNone/>
             </a:pPr>
             <a:r>
-              <a:rPr lang="en-US" sz="1200" spc="300" kern="0" dirty="0">
+              <a:rPr lang="en-US" sz="1100" spc="300" kern="0" dirty="0">
                 <a:solidFill>
                   <a:srgbClr val="64748B"/>
                 </a:solidFill>
@@ -2165,20 +2698,20 @@
               </a:rPr>
               <a:t>TEREX ACADEMY</a:t>
             </a:r>
-            <a:endParaRPr lang="en-US" sz="1200" dirty="0"/>
-          </a:p>
-        </p:txBody>
-      </p:sp>
-      <p:sp>
-        <p:nvSpPr>
-          <p:cNvPr id="6" name="Text 4"/>
+            <a:endParaRPr lang="en-US" sz="1100" dirty="0"/>
+          </a:p>
+        </p:txBody>
+      </p:sp>
+      <p:sp>
+        <p:nvSpPr>
+          <p:cNvPr id="10" name="Text 7"/>
           <p:cNvSpPr txBox="1"/>
           <p:nvPr/>
         </p:nvSpPr>
         <p:spPr>
           <a:xfrm>
-            <a:off x="731520" y="4389120"/>
-            <a:ext cx="3657600" cy="320040"/>
+            <a:off x="731520" y="3931920"/>
+            <a:ext cx="3657600" cy="274320"/>
           </a:xfrm>
           <a:prstGeom prst="rect">
             <a:avLst/>
@@ -2222,7 +2755,7 @@
     <p:bg>
       <p:bgPr>
         <a:solidFill>
-          <a:srgbClr val="0D2137"/>
+          <a:srgbClr val="0F1419"/>
         </a:solidFill>
       </p:bgPr>
     </p:bg>
@@ -2242,34 +2775,14 @@
       </p:grpSpPr>
       <p:sp>
         <p:nvSpPr>
-          <p:cNvPr id="2" name="Shape 0"/>
-          <p:cNvSpPr/>
-          <p:nvPr/>
-        </p:nvSpPr>
-        <p:spPr>
-          <a:xfrm>
-            <a:off x="548640" y="914400"/>
-            <a:ext cx="45720" cy="2560320"/>
-          </a:xfrm>
-          <a:prstGeom prst="rect">
-            <a:avLst/>
-          </a:prstGeom>
-          <a:solidFill>
-            <a:srgbClr val="00BFA6"/>
-          </a:solidFill>
-          <a:ln/>
-        </p:spPr>
-      </p:sp>
-      <p:sp>
-        <p:nvSpPr>
-          <p:cNvPr id="3" name="Text 1"/>
+          <p:cNvPr id="2" name="Text 0"/>
           <p:cNvSpPr txBox="1"/>
           <p:nvPr/>
         </p:nvSpPr>
         <p:spPr>
           <a:xfrm>
-            <a:off x="822960" y="1097280"/>
-            <a:ext cx="2743200" cy="365760"/>
+            <a:off x="731520" y="274320"/>
+            <a:ext cx="7680960" cy="502920"/>
           </a:xfrm>
           <a:prstGeom prst="rect">
             <a:avLst/>
@@ -2285,30 +2798,76 @@
               <a:buNone/>
             </a:pPr>
             <a:r>
-              <a:rPr lang="en-US" sz="1200" b="1" spc="200" kern="0" dirty="0">
-                <a:solidFill>
-                  <a:srgbClr val="00BFA6"/>
-                </a:solidFill>
-                <a:latin typeface="Calibri" pitchFamily="34" charset="0"/>
-                <a:ea typeface="Calibri" pitchFamily="34" charset="-122"/>
-                <a:cs typeface="Calibri" pitchFamily="34" charset="-120"/>
-              </a:rPr>
-              <a:t>Lecon 3 / 3</a:t>
-            </a:r>
-            <a:endParaRPr lang="en-US" sz="1200" dirty="0"/>
-          </a:p>
-        </p:txBody>
-      </p:sp>
-      <p:sp>
-        <p:nvSpPr>
-          <p:cNvPr id="4" name="Text 2"/>
+              <a:rPr lang="en-US" sz="2000" b="1" dirty="0">
+                <a:solidFill>
+                  <a:srgbClr val="F59E0B"/>
+                </a:solidFill>
+                <a:latin typeface="Calibri" pitchFamily="34" charset="0"/>
+                <a:ea typeface="Calibri" pitchFamily="34" charset="-122"/>
+                <a:cs typeface="Calibri" pitchFamily="34" charset="-120"/>
+              </a:rPr>
+              <a:t>Étape 3 — Le mineur regroupe les transactions en un bloc</a:t>
+            </a:r>
+            <a:endParaRPr lang="en-US" sz="2000" dirty="0"/>
+          </a:p>
+        </p:txBody>
+      </p:sp>
+      <p:sp>
+        <p:nvSpPr>
+          <p:cNvPr id="3" name="Shape 1"/>
+          <p:cNvSpPr/>
+          <p:nvPr/>
+        </p:nvSpPr>
+        <p:spPr>
+          <a:xfrm>
+            <a:off x="731520" y="1005840"/>
+            <a:ext cx="3657600" cy="1371600"/>
+          </a:xfrm>
+          <a:prstGeom prst="roundRect">
+            <a:avLst>
+              <a:gd name="adj" fmla="val 6667"/>
+            </a:avLst>
+          </a:prstGeom>
+          <a:solidFill>
+            <a:srgbClr val="1A2332"/>
+          </a:solidFill>
+          <a:ln/>
+        </p:spPr>
+      </p:sp>
+      <p:pic>
+        <p:nvPicPr>
+          <p:cNvPr id="4" name="Image 0" descr="preencoded.png">    </p:cNvPr>
+          <p:cNvPicPr>
+            <a:picLocks noChangeAspect="1"/>
+          </p:cNvPicPr>
+          <p:nvPr/>
+        </p:nvPicPr>
+        <p:blipFill>
+          <a:blip r:embed="rId1"/>
+          <a:stretch>
+            <a:fillRect/>
+          </a:stretch>
+        </p:blipFill>
+        <p:spPr>
+          <a:xfrm>
+            <a:off x="868680" y="1143000"/>
+            <a:ext cx="502920" cy="502920"/>
+          </a:xfrm>
+          <a:prstGeom prst="rect">
+            <a:avLst/>
+          </a:prstGeom>
+        </p:spPr>
+      </p:pic>
+      <p:sp>
+        <p:nvSpPr>
+          <p:cNvPr id="5" name="Text 2"/>
           <p:cNvSpPr txBox="1"/>
           <p:nvPr/>
         </p:nvSpPr>
         <p:spPr>
           <a:xfrm>
-            <a:off x="822960" y="1645920"/>
-            <a:ext cx="7498080" cy="1280160"/>
+            <a:off x="868680" y="1719072"/>
+            <a:ext cx="3383280" cy="320040"/>
           </a:xfrm>
           <a:prstGeom prst="rect">
             <a:avLst/>
@@ -2324,7 +2883,7 @@
               <a:buNone/>
             </a:pPr>
             <a:r>
-              <a:rPr lang="en-US" sz="3000" b="1" dirty="0">
+              <a:rPr lang="en-US" sz="1100" b="1" dirty="0">
                 <a:solidFill>
                   <a:srgbClr val="FFFFFF"/>
                 </a:solidFill>
@@ -2332,22 +2891,22 @@
                 <a:ea typeface="Calibri" pitchFamily="34" charset="-122"/>
                 <a:cs typeface="Calibri" pitchFamily="34" charset="-120"/>
               </a:rPr>
-              <a:t>Blockchains publiques vs privées</a:t>
-            </a:r>
-            <a:endParaRPr lang="en-US" sz="3000" dirty="0"/>
-          </a:p>
-        </p:txBody>
-      </p:sp>
-      <p:sp>
-        <p:nvSpPr>
-          <p:cNvPr id="5" name="Text 3"/>
+              <a:t>Les mineurs (ou « validateurs » sur certaines blockchains...</a:t>
+            </a:r>
+            <a:endParaRPr lang="en-US" sz="1100" dirty="0"/>
+          </a:p>
+        </p:txBody>
+      </p:sp>
+      <p:sp>
+        <p:nvSpPr>
+          <p:cNvPr id="6" name="Text 3"/>
           <p:cNvSpPr txBox="1"/>
           <p:nvPr/>
         </p:nvSpPr>
         <p:spPr>
           <a:xfrm>
-            <a:off x="822960" y="4206240"/>
-            <a:ext cx="5486400" cy="320040"/>
+            <a:off x="868680" y="2011680"/>
+            <a:ext cx="3383280" cy="274320"/>
           </a:xfrm>
           <a:prstGeom prst="rect">
             <a:avLst/>
@@ -2356,22 +2915,231 @@
           <a:ln/>
         </p:spPr>
         <p:txBody>
-          <a:bodyPr wrap="square" lIns="0" tIns="0" rIns="0" bIns="0" rtlCol="0" anchor="ctr"/>
+          <a:bodyPr wrap="square" lIns="0" tIns="0" rIns="0" bIns="0" rtlCol="0" anchor="t"/>
           <a:lstStyle/>
           <a:p>
             <a:pPr indent="0" marL="0">
               <a:buNone/>
             </a:pPr>
             <a:r>
-              <a:rPr lang="en-US" sz="1100" dirty="0">
-                <a:solidFill>
-                  <a:srgbClr val="64748B"/>
-                </a:solidFill>
-                <a:latin typeface="Calibri" pitchFamily="34" charset="0"/>
-                <a:ea typeface="Calibri" pitchFamily="34" charset="-122"/>
-                <a:cs typeface="Calibri" pitchFamily="34" charset="-120"/>
-              </a:rPr>
-              <a:t>Comprendre la blockchain sans jargon</a:t>
+              <a:rPr lang="en-US" sz="900" dirty="0">
+                <a:solidFill>
+                  <a:srgbClr val="94A3B8"/>
+                </a:solidFill>
+                <a:latin typeface="Calibri" pitchFamily="34" charset="0"/>
+                <a:ea typeface="Calibri" pitchFamily="34" charset="-122"/>
+                <a:cs typeface="Calibri" pitchFamily="34" charset="-120"/>
+              </a:rPr>
+              <a:t> les transactions en attente et forment un bloc.</a:t>
+            </a:r>
+            <a:endParaRPr lang="en-US" sz="900" dirty="0"/>
+          </a:p>
+        </p:txBody>
+      </p:sp>
+      <p:sp>
+        <p:nvSpPr>
+          <p:cNvPr id="7" name="Shape 4"/>
+          <p:cNvSpPr/>
+          <p:nvPr/>
+        </p:nvSpPr>
+        <p:spPr>
+          <a:xfrm>
+            <a:off x="4754880" y="1005840"/>
+            <a:ext cx="3657600" cy="1371600"/>
+          </a:xfrm>
+          <a:prstGeom prst="roundRect">
+            <a:avLst>
+              <a:gd name="adj" fmla="val 6667"/>
+            </a:avLst>
+          </a:prstGeom>
+          <a:solidFill>
+            <a:srgbClr val="1A2332"/>
+          </a:solidFill>
+          <a:ln/>
+        </p:spPr>
+      </p:sp>
+      <p:pic>
+        <p:nvPicPr>
+          <p:cNvPr id="8" name="Image 1" descr="preencoded.png">    </p:cNvPr>
+          <p:cNvPicPr>
+            <a:picLocks noChangeAspect="1"/>
+          </p:cNvPicPr>
+          <p:nvPr/>
+        </p:nvPicPr>
+        <p:blipFill>
+          <a:blip r:embed="rId2"/>
+          <a:stretch>
+            <a:fillRect/>
+          </a:stretch>
+        </p:blipFill>
+        <p:spPr>
+          <a:xfrm>
+            <a:off x="4892040" y="1143000"/>
+            <a:ext cx="502920" cy="502920"/>
+          </a:xfrm>
+          <a:prstGeom prst="rect">
+            <a:avLst/>
+          </a:prstGeom>
+        </p:spPr>
+      </p:pic>
+      <p:sp>
+        <p:nvSpPr>
+          <p:cNvPr id="9" name="Text 5"/>
+          <p:cNvSpPr txBox="1"/>
+          <p:nvPr/>
+        </p:nvSpPr>
+        <p:spPr>
+          <a:xfrm>
+            <a:off x="4892040" y="1719072"/>
+            <a:ext cx="3383280" cy="320040"/>
+          </a:xfrm>
+          <a:prstGeom prst="rect">
+            <a:avLst/>
+          </a:prstGeom>
+          <a:noFill/>
+          <a:ln/>
+        </p:spPr>
+        <p:txBody>
+          <a:bodyPr wrap="square" lIns="0" tIns="0" rIns="0" bIns="0" rtlCol="0" anchor="t"/>
+          <a:lstStyle/>
+          <a:p>
+            <a:pPr indent="0" marL="0">
+              <a:buNone/>
+            </a:pPr>
+            <a:r>
+              <a:rPr lang="en-US" sz="1100" b="1" dirty="0">
+                <a:solidFill>
+                  <a:srgbClr val="FFFFFF"/>
+                </a:solidFill>
+                <a:latin typeface="Calibri" pitchFamily="34" charset="0"/>
+                <a:ea typeface="Calibri" pitchFamily="34" charset="-122"/>
+                <a:cs typeface="Calibri" pitchFamily="34" charset="-120"/>
+              </a:rPr>
+              <a:t>Sur Bitcoin, un nouveau bloc est créé toutes les 10 minut...</a:t>
+            </a:r>
+            <a:endParaRPr lang="en-US" sz="1100" dirty="0"/>
+          </a:p>
+        </p:txBody>
+      </p:sp>
+      <p:sp>
+        <p:nvSpPr>
+          <p:cNvPr id="10" name="Text 6"/>
+          <p:cNvSpPr txBox="1"/>
+          <p:nvPr/>
+        </p:nvSpPr>
+        <p:spPr>
+          <a:xfrm>
+            <a:off x="4892040" y="2011680"/>
+            <a:ext cx="3383280" cy="274320"/>
+          </a:xfrm>
+          <a:prstGeom prst="rect">
+            <a:avLst/>
+          </a:prstGeom>
+          <a:noFill/>
+          <a:ln/>
+        </p:spPr>
+        <p:txBody>
+          <a:bodyPr wrap="square" lIns="0" tIns="0" rIns="0" bIns="0" rtlCol="0" anchor="t"/>
+          <a:lstStyle/>
+          <a:p>
+            <a:pPr indent="0" marL="0">
+              <a:buNone/>
+            </a:pPr>
+            <a:r>
+              <a:rPr lang="en-US" sz="900" dirty="0">
+                <a:solidFill>
+                  <a:srgbClr val="94A3B8"/>
+                </a:solidFill>
+                <a:latin typeface="Calibri" pitchFamily="34" charset="0"/>
+                <a:ea typeface="Calibri" pitchFamily="34" charset="-122"/>
+                <a:cs typeface="Calibri" pitchFamily="34" charset="-120"/>
+              </a:rPr>
+              <a:t>.</a:t>
+            </a:r>
+            <a:endParaRPr lang="en-US" sz="900" dirty="0"/>
+          </a:p>
+        </p:txBody>
+      </p:sp>
+      <p:sp>
+        <p:nvSpPr>
+          <p:cNvPr id="11" name="Shape 7"/>
+          <p:cNvSpPr/>
+          <p:nvPr/>
+        </p:nvSpPr>
+        <p:spPr>
+          <a:xfrm>
+            <a:off x="731520" y="2514600"/>
+            <a:ext cx="3657600" cy="1371600"/>
+          </a:xfrm>
+          <a:prstGeom prst="roundRect">
+            <a:avLst>
+              <a:gd name="adj" fmla="val 6667"/>
+            </a:avLst>
+          </a:prstGeom>
+          <a:solidFill>
+            <a:srgbClr val="1A2332"/>
+          </a:solidFill>
+          <a:ln/>
+        </p:spPr>
+      </p:sp>
+      <p:pic>
+        <p:nvPicPr>
+          <p:cNvPr id="12" name="Image 2" descr="preencoded.png">    </p:cNvPr>
+          <p:cNvPicPr>
+            <a:picLocks noChangeAspect="1"/>
+          </p:cNvPicPr>
+          <p:nvPr/>
+        </p:nvPicPr>
+        <p:blipFill>
+          <a:blip r:embed="rId3"/>
+          <a:stretch>
+            <a:fillRect/>
+          </a:stretch>
+        </p:blipFill>
+        <p:spPr>
+          <a:xfrm>
+            <a:off x="868680" y="2651760"/>
+            <a:ext cx="502920" cy="502920"/>
+          </a:xfrm>
+          <a:prstGeom prst="rect">
+            <a:avLst/>
+          </a:prstGeom>
+        </p:spPr>
+      </p:pic>
+      <p:sp>
+        <p:nvSpPr>
+          <p:cNvPr id="13" name="Text 8"/>
+          <p:cNvSpPr txBox="1"/>
+          <p:nvPr/>
+        </p:nvSpPr>
+        <p:spPr>
+          <a:xfrm>
+            <a:off x="868680" y="3227832"/>
+            <a:ext cx="3383280" cy="320040"/>
+          </a:xfrm>
+          <a:prstGeom prst="rect">
+            <a:avLst/>
+          </a:prstGeom>
+          <a:noFill/>
+          <a:ln/>
+        </p:spPr>
+        <p:txBody>
+          <a:bodyPr wrap="square" lIns="0" tIns="0" rIns="0" bIns="0" rtlCol="0" anchor="t"/>
+          <a:lstStyle/>
+          <a:p>
+            <a:pPr indent="0" marL="0">
+              <a:buNone/>
+            </a:pPr>
+            <a:r>
+              <a:rPr lang="en-US" sz="1100" b="1" dirty="0">
+                <a:solidFill>
+                  <a:srgbClr val="FFFFFF"/>
+                </a:solidFill>
+                <a:latin typeface="Calibri" pitchFamily="34" charset="0"/>
+                <a:ea typeface="Calibri" pitchFamily="34" charset="-122"/>
+                <a:cs typeface="Calibri" pitchFamily="34" charset="-120"/>
+              </a:rPr>
+              <a:t>Sur Tron, c'est toutes les 3 secondes.</a:t>
             </a:r>
             <a:endParaRPr lang="en-US" sz="1100" dirty="0"/>
           </a:p>
@@ -2411,13 +3179,98 @@
       </p:grpSpPr>
       <p:sp>
         <p:nvSpPr>
-          <p:cNvPr id="2" name="Text 0"/>
+          <p:cNvPr id="2" name="Shape 0"/>
+          <p:cNvSpPr/>
+          <p:nvPr/>
+        </p:nvSpPr>
+        <p:spPr>
+          <a:xfrm>
+            <a:off x="7955280" y="182880"/>
+            <a:ext cx="640080" cy="640080"/>
+          </a:xfrm>
+          <a:prstGeom prst="ellipse">
+            <a:avLst/>
+          </a:prstGeom>
+          <a:solidFill>
+            <a:srgbClr val="F59E0B">
+              <a:alpha val="12000"/>
+            </a:srgbClr>
+          </a:solidFill>
+          <a:ln/>
+        </p:spPr>
+      </p:sp>
+      <p:pic>
+        <p:nvPicPr>
+          <p:cNvPr id="3" name="Image 0" descr="preencoded.png">    </p:cNvPr>
+          <p:cNvPicPr>
+            <a:picLocks noChangeAspect="1"/>
+          </p:cNvPicPr>
+          <p:nvPr/>
+        </p:nvPicPr>
+        <p:blipFill>
+          <a:blip r:embed="rId1"/>
+          <a:stretch>
+            <a:fillRect/>
+          </a:stretch>
+        </p:blipFill>
+        <p:spPr>
+          <a:xfrm>
+            <a:off x="8028432" y="256032"/>
+            <a:ext cx="493776" cy="493776"/>
+          </a:xfrm>
+          <a:prstGeom prst="rect">
+            <a:avLst/>
+          </a:prstGeom>
+        </p:spPr>
+      </p:pic>
+      <p:sp>
+        <p:nvSpPr>
+          <p:cNvPr id="4" name="Text 1"/>
           <p:cNvSpPr txBox="1"/>
           <p:nvPr/>
         </p:nvSpPr>
         <p:spPr>
           <a:xfrm>
-            <a:off x="731520" y="457200"/>
+            <a:off x="731520" y="274320"/>
+            <a:ext cx="7132320" cy="502920"/>
+          </a:xfrm>
+          <a:prstGeom prst="rect">
+            <a:avLst/>
+          </a:prstGeom>
+          <a:noFill/>
+          <a:ln/>
+        </p:spPr>
+        <p:txBody>
+          <a:bodyPr wrap="square" lIns="0" tIns="0" rIns="0" bIns="0" rtlCol="0" anchor="ctr"/>
+          <a:lstStyle/>
+          <a:p>
+            <a:pPr indent="0" marL="0">
+              <a:buNone/>
+            </a:pPr>
+            <a:r>
+              <a:rPr lang="en-US" sz="2000" b="1" dirty="0">
+                <a:solidFill>
+                  <a:srgbClr val="F59E0B"/>
+                </a:solidFill>
+                <a:latin typeface="Calibri" pitchFamily="34" charset="0"/>
+                <a:ea typeface="Calibri" pitchFamily="34" charset="-122"/>
+                <a:cs typeface="Calibri" pitchFamily="34" charset="-120"/>
+              </a:rPr>
+              <a:t>Étape 4 — Le mineur « scelle » le bloc</a:t>
+            </a:r>
+            <a:endParaRPr lang="en-US" sz="2000" dirty="0"/>
+          </a:p>
+        </p:txBody>
+      </p:sp>
+      <p:sp>
+        <p:nvSpPr>
+          <p:cNvPr id="5" name="Text 2"/>
+          <p:cNvSpPr txBox="1"/>
+          <p:nvPr/>
+        </p:nvSpPr>
+        <p:spPr>
+          <a:xfrm>
+            <a:off x="731520" y="960120"/>
             <a:ext cx="7680960" cy="3657600"/>
           </a:xfrm>
           <a:prstGeom prst="rect">
@@ -2446,7 +3299,7 @@
                 <a:ea typeface="Calibri" pitchFamily="34" charset="-122"/>
                 <a:cs typeface="Calibri" pitchFamily="34" charset="-120"/>
               </a:rPr>
-              <a:t>Toutes les blockchains ne sont pas égales. Il existe plusieurs grandes familles.</a:t>
+              <a:t>Il résout un puzzle mathématique très coûteux en calcul (c'est ça, la « preuve de travail »).</a:t>
             </a:r>
             <a:endParaRPr lang="en-US" sz="1400" dirty="0"/>
           </a:p>
@@ -2467,36 +3320,15 @@
                 <a:ea typeface="Calibri" pitchFamily="34" charset="-122"/>
                 <a:cs typeface="Calibri" pitchFamily="34" charset="-120"/>
               </a:rPr>
-              <a:t>Bitcoin, Ethereum, Solana, Tron. Tout le monde peut y participer, y lire les transactions, y devenir validateur. Elles sont ouvertes, censurables par personne. Ce sont celles qu...</a:t>
+              <a:t>Le premier qui trouve la solution ajoute le bloc à la chaîne et reçoit une récompense en cryptomonnaie.</a:t>
             </a:r>
             <a:endParaRPr lang="en-US" sz="1400" dirty="0"/>
           </a:p>
-          <a:p>
-            <a:pPr marL="342900" indent="-342900">
-              <a:spcAft>
-                <a:spcPts val="800"/>
-              </a:spcAft>
-              <a:buSzPct val="100000"/>
-              <a:buChar char="•"/>
-            </a:pPr>
-            <a:r>
-              <a:rPr lang="en-US" sz="1400" dirty="0">
-                <a:solidFill>
-                  <a:srgbClr val="FFFFFF"/>
-                </a:solidFill>
-                <a:latin typeface="Calibri" pitchFamily="34" charset="0"/>
-                <a:ea typeface="Calibri" pitchFamily="34" charset="-122"/>
-                <a:cs typeface="Calibri" pitchFamily="34" charset="-120"/>
-              </a:rPr>
-              <a:t>Souvent utilisées par des entreprises ou des consortiums bancaires. Seuls des acteurs autorisés peuvent y participer. Elles gardent certains bénéfices (traçabilité, automatisati...</a:t>
-            </a:r>
-            <a:endParaRPr lang="en-US" sz="1400" dirty="0"/>
-          </a:p>
-        </p:txBody>
-      </p:sp>
-      <p:sp>
-        <p:nvSpPr>
-          <p:cNvPr id="3" name="Text 1"/>
+        </p:txBody>
+      </p:sp>
+      <p:sp>
+        <p:nvSpPr>
+          <p:cNvPr id="6" name="Text 3"/>
           <p:cNvSpPr txBox="1"/>
           <p:nvPr/>
         </p:nvSpPr>
@@ -2527,7 +3359,7 @@
                 <a:ea typeface="Calibri" pitchFamily="34" charset="-122"/>
                 <a:cs typeface="Calibri" pitchFamily="34" charset="-120"/>
               </a:rPr>
-              <a:t>Module 4 — Lecon 3</a:t>
+              <a:t>Module 4 — Leçon 2</a:t>
             </a:r>
             <a:endParaRPr lang="en-US" sz="900" dirty="0"/>
           </a:p>
@@ -2573,8 +3405,8 @@
         </p:nvSpPr>
         <p:spPr>
           <a:xfrm>
-            <a:off x="731520" y="365760"/>
-            <a:ext cx="7680960" cy="548640"/>
+            <a:off x="731520" y="274320"/>
+            <a:ext cx="7680960" cy="502920"/>
           </a:xfrm>
           <a:prstGeom prst="rect">
             <a:avLst/>
@@ -2590,17 +3422,17 @@
               <a:buNone/>
             </a:pPr>
             <a:r>
-              <a:rPr lang="en-US" sz="2200" b="1" dirty="0">
-                <a:solidFill>
-                  <a:srgbClr val="00BFA6"/>
-                </a:solidFill>
-                <a:latin typeface="Calibri" pitchFamily="34" charset="0"/>
-                <a:ea typeface="Calibri" pitchFamily="34" charset="-122"/>
-                <a:cs typeface="Calibri" pitchFamily="34" charset="-120"/>
-              </a:rPr>
-              <a:t>Les blockchains hybrides</a:t>
-            </a:r>
-            <a:endParaRPr lang="en-US" sz="2200" dirty="0"/>
+              <a:rPr lang="en-US" sz="2000" b="1" dirty="0">
+                <a:solidFill>
+                  <a:srgbClr val="F59E0B"/>
+                </a:solidFill>
+                <a:latin typeface="Calibri" pitchFamily="34" charset="0"/>
+                <a:ea typeface="Calibri" pitchFamily="34" charset="-122"/>
+                <a:cs typeface="Calibri" pitchFamily="34" charset="-120"/>
+              </a:rPr>
+              <a:t>Étape 5 — Le bloc est diffusé, tout le monde met à jour</a:t>
+            </a:r>
+            <a:endParaRPr lang="en-US" sz="2000" dirty="0"/>
           </a:p>
         </p:txBody>
       </p:sp>
@@ -2612,8 +3444,8 @@
         </p:nvSpPr>
         <p:spPr>
           <a:xfrm>
-            <a:off x="731520" y="1051560"/>
-            <a:ext cx="7680960" cy="3657600"/>
+            <a:off x="731520" y="1005840"/>
+            <a:ext cx="4206240" cy="3474720"/>
           </a:xfrm>
           <a:prstGeom prst="rect">
             <a:avLst/>
@@ -2627,13 +3459,13 @@
           <a:p>
             <a:pPr marL="342900" indent="-342900">
               <a:spcAft>
-                <a:spcPts val="800"/>
+                <a:spcPts val="600"/>
               </a:spcAft>
               <a:buSzPct val="100000"/>
               <a:buChar char="•"/>
             </a:pPr>
             <a:r>
-              <a:rPr lang="en-US" sz="1400" dirty="0">
+              <a:rPr lang="en-US" sz="1300" dirty="0">
                 <a:solidFill>
                   <a:srgbClr val="FFFFFF"/>
                 </a:solidFill>
@@ -2641,20 +3473,20 @@
                 <a:ea typeface="Calibri" pitchFamily="34" charset="-122"/>
                 <a:cs typeface="Calibri" pitchFamily="34" charset="-120"/>
               </a:rPr>
-              <a:t>Elles combinent une couche publique et une couche privée. Utilisées par exemple par des banques centrales pour tester des monnaies numériques (CBDC).</a:t>
-            </a:r>
-            <a:endParaRPr lang="en-US" sz="1400" dirty="0"/>
+              <a:t>Tous les nœuds du réseau reçoivent le nouveau bloc, vérifient qu'il est valide, et l'ajoutent à leur copie de la bloc...</a:t>
+            </a:r>
+            <a:endParaRPr lang="en-US" sz="1300" dirty="0"/>
           </a:p>
           <a:p>
             <a:pPr marL="342900" indent="-342900">
               <a:spcAft>
-                <a:spcPts val="800"/>
+                <a:spcPts val="600"/>
               </a:spcAft>
               <a:buSzPct val="100000"/>
               <a:buChar char="•"/>
             </a:pPr>
             <a:r>
-              <a:rPr lang="en-US" sz="1400" dirty="0">
+              <a:rPr lang="en-US" sz="1300" dirty="0">
                 <a:solidFill>
                   <a:srgbClr val="FFFFFF"/>
                 </a:solidFill>
@@ -2662,20 +3494,84 @@
                 <a:ea typeface="Calibri" pitchFamily="34" charset="-122"/>
                 <a:cs typeface="Calibri" pitchFamily="34" charset="-120"/>
               </a:rPr>
-              <a:t>Pour vous en tant qu'utilisateur crypto, ce sont uniquement les blockchains publiques qui comptent. Ce sont elles qui hébergent Bitcoin, Ethereum, USDT, et tous les actifs que v...</a:t>
-            </a:r>
-            <a:endParaRPr lang="en-US" sz="1400" dirty="0"/>
-          </a:p>
-          <a:p>
-            <a:pPr marL="342900" indent="-342900">
-              <a:spcAft>
-                <a:spcPts val="800"/>
-              </a:spcAft>
-              <a:buSzPct val="100000"/>
-              <a:buChar char="•"/>
-            </a:pPr>
-            <a:r>
-              <a:rPr lang="en-US" sz="1400" dirty="0">
+              <a:t>Votre transaction est désormais confirmée et permanente.</a:t>
+            </a:r>
+            <a:endParaRPr lang="en-US" sz="1300" dirty="0"/>
+          </a:p>
+        </p:txBody>
+      </p:sp>
+      <p:sp>
+        <p:nvSpPr>
+          <p:cNvPr id="4" name="Shape 2"/>
+          <p:cNvSpPr/>
+          <p:nvPr/>
+        </p:nvSpPr>
+        <p:spPr>
+          <a:xfrm>
+            <a:off x="5120640" y="1005840"/>
+            <a:ext cx="3474720" cy="640080"/>
+          </a:xfrm>
+          <a:prstGeom prst="roundRect">
+            <a:avLst>
+              <a:gd name="adj" fmla="val 14286"/>
+            </a:avLst>
+          </a:prstGeom>
+          <a:solidFill>
+            <a:srgbClr val="1A2332"/>
+          </a:solidFill>
+          <a:ln/>
+        </p:spPr>
+      </p:sp>
+      <p:pic>
+        <p:nvPicPr>
+          <p:cNvPr id="5" name="Image 0" descr="preencoded.png">    </p:cNvPr>
+          <p:cNvPicPr>
+            <a:picLocks noChangeAspect="1"/>
+          </p:cNvPicPr>
+          <p:nvPr/>
+        </p:nvPicPr>
+        <p:blipFill>
+          <a:blip r:embed="rId1"/>
+          <a:stretch>
+            <a:fillRect/>
+          </a:stretch>
+        </p:blipFill>
+        <p:spPr>
+          <a:xfrm>
+            <a:off x="5257800" y="1106424"/>
+            <a:ext cx="438912" cy="438912"/>
+          </a:xfrm>
+          <a:prstGeom prst="rect">
+            <a:avLst/>
+          </a:prstGeom>
+        </p:spPr>
+      </p:pic>
+      <p:sp>
+        <p:nvSpPr>
+          <p:cNvPr id="6" name="Text 3"/>
+          <p:cNvSpPr txBox="1"/>
+          <p:nvPr/>
+        </p:nvSpPr>
+        <p:spPr>
+          <a:xfrm>
+            <a:off x="5806440" y="1005840"/>
+            <a:ext cx="2651760" cy="640080"/>
+          </a:xfrm>
+          <a:prstGeom prst="rect">
+            <a:avLst/>
+          </a:prstGeom>
+          <a:noFill/>
+          <a:ln/>
+        </p:spPr>
+        <p:txBody>
+          <a:bodyPr wrap="square" lIns="0" tIns="0" rIns="0" bIns="0" rtlCol="0" anchor="ctr"/>
+          <a:lstStyle/>
+          <a:p>
+            <a:pPr indent="0" marL="0">
+              <a:buNone/>
+            </a:pPr>
+            <a:r>
+              <a:rPr lang="en-US" sz="1200" dirty="0">
                 <a:solidFill>
                   <a:srgbClr val="FFFFFF"/>
                 </a:solidFill>
@@ -2683,20 +3579,84 @@
                 <a:ea typeface="Calibri" pitchFamily="34" charset="-122"/>
                 <a:cs typeface="Calibri" pitchFamily="34" charset="-120"/>
               </a:rPr>
-              <a:t>Parmi les publiques, on distingue deux grandes catégories techniques :</a:t>
-            </a:r>
-            <a:endParaRPr lang="en-US" sz="1400" dirty="0"/>
-          </a:p>
-          <a:p>
-            <a:pPr marL="342900" indent="-342900">
-              <a:spcAft>
-                <a:spcPts val="800"/>
-              </a:spcAft>
-              <a:buSzPct val="100000"/>
-              <a:buChar char="•"/>
-            </a:pPr>
-            <a:r>
-              <a:rPr lang="en-US" sz="1400" dirty="0">
+              <a:t>En tout : entre 3 secondes (Tron) et 60 minutes (Bitcoin) pour qu'une transac...</a:t>
+            </a:r>
+            <a:endParaRPr lang="en-US" sz="1200" dirty="0"/>
+          </a:p>
+        </p:txBody>
+      </p:sp>
+      <p:sp>
+        <p:nvSpPr>
+          <p:cNvPr id="7" name="Shape 4"/>
+          <p:cNvSpPr/>
+          <p:nvPr/>
+        </p:nvSpPr>
+        <p:spPr>
+          <a:xfrm>
+            <a:off x="5120640" y="1737360"/>
+            <a:ext cx="3474720" cy="640080"/>
+          </a:xfrm>
+          <a:prstGeom prst="roundRect">
+            <a:avLst>
+              <a:gd name="adj" fmla="val 14286"/>
+            </a:avLst>
+          </a:prstGeom>
+          <a:solidFill>
+            <a:srgbClr val="1A2332"/>
+          </a:solidFill>
+          <a:ln/>
+        </p:spPr>
+      </p:sp>
+      <p:pic>
+        <p:nvPicPr>
+          <p:cNvPr id="8" name="Image 1" descr="preencoded.png">    </p:cNvPr>
+          <p:cNvPicPr>
+            <a:picLocks noChangeAspect="1"/>
+          </p:cNvPicPr>
+          <p:nvPr/>
+        </p:nvPicPr>
+        <p:blipFill>
+          <a:blip r:embed="rId2"/>
+          <a:stretch>
+            <a:fillRect/>
+          </a:stretch>
+        </p:blipFill>
+        <p:spPr>
+          <a:xfrm>
+            <a:off x="5257800" y="1837944"/>
+            <a:ext cx="438912" cy="438912"/>
+          </a:xfrm>
+          <a:prstGeom prst="rect">
+            <a:avLst/>
+          </a:prstGeom>
+        </p:spPr>
+      </p:pic>
+      <p:sp>
+        <p:nvSpPr>
+          <p:cNvPr id="9" name="Text 5"/>
+          <p:cNvSpPr txBox="1"/>
+          <p:nvPr/>
+        </p:nvSpPr>
+        <p:spPr>
+          <a:xfrm>
+            <a:off x="5806440" y="1737360"/>
+            <a:ext cx="2651760" cy="640080"/>
+          </a:xfrm>
+          <a:prstGeom prst="rect">
+            <a:avLst/>
+          </a:prstGeom>
+          <a:noFill/>
+          <a:ln/>
+        </p:spPr>
+        <p:txBody>
+          <a:bodyPr wrap="square" lIns="0" tIns="0" rIns="0" bIns="0" rtlCol="0" anchor="ctr"/>
+          <a:lstStyle/>
+          <a:p>
+            <a:pPr indent="0" marL="0">
+              <a:buNone/>
+            </a:pPr>
+            <a:r>
+              <a:rPr lang="en-US" sz="1200" dirty="0">
                 <a:solidFill>
                   <a:srgbClr val="FFFFFF"/>
                 </a:solidFill>
@@ -2704,90 +3664,9 @@
                 <a:ea typeface="Calibri" pitchFamily="34" charset="-122"/>
                 <a:cs typeface="Calibri" pitchFamily="34" charset="-120"/>
               </a:rPr>
-              <a:t>Les couches 1 (L1) : les blockchains de base (Bitcoin, Ethereum, Solana, Tron, BNB Chain). Chacune a son propre système, ses propres validateurs, sa propre monnaie native.</a:t>
-            </a:r>
-            <a:endParaRPr lang="en-US" sz="1400" dirty="0"/>
-          </a:p>
-          <a:p>
-            <a:pPr marL="342900" indent="-342900">
-              <a:spcAft>
-                <a:spcPts val="800"/>
-              </a:spcAft>
-              <a:buSzPct val="100000"/>
-              <a:buChar char="•"/>
-            </a:pPr>
-            <a:r>
-              <a:rPr lang="en-US" sz="1400" dirty="0">
-                <a:solidFill>
-                  <a:srgbClr val="FFFFFF"/>
-                </a:solidFill>
-                <a:latin typeface="Calibri" pitchFamily="34" charset="0"/>
-                <a:ea typeface="Calibri" pitchFamily="34" charset="-122"/>
-                <a:cs typeface="Calibri" pitchFamily="34" charset="-120"/>
-              </a:rPr>
-              <a:t>Les couches 2 (L2) : des « surcouches » construites au-dessus d'une L1 pour la rendre plus rapide et moins chère. Exemple : Polygon et Arbitrum sont des L2 d'Ethereum.</a:t>
-            </a:r>
-            <a:endParaRPr lang="en-US" sz="1400" dirty="0"/>
-          </a:p>
-          <a:p>
-            <a:pPr marL="342900" indent="-342900">
-              <a:spcAft>
-                <a:spcPts val="800"/>
-              </a:spcAft>
-              <a:buSzPct val="100000"/>
-              <a:buChar char="•"/>
-            </a:pPr>
-            <a:r>
-              <a:rPr lang="en-US" sz="1400" dirty="0">
-                <a:solidFill>
-                  <a:srgbClr val="FFFFFF"/>
-                </a:solidFill>
-                <a:latin typeface="Calibri" pitchFamily="34" charset="0"/>
-                <a:ea typeface="Calibri" pitchFamily="34" charset="-122"/>
-                <a:cs typeface="Calibri" pitchFamily="34" charset="-120"/>
-              </a:rPr>
-              <a:t>Quand vous achetez de l'USDT sur Terex, vous choisirez sur quel réseau vous le recevez : TRC20 (sur Tron), ERC20 (sur Ethereum), BEP20 (sur BNB Chain), etc. On y reviendra en dé...</a:t>
-            </a:r>
-            <a:endParaRPr lang="en-US" sz="1400" dirty="0"/>
-          </a:p>
-        </p:txBody>
-      </p:sp>
-      <p:sp>
-        <p:nvSpPr>
-          <p:cNvPr id="4" name="Text 2"/>
-          <p:cNvSpPr txBox="1"/>
-          <p:nvPr/>
-        </p:nvSpPr>
-        <p:spPr>
-          <a:xfrm>
-            <a:off x="731520" y="4709160"/>
-            <a:ext cx="7680960" cy="274320"/>
-          </a:xfrm>
-          <a:prstGeom prst="rect">
-            <a:avLst/>
-          </a:prstGeom>
-          <a:noFill/>
-          <a:ln/>
-        </p:spPr>
-        <p:txBody>
-          <a:bodyPr wrap="square" lIns="0" tIns="0" rIns="0" bIns="0" rtlCol="0" anchor="ctr"/>
-          <a:lstStyle/>
-          <a:p>
-            <a:pPr algn="r" indent="0" marL="0">
-              <a:buNone/>
-            </a:pPr>
-            <a:r>
-              <a:rPr lang="en-US" sz="900" dirty="0">
-                <a:solidFill>
-                  <a:srgbClr val="64748B"/>
-                </a:solidFill>
-                <a:latin typeface="Calibri" pitchFamily="34" charset="0"/>
-                <a:ea typeface="Calibri" pitchFamily="34" charset="-122"/>
-                <a:cs typeface="Calibri" pitchFamily="34" charset="-120"/>
-              </a:rPr>
-              <a:t>Module 4 — Lecon 3</a:t>
-            </a:r>
-            <a:endParaRPr lang="en-US" sz="900" dirty="0"/>
+              <a:t>Ce processus est ce qui rend impossible de « dépenser deux fois le même argen...</a:t>
+            </a:r>
+            <a:endParaRPr lang="en-US" sz="1200" dirty="0"/>
           </a:p>
         </p:txBody>
       </p:sp>
@@ -2805,7 +3684,7 @@
     <p:bg>
       <p:bgPr>
         <a:solidFill>
-          <a:srgbClr val="1A2332"/>
+          <a:srgbClr val="0D2137"/>
         </a:solidFill>
       </p:bgPr>
     </p:bg>
@@ -2823,15 +3702,105 @@
           <a:chExt cx="0" cy="0"/>
         </a:xfrm>
       </p:grpSpPr>
-      <p:sp>
-        <p:nvSpPr>
-          <p:cNvPr id="2" name="Text 0"/>
+      <p:pic>
+        <p:nvPicPr>
+          <p:cNvPr id="2" name="Image 0" descr="preencoded.png">    </p:cNvPr>
+          <p:cNvPicPr>
+            <a:picLocks noChangeAspect="1"/>
+          </p:cNvPicPr>
+          <p:nvPr/>
+        </p:nvPicPr>
+        <p:blipFill>
+          <a:blip r:embed="rId1"/>
+          <a:stretch>
+            <a:fillRect/>
+          </a:stretch>
+        </p:blipFill>
+        <p:spPr>
+          <a:xfrm>
+            <a:off x="7315200" y="548640"/>
+            <a:ext cx="1280160" cy="1280160"/>
+          </a:xfrm>
+          <a:prstGeom prst="rect">
+            <a:avLst/>
+          </a:prstGeom>
+        </p:spPr>
+      </p:pic>
+      <p:pic>
+        <p:nvPicPr>
+          <p:cNvPr id="3" name="Image 1" descr="preencoded.png">    </p:cNvPr>
+          <p:cNvPicPr>
+            <a:picLocks noChangeAspect="1"/>
+          </p:cNvPicPr>
+          <p:nvPr/>
+        </p:nvPicPr>
+        <p:blipFill>
+          <a:blip r:embed="rId2"/>
+          <a:stretch>
+            <a:fillRect/>
+          </a:stretch>
+        </p:blipFill>
+        <p:spPr>
+          <a:xfrm>
+            <a:off x="7772400" y="2011680"/>
+            <a:ext cx="822960" cy="822960"/>
+          </a:xfrm>
+          <a:prstGeom prst="rect">
+            <a:avLst/>
+          </a:prstGeom>
+        </p:spPr>
+      </p:pic>
+      <p:sp>
+        <p:nvSpPr>
+          <p:cNvPr id="4" name="Shape 0"/>
+          <p:cNvSpPr/>
+          <p:nvPr/>
+        </p:nvSpPr>
+        <p:spPr>
+          <a:xfrm>
+            <a:off x="6583680" y="-274320"/>
+            <a:ext cx="3200400" cy="3200400"/>
+          </a:xfrm>
+          <a:prstGeom prst="ellipse">
+            <a:avLst/>
+          </a:prstGeom>
+          <a:solidFill>
+            <a:srgbClr val="F59E0B">
+              <a:alpha val="6000"/>
+            </a:srgbClr>
+          </a:solidFill>
+          <a:ln/>
+        </p:spPr>
+      </p:sp>
+      <p:sp>
+        <p:nvSpPr>
+          <p:cNvPr id="5" name="Shape 1"/>
+          <p:cNvSpPr/>
+          <p:nvPr/>
+        </p:nvSpPr>
+        <p:spPr>
+          <a:xfrm>
+            <a:off x="731520" y="914400"/>
+            <a:ext cx="45720" cy="2194560"/>
+          </a:xfrm>
+          <a:prstGeom prst="rect">
+            <a:avLst/>
+          </a:prstGeom>
+          <a:solidFill>
+            <a:srgbClr val="F59E0B"/>
+          </a:solidFill>
+          <a:ln/>
+        </p:spPr>
+      </p:sp>
+      <p:sp>
+        <p:nvSpPr>
+          <p:cNvPr id="6" name="Text 2"/>
           <p:cNvSpPr txBox="1"/>
           <p:nvPr/>
         </p:nvSpPr>
         <p:spPr>
           <a:xfrm>
-            <a:off x="731520" y="457200"/>
+            <a:off x="960120" y="914400"/>
             <a:ext cx="2743200" cy="365760"/>
           </a:xfrm>
           <a:prstGeom prst="rect">
@@ -2848,7 +3817,7 @@
               <a:buNone/>
             </a:pPr>
             <a:r>
-              <a:rPr lang="en-US" sz="1200" b="1" spc="300" kern="0" dirty="0">
+              <a:rPr lang="en-US" sz="1200" b="1" spc="200" kern="0" dirty="0">
                 <a:solidFill>
                   <a:srgbClr val="F59E0B"/>
                 </a:solidFill>
@@ -2856,7 +3825,7 @@
                 <a:ea typeface="Calibri" pitchFamily="34" charset="-122"/>
                 <a:cs typeface="Calibri" pitchFamily="34" charset="-120"/>
               </a:rPr>
-              <a:t>A RETENIR</a:t>
+              <a:t>Leçon 3 / 3</a:t>
             </a:r>
             <a:endParaRPr lang="en-US" sz="1200" dirty="0"/>
           </a:p>
@@ -2864,14 +3833,14 @@
       </p:sp>
       <p:sp>
         <p:nvSpPr>
-          <p:cNvPr id="3" name="Text 1"/>
+          <p:cNvPr id="7" name="Text 3"/>
           <p:cNvSpPr txBox="1"/>
           <p:nvPr/>
         </p:nvSpPr>
         <p:spPr>
           <a:xfrm>
-            <a:off x="731520" y="868680"/>
-            <a:ext cx="7680960" cy="502920"/>
+            <a:off x="960120" y="1371600"/>
+            <a:ext cx="6217920" cy="1463040"/>
           </a:xfrm>
           <a:prstGeom prst="rect">
             <a:avLst/>
@@ -2880,14 +3849,14 @@
           <a:ln/>
         </p:spPr>
         <p:txBody>
-          <a:bodyPr wrap="square" lIns="0" tIns="0" rIns="0" bIns="0" rtlCol="0" anchor="ctr"/>
+          <a:bodyPr wrap="square" lIns="0" tIns="0" rIns="0" bIns="0" rtlCol="0" anchor="t"/>
           <a:lstStyle/>
           <a:p>
             <a:pPr indent="0" marL="0">
               <a:buNone/>
             </a:pPr>
             <a:r>
-              <a:rPr lang="en-US" sz="2200" b="1" dirty="0">
+              <a:rPr lang="en-US" sz="2800" b="1" dirty="0">
                 <a:solidFill>
                   <a:srgbClr val="FFFFFF"/>
                 </a:solidFill>
@@ -2897,63 +3866,20 @@
               </a:rPr>
               <a:t>Blockchains publiques vs privées</a:t>
             </a:r>
-            <a:endParaRPr lang="en-US" sz="2200" dirty="0"/>
-          </a:p>
-        </p:txBody>
-      </p:sp>
-      <p:sp>
-        <p:nvSpPr>
-          <p:cNvPr id="4" name="Text 2"/>
+            <a:endParaRPr lang="en-US" sz="2800" dirty="0"/>
+          </a:p>
+        </p:txBody>
+      </p:sp>
+      <p:sp>
+        <p:nvSpPr>
+          <p:cNvPr id="8" name="Text 4"/>
           <p:cNvSpPr txBox="1"/>
           <p:nvPr/>
         </p:nvSpPr>
         <p:spPr>
           <a:xfrm>
-            <a:off x="731520" y="1554480"/>
-            <a:ext cx="457200" cy="548640"/>
-          </a:xfrm>
-          <a:prstGeom prst="roundRect">
-            <a:avLst>
-              <a:gd name="adj" fmla="val 50000"/>
-            </a:avLst>
-          </a:prstGeom>
-          <a:solidFill>
-            <a:srgbClr val="00BFA6"/>
-          </a:solidFill>
-          <a:ln/>
-        </p:spPr>
-        <p:txBody>
-          <a:bodyPr wrap="square" lIns="0" tIns="0" rIns="0" bIns="0" rtlCol="0" anchor="ctr"/>
-          <a:lstStyle/>
-          <a:p>
-            <a:pPr algn="ctr" indent="0" marL="0">
-              <a:buNone/>
-            </a:pPr>
-            <a:r>
-              <a:rPr lang="en-US" sz="1600" b="1" dirty="0">
-                <a:solidFill>
-                  <a:srgbClr val="0F1419"/>
-                </a:solidFill>
-                <a:latin typeface="Calibri" pitchFamily="34" charset="0"/>
-                <a:ea typeface="Calibri" pitchFamily="34" charset="-122"/>
-                <a:cs typeface="Calibri" pitchFamily="34" charset="-120"/>
-              </a:rPr>
-              <a:t>1</a:t>
-            </a:r>
-            <a:endParaRPr lang="en-US" sz="1600" dirty="0"/>
-          </a:p>
-        </p:txBody>
-      </p:sp>
-      <p:sp>
-        <p:nvSpPr>
-          <p:cNvPr id="5" name="Text 3"/>
-          <p:cNvSpPr txBox="1"/>
-          <p:nvPr/>
-        </p:nvSpPr>
-        <p:spPr>
-          <a:xfrm>
-            <a:off x="1371600" y="1554480"/>
-            <a:ext cx="7040880" cy="548640"/>
+            <a:off x="960120" y="4114800"/>
+            <a:ext cx="5486400" cy="320040"/>
           </a:xfrm>
           <a:prstGeom prst="rect">
             <a:avLst/>
@@ -2969,99 +3895,17 @@
               <a:buNone/>
             </a:pPr>
             <a:r>
-              <a:rPr lang="en-US" sz="1400" dirty="0">
-                <a:solidFill>
-                  <a:srgbClr val="FFFFFF"/>
-                </a:solidFill>
-                <a:latin typeface="Calibri" pitchFamily="34" charset="0"/>
-                <a:ea typeface="Calibri" pitchFamily="34" charset="-122"/>
-                <a:cs typeface="Calibri" pitchFamily="34" charset="-120"/>
-              </a:rPr>
-              <a:t>Les couches 1 (L1) : les blockchains de base (Bitcoin, Ethereum, Solana, Tron, BNB Chain). Chacune a son propre système, ses propres validateurs, s...</a:t>
-            </a:r>
-            <a:endParaRPr lang="en-US" sz="1400" dirty="0"/>
-          </a:p>
-        </p:txBody>
-      </p:sp>
-      <p:sp>
-        <p:nvSpPr>
-          <p:cNvPr id="6" name="Text 4"/>
-          <p:cNvSpPr txBox="1"/>
-          <p:nvPr/>
-        </p:nvSpPr>
-        <p:spPr>
-          <a:xfrm>
-            <a:off x="731520" y="2212848"/>
-            <a:ext cx="457200" cy="548640"/>
-          </a:xfrm>
-          <a:prstGeom prst="roundRect">
-            <a:avLst>
-              <a:gd name="adj" fmla="val 50000"/>
-            </a:avLst>
-          </a:prstGeom>
-          <a:solidFill>
-            <a:srgbClr val="00BFA6"/>
-          </a:solidFill>
-          <a:ln/>
-        </p:spPr>
-        <p:txBody>
-          <a:bodyPr wrap="square" lIns="0" tIns="0" rIns="0" bIns="0" rtlCol="0" anchor="ctr"/>
-          <a:lstStyle/>
-          <a:p>
-            <a:pPr algn="ctr" indent="0" marL="0">
-              <a:buNone/>
-            </a:pPr>
-            <a:r>
-              <a:rPr lang="en-US" sz="1600" b="1" dirty="0">
-                <a:solidFill>
-                  <a:srgbClr val="0F1419"/>
-                </a:solidFill>
-                <a:latin typeface="Calibri" pitchFamily="34" charset="0"/>
-                <a:ea typeface="Calibri" pitchFamily="34" charset="-122"/>
-                <a:cs typeface="Calibri" pitchFamily="34" charset="-120"/>
-              </a:rPr>
-              <a:t>2</a:t>
-            </a:r>
-            <a:endParaRPr lang="en-US" sz="1600" dirty="0"/>
-          </a:p>
-        </p:txBody>
-      </p:sp>
-      <p:sp>
-        <p:nvSpPr>
-          <p:cNvPr id="7" name="Text 5"/>
-          <p:cNvSpPr txBox="1"/>
-          <p:nvPr/>
-        </p:nvSpPr>
-        <p:spPr>
-          <a:xfrm>
-            <a:off x="1371600" y="2212848"/>
-            <a:ext cx="7040880" cy="548640"/>
-          </a:xfrm>
-          <a:prstGeom prst="rect">
-            <a:avLst/>
-          </a:prstGeom>
-          <a:noFill/>
-          <a:ln/>
-        </p:spPr>
-        <p:txBody>
-          <a:bodyPr wrap="square" lIns="0" tIns="0" rIns="0" bIns="0" rtlCol="0" anchor="ctr"/>
-          <a:lstStyle/>
-          <a:p>
-            <a:pPr indent="0" marL="0">
-              <a:buNone/>
-            </a:pPr>
-            <a:r>
-              <a:rPr lang="en-US" sz="1400" dirty="0">
-                <a:solidFill>
-                  <a:srgbClr val="FFFFFF"/>
-                </a:solidFill>
-                <a:latin typeface="Calibri" pitchFamily="34" charset="0"/>
-                <a:ea typeface="Calibri" pitchFamily="34" charset="-122"/>
-                <a:cs typeface="Calibri" pitchFamily="34" charset="-120"/>
-              </a:rPr>
-              <a:t>Les couches 2 (L2) : des « surcouches » construites au-dessus d'une L1 pour la rendre plus rapide et moins chère. Exemple : Polygon et Arbitrum son...</a:t>
-            </a:r>
-            <a:endParaRPr lang="en-US" sz="1400" dirty="0"/>
+              <a:rPr lang="en-US" sz="1100" dirty="0">
+                <a:solidFill>
+                  <a:srgbClr val="64748B"/>
+                </a:solidFill>
+                <a:latin typeface="Calibri" pitchFamily="34" charset="0"/>
+                <a:ea typeface="Calibri" pitchFamily="34" charset="-122"/>
+                <a:cs typeface="Calibri" pitchFamily="34" charset="-120"/>
+              </a:rPr>
+              <a:t>Comprendre la blockchain sans jargon</a:t>
+            </a:r>
+            <a:endParaRPr lang="en-US" sz="1100" dirty="0"/>
           </a:p>
         </p:txBody>
       </p:sp>
@@ -3099,19 +3943,1366 @@
       </p:grpSpPr>
       <p:sp>
         <p:nvSpPr>
+          <p:cNvPr id="2" name="Shape 0"/>
+          <p:cNvSpPr/>
+          <p:nvPr/>
+        </p:nvSpPr>
+        <p:spPr>
+          <a:xfrm>
+            <a:off x="7955280" y="182880"/>
+            <a:ext cx="640080" cy="640080"/>
+          </a:xfrm>
+          <a:prstGeom prst="ellipse">
+            <a:avLst/>
+          </a:prstGeom>
+          <a:solidFill>
+            <a:srgbClr val="F59E0B">
+              <a:alpha val="12000"/>
+            </a:srgbClr>
+          </a:solidFill>
+          <a:ln/>
+        </p:spPr>
+      </p:sp>
+      <p:pic>
+        <p:nvPicPr>
+          <p:cNvPr id="3" name="Image 0" descr="preencoded.png">    </p:cNvPr>
+          <p:cNvPicPr>
+            <a:picLocks noChangeAspect="1"/>
+          </p:cNvPicPr>
+          <p:nvPr/>
+        </p:nvPicPr>
+        <p:blipFill>
+          <a:blip r:embed="rId1"/>
+          <a:stretch>
+            <a:fillRect/>
+          </a:stretch>
+        </p:blipFill>
+        <p:spPr>
+          <a:xfrm>
+            <a:off x="8028432" y="256032"/>
+            <a:ext cx="493776" cy="493776"/>
+          </a:xfrm>
+          <a:prstGeom prst="rect">
+            <a:avLst/>
+          </a:prstGeom>
+        </p:spPr>
+      </p:pic>
+      <p:sp>
+        <p:nvSpPr>
+          <p:cNvPr id="4" name="Text 1"/>
+          <p:cNvSpPr txBox="1"/>
+          <p:nvPr/>
+        </p:nvSpPr>
+        <p:spPr>
+          <a:xfrm>
+            <a:off x="731520" y="457200"/>
+            <a:ext cx="7680960" cy="3657600"/>
+          </a:xfrm>
+          <a:prstGeom prst="rect">
+            <a:avLst/>
+          </a:prstGeom>
+          <a:noFill/>
+          <a:ln/>
+        </p:spPr>
+        <p:txBody>
+          <a:bodyPr wrap="square" lIns="0" tIns="0" rIns="0" bIns="0" rtlCol="0" anchor="t"/>
+          <a:lstStyle/>
+          <a:p>
+            <a:pPr marL="342900" indent="-342900">
+              <a:spcAft>
+                <a:spcPts val="800"/>
+              </a:spcAft>
+              <a:buSzPct val="100000"/>
+              <a:buChar char="•"/>
+            </a:pPr>
+            <a:r>
+              <a:rPr lang="en-US" sz="1400" dirty="0">
+                <a:solidFill>
+                  <a:srgbClr val="FFFFFF"/>
+                </a:solidFill>
+                <a:latin typeface="Calibri" pitchFamily="34" charset="0"/>
+                <a:ea typeface="Calibri" pitchFamily="34" charset="-122"/>
+                <a:cs typeface="Calibri" pitchFamily="34" charset="-120"/>
+              </a:rPr>
+              <a:t>Toutes les blockchains ne sont pas égales. Il existe plusieurs grandes familles.</a:t>
+            </a:r>
+            <a:endParaRPr lang="en-US" sz="1400" dirty="0"/>
+          </a:p>
+        </p:txBody>
+      </p:sp>
+      <p:sp>
+        <p:nvSpPr>
+          <p:cNvPr id="5" name="Text 2"/>
+          <p:cNvSpPr txBox="1"/>
+          <p:nvPr/>
+        </p:nvSpPr>
+        <p:spPr>
+          <a:xfrm>
+            <a:off x="731520" y="4709160"/>
+            <a:ext cx="7680960" cy="274320"/>
+          </a:xfrm>
+          <a:prstGeom prst="rect">
+            <a:avLst/>
+          </a:prstGeom>
+          <a:noFill/>
+          <a:ln/>
+        </p:spPr>
+        <p:txBody>
+          <a:bodyPr wrap="square" lIns="0" tIns="0" rIns="0" bIns="0" rtlCol="0" anchor="ctr"/>
+          <a:lstStyle/>
+          <a:p>
+            <a:pPr algn="r" indent="0" marL="0">
+              <a:buNone/>
+            </a:pPr>
+            <a:r>
+              <a:rPr lang="en-US" sz="900" dirty="0">
+                <a:solidFill>
+                  <a:srgbClr val="64748B"/>
+                </a:solidFill>
+                <a:latin typeface="Calibri" pitchFamily="34" charset="0"/>
+                <a:ea typeface="Calibri" pitchFamily="34" charset="-122"/>
+                <a:cs typeface="Calibri" pitchFamily="34" charset="-120"/>
+              </a:rPr>
+              <a:t>Module 4 — Leçon 3</a:t>
+            </a:r>
+            <a:endParaRPr lang="en-US" sz="900" dirty="0"/>
+          </a:p>
+        </p:txBody>
+      </p:sp>
+    </p:spTree>
+  </p:cSld>
+  <p:clrMapOvr>
+    <a:masterClrMapping/>
+  </p:clrMapOvr>
+</p:sld>
+</file>
+
+<file path=ppt/slides/slide15.xml><?xml version="1.0" encoding="utf-8"?>
+<p:sld xmlns:a="http://schemas.openxmlformats.org/drawingml/2006/main" xmlns:r="http://schemas.openxmlformats.org/officeDocument/2006/relationships" xmlns:p="http://schemas.openxmlformats.org/presentationml/2006/main">
+  <p:cSld name="Slide 15">
+    <p:bg>
+      <p:bgPr>
+        <a:solidFill>
+          <a:srgbClr val="0F1419"/>
+        </a:solidFill>
+      </p:bgPr>
+    </p:bg>
+    <p:spTree>
+      <p:nvGrpSpPr>
+        <p:cNvPr id="1" name=""/>
+        <p:cNvGrpSpPr/>
+        <p:nvPr/>
+      </p:nvGrpSpPr>
+      <p:grpSpPr>
+        <a:xfrm>
+          <a:off x="0" y="0"/>
+          <a:ext cx="0" cy="0"/>
+          <a:chOff x="0" y="0"/>
+          <a:chExt cx="0" cy="0"/>
+        </a:xfrm>
+      </p:grpSpPr>
+      <p:sp>
+        <p:nvSpPr>
           <p:cNvPr id="2" name="Text 0"/>
           <p:cNvSpPr txBox="1"/>
           <p:nvPr/>
         </p:nvSpPr>
         <p:spPr>
           <a:xfrm>
-            <a:off x="731520" y="1371600"/>
-            <a:ext cx="7680960" cy="640080"/>
+            <a:off x="731520" y="274320"/>
+            <a:ext cx="7680960" cy="502920"/>
           </a:xfrm>
           <a:prstGeom prst="rect">
             <a:avLst/>
           </a:prstGeom>
           <a:noFill/>
+          <a:ln/>
+        </p:spPr>
+        <p:txBody>
+          <a:bodyPr wrap="square" lIns="0" tIns="0" rIns="0" bIns="0" rtlCol="0" anchor="ctr"/>
+          <a:lstStyle/>
+          <a:p>
+            <a:pPr indent="0" marL="0">
+              <a:buNone/>
+            </a:pPr>
+            <a:r>
+              <a:rPr lang="en-US" sz="2000" b="1" dirty="0">
+                <a:solidFill>
+                  <a:srgbClr val="F59E0B"/>
+                </a:solidFill>
+                <a:latin typeface="Calibri" pitchFamily="34" charset="0"/>
+                <a:ea typeface="Calibri" pitchFamily="34" charset="-122"/>
+                <a:cs typeface="Calibri" pitchFamily="34" charset="-120"/>
+              </a:rPr>
+              <a:t>Les blockchains publiques</a:t>
+            </a:r>
+            <a:endParaRPr lang="en-US" sz="2000" dirty="0"/>
+          </a:p>
+        </p:txBody>
+      </p:sp>
+      <p:sp>
+        <p:nvSpPr>
+          <p:cNvPr id="3" name="Text 1"/>
+          <p:cNvSpPr txBox="1"/>
+          <p:nvPr/>
+        </p:nvSpPr>
+        <p:spPr>
+          <a:xfrm>
+            <a:off x="731520" y="1005840"/>
+            <a:ext cx="4206240" cy="3474720"/>
+          </a:xfrm>
+          <a:prstGeom prst="rect">
+            <a:avLst/>
+          </a:prstGeom>
+          <a:noFill/>
+          <a:ln/>
+        </p:spPr>
+        <p:txBody>
+          <a:bodyPr wrap="square" lIns="0" tIns="0" rIns="0" bIns="0" rtlCol="0" anchor="t"/>
+          <a:lstStyle/>
+          <a:p>
+            <a:pPr marL="342900" indent="-342900">
+              <a:spcAft>
+                <a:spcPts val="600"/>
+              </a:spcAft>
+              <a:buSzPct val="100000"/>
+              <a:buChar char="•"/>
+            </a:pPr>
+            <a:r>
+              <a:rPr lang="en-US" sz="1300" dirty="0">
+                <a:solidFill>
+                  <a:srgbClr val="FFFFFF"/>
+                </a:solidFill>
+                <a:latin typeface="Calibri" pitchFamily="34" charset="0"/>
+                <a:ea typeface="Calibri" pitchFamily="34" charset="-122"/>
+                <a:cs typeface="Calibri" pitchFamily="34" charset="-120"/>
+              </a:rPr>
+              <a:t>Bitcoin, Ethereum, Solana, Tron.</a:t>
+            </a:r>
+            <a:endParaRPr lang="en-US" sz="1300" dirty="0"/>
+          </a:p>
+          <a:p>
+            <a:pPr marL="342900" indent="-342900">
+              <a:spcAft>
+                <a:spcPts val="600"/>
+              </a:spcAft>
+              <a:buSzPct val="100000"/>
+              <a:buChar char="•"/>
+            </a:pPr>
+            <a:r>
+              <a:rPr lang="en-US" sz="1300" dirty="0">
+                <a:solidFill>
+                  <a:srgbClr val="FFFFFF"/>
+                </a:solidFill>
+                <a:latin typeface="Calibri" pitchFamily="34" charset="0"/>
+                <a:ea typeface="Calibri" pitchFamily="34" charset="-122"/>
+                <a:cs typeface="Calibri" pitchFamily="34" charset="-120"/>
+              </a:rPr>
+              <a:t>Tout le monde peut y participer, y lire les transactions, y devenir validateur.</a:t>
+            </a:r>
+            <a:endParaRPr lang="en-US" sz="1300" dirty="0"/>
+          </a:p>
+        </p:txBody>
+      </p:sp>
+      <p:sp>
+        <p:nvSpPr>
+          <p:cNvPr id="4" name="Shape 2"/>
+          <p:cNvSpPr/>
+          <p:nvPr/>
+        </p:nvSpPr>
+        <p:spPr>
+          <a:xfrm>
+            <a:off x="5120640" y="1005840"/>
+            <a:ext cx="3474720" cy="640080"/>
+          </a:xfrm>
+          <a:prstGeom prst="roundRect">
+            <a:avLst>
+              <a:gd name="adj" fmla="val 14286"/>
+            </a:avLst>
+          </a:prstGeom>
+          <a:solidFill>
+            <a:srgbClr val="1A2332"/>
+          </a:solidFill>
+          <a:ln/>
+        </p:spPr>
+      </p:sp>
+      <p:pic>
+        <p:nvPicPr>
+          <p:cNvPr id="5" name="Image 0" descr="preencoded.png">    </p:cNvPr>
+          <p:cNvPicPr>
+            <a:picLocks noChangeAspect="1"/>
+          </p:cNvPicPr>
+          <p:nvPr/>
+        </p:nvPicPr>
+        <p:blipFill>
+          <a:blip r:embed="rId1"/>
+          <a:stretch>
+            <a:fillRect/>
+          </a:stretch>
+        </p:blipFill>
+        <p:spPr>
+          <a:xfrm>
+            <a:off x="5257800" y="1106424"/>
+            <a:ext cx="438912" cy="438912"/>
+          </a:xfrm>
+          <a:prstGeom prst="rect">
+            <a:avLst/>
+          </a:prstGeom>
+        </p:spPr>
+      </p:pic>
+      <p:sp>
+        <p:nvSpPr>
+          <p:cNvPr id="6" name="Text 3"/>
+          <p:cNvSpPr txBox="1"/>
+          <p:nvPr/>
+        </p:nvSpPr>
+        <p:spPr>
+          <a:xfrm>
+            <a:off x="5806440" y="1005840"/>
+            <a:ext cx="2651760" cy="640080"/>
+          </a:xfrm>
+          <a:prstGeom prst="rect">
+            <a:avLst/>
+          </a:prstGeom>
+          <a:noFill/>
+          <a:ln/>
+        </p:spPr>
+        <p:txBody>
+          <a:bodyPr wrap="square" lIns="0" tIns="0" rIns="0" bIns="0" rtlCol="0" anchor="ctr"/>
+          <a:lstStyle/>
+          <a:p>
+            <a:pPr indent="0" marL="0">
+              <a:buNone/>
+            </a:pPr>
+            <a:r>
+              <a:rPr lang="en-US" sz="1200" dirty="0">
+                <a:solidFill>
+                  <a:srgbClr val="FFFFFF"/>
+                </a:solidFill>
+                <a:latin typeface="Calibri" pitchFamily="34" charset="0"/>
+                <a:ea typeface="Calibri" pitchFamily="34" charset="-122"/>
+                <a:cs typeface="Calibri" pitchFamily="34" charset="-120"/>
+              </a:rPr>
+              <a:t>Elles sont ouvertes, censurables par personne.</a:t>
+            </a:r>
+            <a:endParaRPr lang="en-US" sz="1200" dirty="0"/>
+          </a:p>
+        </p:txBody>
+      </p:sp>
+      <p:sp>
+        <p:nvSpPr>
+          <p:cNvPr id="7" name="Shape 4"/>
+          <p:cNvSpPr/>
+          <p:nvPr/>
+        </p:nvSpPr>
+        <p:spPr>
+          <a:xfrm>
+            <a:off x="5120640" y="1737360"/>
+            <a:ext cx="3474720" cy="640080"/>
+          </a:xfrm>
+          <a:prstGeom prst="roundRect">
+            <a:avLst>
+              <a:gd name="adj" fmla="val 14286"/>
+            </a:avLst>
+          </a:prstGeom>
+          <a:solidFill>
+            <a:srgbClr val="1A2332"/>
+          </a:solidFill>
+          <a:ln/>
+        </p:spPr>
+      </p:sp>
+      <p:pic>
+        <p:nvPicPr>
+          <p:cNvPr id="8" name="Image 1" descr="preencoded.png">    </p:cNvPr>
+          <p:cNvPicPr>
+            <a:picLocks noChangeAspect="1"/>
+          </p:cNvPicPr>
+          <p:nvPr/>
+        </p:nvPicPr>
+        <p:blipFill>
+          <a:blip r:embed="rId2"/>
+          <a:stretch>
+            <a:fillRect/>
+          </a:stretch>
+        </p:blipFill>
+        <p:spPr>
+          <a:xfrm>
+            <a:off x="5257800" y="1837944"/>
+            <a:ext cx="438912" cy="438912"/>
+          </a:xfrm>
+          <a:prstGeom prst="rect">
+            <a:avLst/>
+          </a:prstGeom>
+        </p:spPr>
+      </p:pic>
+      <p:sp>
+        <p:nvSpPr>
+          <p:cNvPr id="9" name="Text 5"/>
+          <p:cNvSpPr txBox="1"/>
+          <p:nvPr/>
+        </p:nvSpPr>
+        <p:spPr>
+          <a:xfrm>
+            <a:off x="5806440" y="1737360"/>
+            <a:ext cx="2651760" cy="640080"/>
+          </a:xfrm>
+          <a:prstGeom prst="rect">
+            <a:avLst/>
+          </a:prstGeom>
+          <a:noFill/>
+          <a:ln/>
+        </p:spPr>
+        <p:txBody>
+          <a:bodyPr wrap="square" lIns="0" tIns="0" rIns="0" bIns="0" rtlCol="0" anchor="ctr"/>
+          <a:lstStyle/>
+          <a:p>
+            <a:pPr indent="0" marL="0">
+              <a:buNone/>
+            </a:pPr>
+            <a:r>
+              <a:rPr lang="en-US" sz="1200" dirty="0">
+                <a:solidFill>
+                  <a:srgbClr val="FFFFFF"/>
+                </a:solidFill>
+                <a:latin typeface="Calibri" pitchFamily="34" charset="0"/>
+                <a:ea typeface="Calibri" pitchFamily="34" charset="-122"/>
+                <a:cs typeface="Calibri" pitchFamily="34" charset="-120"/>
+              </a:rPr>
+              <a:t>Ce sont celles qui portent l'esprit originel de la crypto.</a:t>
+            </a:r>
+            <a:endParaRPr lang="en-US" sz="1200" dirty="0"/>
+          </a:p>
+        </p:txBody>
+      </p:sp>
+    </p:spTree>
+  </p:cSld>
+  <p:clrMapOvr>
+    <a:masterClrMapping/>
+  </p:clrMapOvr>
+</p:sld>
+</file>
+
+<file path=ppt/slides/slide16.xml><?xml version="1.0" encoding="utf-8"?>
+<p:sld xmlns:a="http://schemas.openxmlformats.org/drawingml/2006/main" xmlns:r="http://schemas.openxmlformats.org/officeDocument/2006/relationships" xmlns:p="http://schemas.openxmlformats.org/presentationml/2006/main">
+  <p:cSld name="Slide 16">
+    <p:bg>
+      <p:bgPr>
+        <a:solidFill>
+          <a:srgbClr val="0F1419"/>
+        </a:solidFill>
+      </p:bgPr>
+    </p:bg>
+    <p:spTree>
+      <p:nvGrpSpPr>
+        <p:cNvPr id="1" name=""/>
+        <p:cNvGrpSpPr/>
+        <p:nvPr/>
+      </p:nvGrpSpPr>
+      <p:grpSpPr>
+        <a:xfrm>
+          <a:off x="0" y="0"/>
+          <a:ext cx="0" cy="0"/>
+          <a:chOff x="0" y="0"/>
+          <a:chExt cx="0" cy="0"/>
+        </a:xfrm>
+      </p:grpSpPr>
+      <p:sp>
+        <p:nvSpPr>
+          <p:cNvPr id="2" name="Text 0"/>
+          <p:cNvSpPr txBox="1"/>
+          <p:nvPr/>
+        </p:nvSpPr>
+        <p:spPr>
+          <a:xfrm>
+            <a:off x="731520" y="274320"/>
+            <a:ext cx="7680960" cy="502920"/>
+          </a:xfrm>
+          <a:prstGeom prst="rect">
+            <a:avLst/>
+          </a:prstGeom>
+          <a:noFill/>
+          <a:ln/>
+        </p:spPr>
+        <p:txBody>
+          <a:bodyPr wrap="square" lIns="0" tIns="0" rIns="0" bIns="0" rtlCol="0" anchor="ctr"/>
+          <a:lstStyle/>
+          <a:p>
+            <a:pPr indent="0" marL="0">
+              <a:buNone/>
+            </a:pPr>
+            <a:r>
+              <a:rPr lang="en-US" sz="2000" b="1" dirty="0">
+                <a:solidFill>
+                  <a:srgbClr val="F59E0B"/>
+                </a:solidFill>
+                <a:latin typeface="Calibri" pitchFamily="34" charset="0"/>
+                <a:ea typeface="Calibri" pitchFamily="34" charset="-122"/>
+                <a:cs typeface="Calibri" pitchFamily="34" charset="-120"/>
+              </a:rPr>
+              <a:t>Les blockchains privées (ou permissionnées)</a:t>
+            </a:r>
+            <a:endParaRPr lang="en-US" sz="2000" dirty="0"/>
+          </a:p>
+        </p:txBody>
+      </p:sp>
+      <p:sp>
+        <p:nvSpPr>
+          <p:cNvPr id="3" name="Shape 1"/>
+          <p:cNvSpPr/>
+          <p:nvPr/>
+        </p:nvSpPr>
+        <p:spPr>
+          <a:xfrm>
+            <a:off x="731520" y="1005840"/>
+            <a:ext cx="3657600" cy="1371600"/>
+          </a:xfrm>
+          <a:prstGeom prst="roundRect">
+            <a:avLst>
+              <a:gd name="adj" fmla="val 6667"/>
+            </a:avLst>
+          </a:prstGeom>
+          <a:solidFill>
+            <a:srgbClr val="1A2332"/>
+          </a:solidFill>
+          <a:ln/>
+        </p:spPr>
+      </p:sp>
+      <p:pic>
+        <p:nvPicPr>
+          <p:cNvPr id="4" name="Image 0" descr="preencoded.png">    </p:cNvPr>
+          <p:cNvPicPr>
+            <a:picLocks noChangeAspect="1"/>
+          </p:cNvPicPr>
+          <p:nvPr/>
+        </p:nvPicPr>
+        <p:blipFill>
+          <a:blip r:embed="rId1"/>
+          <a:stretch>
+            <a:fillRect/>
+          </a:stretch>
+        </p:blipFill>
+        <p:spPr>
+          <a:xfrm>
+            <a:off x="868680" y="1143000"/>
+            <a:ext cx="502920" cy="502920"/>
+          </a:xfrm>
+          <a:prstGeom prst="rect">
+            <a:avLst/>
+          </a:prstGeom>
+        </p:spPr>
+      </p:pic>
+      <p:sp>
+        <p:nvSpPr>
+          <p:cNvPr id="5" name="Text 2"/>
+          <p:cNvSpPr txBox="1"/>
+          <p:nvPr/>
+        </p:nvSpPr>
+        <p:spPr>
+          <a:xfrm>
+            <a:off x="868680" y="1719072"/>
+            <a:ext cx="3383280" cy="320040"/>
+          </a:xfrm>
+          <a:prstGeom prst="rect">
+            <a:avLst/>
+          </a:prstGeom>
+          <a:noFill/>
+          <a:ln/>
+        </p:spPr>
+        <p:txBody>
+          <a:bodyPr wrap="square" lIns="0" tIns="0" rIns="0" bIns="0" rtlCol="0" anchor="t"/>
+          <a:lstStyle/>
+          <a:p>
+            <a:pPr indent="0" marL="0">
+              <a:buNone/>
+            </a:pPr>
+            <a:r>
+              <a:rPr lang="en-US" sz="1100" b="1" dirty="0">
+                <a:solidFill>
+                  <a:srgbClr val="FFFFFF"/>
+                </a:solidFill>
+                <a:latin typeface="Calibri" pitchFamily="34" charset="0"/>
+                <a:ea typeface="Calibri" pitchFamily="34" charset="-122"/>
+                <a:cs typeface="Calibri" pitchFamily="34" charset="-120"/>
+              </a:rPr>
+              <a:t>Souvent utilisées par des entreprises ou des consortiums ...</a:t>
+            </a:r>
+            <a:endParaRPr lang="en-US" sz="1100" dirty="0"/>
+          </a:p>
+        </p:txBody>
+      </p:sp>
+      <p:sp>
+        <p:nvSpPr>
+          <p:cNvPr id="6" name="Shape 3"/>
+          <p:cNvSpPr/>
+          <p:nvPr/>
+        </p:nvSpPr>
+        <p:spPr>
+          <a:xfrm>
+            <a:off x="4754880" y="1005840"/>
+            <a:ext cx="3657600" cy="1371600"/>
+          </a:xfrm>
+          <a:prstGeom prst="roundRect">
+            <a:avLst>
+              <a:gd name="adj" fmla="val 6667"/>
+            </a:avLst>
+          </a:prstGeom>
+          <a:solidFill>
+            <a:srgbClr val="1A2332"/>
+          </a:solidFill>
+          <a:ln/>
+        </p:spPr>
+      </p:sp>
+      <p:pic>
+        <p:nvPicPr>
+          <p:cNvPr id="7" name="Image 1" descr="preencoded.png">    </p:cNvPr>
+          <p:cNvPicPr>
+            <a:picLocks noChangeAspect="1"/>
+          </p:cNvPicPr>
+          <p:nvPr/>
+        </p:nvPicPr>
+        <p:blipFill>
+          <a:blip r:embed="rId2"/>
+          <a:stretch>
+            <a:fillRect/>
+          </a:stretch>
+        </p:blipFill>
+        <p:spPr>
+          <a:xfrm>
+            <a:off x="4892040" y="1143000"/>
+            <a:ext cx="502920" cy="502920"/>
+          </a:xfrm>
+          <a:prstGeom prst="rect">
+            <a:avLst/>
+          </a:prstGeom>
+        </p:spPr>
+      </p:pic>
+      <p:sp>
+        <p:nvSpPr>
+          <p:cNvPr id="8" name="Text 4"/>
+          <p:cNvSpPr txBox="1"/>
+          <p:nvPr/>
+        </p:nvSpPr>
+        <p:spPr>
+          <a:xfrm>
+            <a:off x="4892040" y="1719072"/>
+            <a:ext cx="3383280" cy="320040"/>
+          </a:xfrm>
+          <a:prstGeom prst="rect">
+            <a:avLst/>
+          </a:prstGeom>
+          <a:noFill/>
+          <a:ln/>
+        </p:spPr>
+        <p:txBody>
+          <a:bodyPr wrap="square" lIns="0" tIns="0" rIns="0" bIns="0" rtlCol="0" anchor="t"/>
+          <a:lstStyle/>
+          <a:p>
+            <a:pPr indent="0" marL="0">
+              <a:buNone/>
+            </a:pPr>
+            <a:r>
+              <a:rPr lang="en-US" sz="1100" b="1" dirty="0">
+                <a:solidFill>
+                  <a:srgbClr val="FFFFFF"/>
+                </a:solidFill>
+                <a:latin typeface="Calibri" pitchFamily="34" charset="0"/>
+                <a:ea typeface="Calibri" pitchFamily="34" charset="-122"/>
+                <a:cs typeface="Calibri" pitchFamily="34" charset="-120"/>
+              </a:rPr>
+              <a:t>Seuls des acteurs autorisés peuvent y participer.</a:t>
+            </a:r>
+            <a:endParaRPr lang="en-US" sz="1100" dirty="0"/>
+          </a:p>
+        </p:txBody>
+      </p:sp>
+      <p:sp>
+        <p:nvSpPr>
+          <p:cNvPr id="9" name="Shape 5"/>
+          <p:cNvSpPr/>
+          <p:nvPr/>
+        </p:nvSpPr>
+        <p:spPr>
+          <a:xfrm>
+            <a:off x="731520" y="2514600"/>
+            <a:ext cx="3657600" cy="1371600"/>
+          </a:xfrm>
+          <a:prstGeom prst="roundRect">
+            <a:avLst>
+              <a:gd name="adj" fmla="val 6667"/>
+            </a:avLst>
+          </a:prstGeom>
+          <a:solidFill>
+            <a:srgbClr val="1A2332"/>
+          </a:solidFill>
+          <a:ln/>
+        </p:spPr>
+      </p:sp>
+      <p:pic>
+        <p:nvPicPr>
+          <p:cNvPr id="10" name="Image 2" descr="preencoded.png">    </p:cNvPr>
+          <p:cNvPicPr>
+            <a:picLocks noChangeAspect="1"/>
+          </p:cNvPicPr>
+          <p:nvPr/>
+        </p:nvPicPr>
+        <p:blipFill>
+          <a:blip r:embed="rId3"/>
+          <a:stretch>
+            <a:fillRect/>
+          </a:stretch>
+        </p:blipFill>
+        <p:spPr>
+          <a:xfrm>
+            <a:off x="868680" y="2651760"/>
+            <a:ext cx="502920" cy="502920"/>
+          </a:xfrm>
+          <a:prstGeom prst="rect">
+            <a:avLst/>
+          </a:prstGeom>
+        </p:spPr>
+      </p:pic>
+      <p:sp>
+        <p:nvSpPr>
+          <p:cNvPr id="11" name="Text 6"/>
+          <p:cNvSpPr txBox="1"/>
+          <p:nvPr/>
+        </p:nvSpPr>
+        <p:spPr>
+          <a:xfrm>
+            <a:off x="868680" y="3227832"/>
+            <a:ext cx="3383280" cy="320040"/>
+          </a:xfrm>
+          <a:prstGeom prst="rect">
+            <a:avLst/>
+          </a:prstGeom>
+          <a:noFill/>
+          <a:ln/>
+        </p:spPr>
+        <p:txBody>
+          <a:bodyPr wrap="square" lIns="0" tIns="0" rIns="0" bIns="0" rtlCol="0" anchor="t"/>
+          <a:lstStyle/>
+          <a:p>
+            <a:pPr indent="0" marL="0">
+              <a:buNone/>
+            </a:pPr>
+            <a:r>
+              <a:rPr lang="en-US" sz="1100" b="1" dirty="0">
+                <a:solidFill>
+                  <a:srgbClr val="FFFFFF"/>
+                </a:solidFill>
+                <a:latin typeface="Calibri" pitchFamily="34" charset="0"/>
+                <a:ea typeface="Calibri" pitchFamily="34" charset="-122"/>
+                <a:cs typeface="Calibri" pitchFamily="34" charset="-120"/>
+              </a:rPr>
+              <a:t>Elles gardent certains bénéfices (traçabilité, automatisa...</a:t>
+            </a:r>
+            <a:endParaRPr lang="en-US" sz="1100" dirty="0"/>
+          </a:p>
+        </p:txBody>
+      </p:sp>
+      <p:sp>
+        <p:nvSpPr>
+          <p:cNvPr id="12" name="Text 7"/>
+          <p:cNvSpPr txBox="1"/>
+          <p:nvPr/>
+        </p:nvSpPr>
+        <p:spPr>
+          <a:xfrm>
+            <a:off x="868680" y="3520440"/>
+            <a:ext cx="3383280" cy="274320"/>
+          </a:xfrm>
+          <a:prstGeom prst="rect">
+            <a:avLst/>
+          </a:prstGeom>
+          <a:noFill/>
+          <a:ln/>
+        </p:spPr>
+        <p:txBody>
+          <a:bodyPr wrap="square" lIns="0" tIns="0" rIns="0" bIns="0" rtlCol="0" anchor="t"/>
+          <a:lstStyle/>
+          <a:p>
+            <a:pPr indent="0" marL="0">
+              <a:buNone/>
+            </a:pPr>
+            <a:r>
+              <a:rPr lang="en-US" sz="900" dirty="0">
+                <a:solidFill>
+                  <a:srgbClr val="94A3B8"/>
+                </a:solidFill>
+                <a:latin typeface="Calibri" pitchFamily="34" charset="0"/>
+                <a:ea typeface="Calibri" pitchFamily="34" charset="-122"/>
+                <a:cs typeface="Calibri" pitchFamily="34" charset="-120"/>
+              </a:rPr>
+              <a:t>rdent la décentralisation.</a:t>
+            </a:r>
+            <a:endParaRPr lang="en-US" sz="900" dirty="0"/>
+          </a:p>
+        </p:txBody>
+      </p:sp>
+      <p:sp>
+        <p:nvSpPr>
+          <p:cNvPr id="13" name="Shape 8"/>
+          <p:cNvSpPr/>
+          <p:nvPr/>
+        </p:nvSpPr>
+        <p:spPr>
+          <a:xfrm>
+            <a:off x="4754880" y="2514600"/>
+            <a:ext cx="3657600" cy="1371600"/>
+          </a:xfrm>
+          <a:prstGeom prst="roundRect">
+            <a:avLst>
+              <a:gd name="adj" fmla="val 6667"/>
+            </a:avLst>
+          </a:prstGeom>
+          <a:solidFill>
+            <a:srgbClr val="1A2332"/>
+          </a:solidFill>
+          <a:ln/>
+        </p:spPr>
+      </p:sp>
+      <p:pic>
+        <p:nvPicPr>
+          <p:cNvPr id="14" name="Image 3" descr="preencoded.png">    </p:cNvPr>
+          <p:cNvPicPr>
+            <a:picLocks noChangeAspect="1"/>
+          </p:cNvPicPr>
+          <p:nvPr/>
+        </p:nvPicPr>
+        <p:blipFill>
+          <a:blip r:embed="rId4"/>
+          <a:stretch>
+            <a:fillRect/>
+          </a:stretch>
+        </p:blipFill>
+        <p:spPr>
+          <a:xfrm>
+            <a:off x="4892040" y="2651760"/>
+            <a:ext cx="502920" cy="502920"/>
+          </a:xfrm>
+          <a:prstGeom prst="rect">
+            <a:avLst/>
+          </a:prstGeom>
+        </p:spPr>
+      </p:pic>
+      <p:sp>
+        <p:nvSpPr>
+          <p:cNvPr id="15" name="Text 9"/>
+          <p:cNvSpPr txBox="1"/>
+          <p:nvPr/>
+        </p:nvSpPr>
+        <p:spPr>
+          <a:xfrm>
+            <a:off x="4892040" y="3227832"/>
+            <a:ext cx="3383280" cy="320040"/>
+          </a:xfrm>
+          <a:prstGeom prst="rect">
+            <a:avLst/>
+          </a:prstGeom>
+          <a:noFill/>
+          <a:ln/>
+        </p:spPr>
+        <p:txBody>
+          <a:bodyPr wrap="square" lIns="0" tIns="0" rIns="0" bIns="0" rtlCol="0" anchor="t"/>
+          <a:lstStyle/>
+          <a:p>
+            <a:pPr indent="0" marL="0">
+              <a:buNone/>
+            </a:pPr>
+            <a:r>
+              <a:rPr lang="en-US" sz="1100" b="1" dirty="0">
+                <a:solidFill>
+                  <a:srgbClr val="FFFFFF"/>
+                </a:solidFill>
+                <a:latin typeface="Calibri" pitchFamily="34" charset="0"/>
+                <a:ea typeface="Calibri" pitchFamily="34" charset="-122"/>
+                <a:cs typeface="Calibri" pitchFamily="34" charset="-120"/>
+              </a:rPr>
+              <a:t>Exemples : Hyperledger, Corda.</a:t>
+            </a:r>
+            <a:endParaRPr lang="en-US" sz="1100" dirty="0"/>
+          </a:p>
+        </p:txBody>
+      </p:sp>
+    </p:spTree>
+  </p:cSld>
+  <p:clrMapOvr>
+    <a:masterClrMapping/>
+  </p:clrMapOvr>
+</p:sld>
+</file>
+
+<file path=ppt/slides/slide17.xml><?xml version="1.0" encoding="utf-8"?>
+<p:sld xmlns:a="http://schemas.openxmlformats.org/drawingml/2006/main" xmlns:r="http://schemas.openxmlformats.org/officeDocument/2006/relationships" xmlns:p="http://schemas.openxmlformats.org/presentationml/2006/main">
+  <p:cSld name="Slide 17">
+    <p:bg>
+      <p:bgPr>
+        <a:solidFill>
+          <a:srgbClr val="0F1419"/>
+        </a:solidFill>
+      </p:bgPr>
+    </p:bg>
+    <p:spTree>
+      <p:nvGrpSpPr>
+        <p:cNvPr id="1" name=""/>
+        <p:cNvGrpSpPr/>
+        <p:nvPr/>
+      </p:nvGrpSpPr>
+      <p:grpSpPr>
+        <a:xfrm>
+          <a:off x="0" y="0"/>
+          <a:ext cx="0" cy="0"/>
+          <a:chOff x="0" y="0"/>
+          <a:chExt cx="0" cy="0"/>
+        </a:xfrm>
+      </p:grpSpPr>
+      <p:sp>
+        <p:nvSpPr>
+          <p:cNvPr id="2" name="Shape 0"/>
+          <p:cNvSpPr/>
+          <p:nvPr/>
+        </p:nvSpPr>
+        <p:spPr>
+          <a:xfrm>
+            <a:off x="7955280" y="182880"/>
+            <a:ext cx="640080" cy="640080"/>
+          </a:xfrm>
+          <a:prstGeom prst="ellipse">
+            <a:avLst/>
+          </a:prstGeom>
+          <a:solidFill>
+            <a:srgbClr val="F59E0B">
+              <a:alpha val="12000"/>
+            </a:srgbClr>
+          </a:solidFill>
+          <a:ln/>
+        </p:spPr>
+      </p:sp>
+      <p:pic>
+        <p:nvPicPr>
+          <p:cNvPr id="3" name="Image 0" descr="preencoded.png">    </p:cNvPr>
+          <p:cNvPicPr>
+            <a:picLocks noChangeAspect="1"/>
+          </p:cNvPicPr>
+          <p:nvPr/>
+        </p:nvPicPr>
+        <p:blipFill>
+          <a:blip r:embed="rId1"/>
+          <a:stretch>
+            <a:fillRect/>
+          </a:stretch>
+        </p:blipFill>
+        <p:spPr>
+          <a:xfrm>
+            <a:off x="8028432" y="256032"/>
+            <a:ext cx="493776" cy="493776"/>
+          </a:xfrm>
+          <a:prstGeom prst="rect">
+            <a:avLst/>
+          </a:prstGeom>
+        </p:spPr>
+      </p:pic>
+      <p:sp>
+        <p:nvSpPr>
+          <p:cNvPr id="4" name="Text 1"/>
+          <p:cNvSpPr txBox="1"/>
+          <p:nvPr/>
+        </p:nvSpPr>
+        <p:spPr>
+          <a:xfrm>
+            <a:off x="731520" y="274320"/>
+            <a:ext cx="7132320" cy="502920"/>
+          </a:xfrm>
+          <a:prstGeom prst="rect">
+            <a:avLst/>
+          </a:prstGeom>
+          <a:noFill/>
+          <a:ln/>
+        </p:spPr>
+        <p:txBody>
+          <a:bodyPr wrap="square" lIns="0" tIns="0" rIns="0" bIns="0" rtlCol="0" anchor="ctr"/>
+          <a:lstStyle/>
+          <a:p>
+            <a:pPr indent="0" marL="0">
+              <a:buNone/>
+            </a:pPr>
+            <a:r>
+              <a:rPr lang="en-US" sz="2000" b="1" dirty="0">
+                <a:solidFill>
+                  <a:srgbClr val="F59E0B"/>
+                </a:solidFill>
+                <a:latin typeface="Calibri" pitchFamily="34" charset="0"/>
+                <a:ea typeface="Calibri" pitchFamily="34" charset="-122"/>
+                <a:cs typeface="Calibri" pitchFamily="34" charset="-120"/>
+              </a:rPr>
+              <a:t>Les blockchains hybrides</a:t>
+            </a:r>
+            <a:endParaRPr lang="en-US" sz="2000" dirty="0"/>
+          </a:p>
+        </p:txBody>
+      </p:sp>
+      <p:sp>
+        <p:nvSpPr>
+          <p:cNvPr id="5" name="Text 2"/>
+          <p:cNvSpPr txBox="1"/>
+          <p:nvPr/>
+        </p:nvSpPr>
+        <p:spPr>
+          <a:xfrm>
+            <a:off x="731520" y="960120"/>
+            <a:ext cx="7680960" cy="3657600"/>
+          </a:xfrm>
+          <a:prstGeom prst="rect">
+            <a:avLst/>
+          </a:prstGeom>
+          <a:noFill/>
+          <a:ln/>
+        </p:spPr>
+        <p:txBody>
+          <a:bodyPr wrap="square" lIns="0" tIns="0" rIns="0" bIns="0" rtlCol="0" anchor="t"/>
+          <a:lstStyle/>
+          <a:p>
+            <a:pPr marL="342900" indent="-342900">
+              <a:spcAft>
+                <a:spcPts val="800"/>
+              </a:spcAft>
+              <a:buSzPct val="100000"/>
+              <a:buChar char="•"/>
+            </a:pPr>
+            <a:r>
+              <a:rPr lang="en-US" sz="1400" dirty="0">
+                <a:solidFill>
+                  <a:srgbClr val="FFFFFF"/>
+                </a:solidFill>
+                <a:latin typeface="Calibri" pitchFamily="34" charset="0"/>
+                <a:ea typeface="Calibri" pitchFamily="34" charset="-122"/>
+                <a:cs typeface="Calibri" pitchFamily="34" charset="-120"/>
+              </a:rPr>
+              <a:t>Elles combinent une couche publique et une couche privée. Utilisées par exemple par des banques centrales pour tester des monnaies numériques (CBDC).</a:t>
+            </a:r>
+            <a:endParaRPr lang="en-US" sz="1400" dirty="0"/>
+          </a:p>
+          <a:p>
+            <a:pPr marL="342900" indent="-342900">
+              <a:spcAft>
+                <a:spcPts val="800"/>
+              </a:spcAft>
+              <a:buSzPct val="100000"/>
+              <a:buChar char="•"/>
+            </a:pPr>
+            <a:r>
+              <a:rPr lang="en-US" sz="1400" dirty="0">
+                <a:solidFill>
+                  <a:srgbClr val="FFFFFF"/>
+                </a:solidFill>
+                <a:latin typeface="Calibri" pitchFamily="34" charset="0"/>
+                <a:ea typeface="Calibri" pitchFamily="34" charset="-122"/>
+                <a:cs typeface="Calibri" pitchFamily="34" charset="-120"/>
+              </a:rPr>
+              <a:t>Pour vous en tant qu'utilisateur crypto, ce sont uniquement les blockchains publiques qui comptent. Ce sont elles qui hébergent Bitcoin, Ethereum, USDT, et tous les actifs que v...</a:t>
+            </a:r>
+            <a:endParaRPr lang="en-US" sz="1400" dirty="0"/>
+          </a:p>
+          <a:p>
+            <a:pPr marL="342900" indent="-342900">
+              <a:spcAft>
+                <a:spcPts val="800"/>
+              </a:spcAft>
+              <a:buSzPct val="100000"/>
+              <a:buChar char="•"/>
+            </a:pPr>
+            <a:r>
+              <a:rPr lang="en-US" sz="1400" dirty="0">
+                <a:solidFill>
+                  <a:srgbClr val="FFFFFF"/>
+                </a:solidFill>
+                <a:latin typeface="Calibri" pitchFamily="34" charset="0"/>
+                <a:ea typeface="Calibri" pitchFamily="34" charset="-122"/>
+                <a:cs typeface="Calibri" pitchFamily="34" charset="-120"/>
+              </a:rPr>
+              <a:t>Parmi les publiques, on distingue deux grandes catégories techniques :</a:t>
+            </a:r>
+            <a:endParaRPr lang="en-US" sz="1400" dirty="0"/>
+          </a:p>
+          <a:p>
+            <a:pPr marL="342900" indent="-342900">
+              <a:spcAft>
+                <a:spcPts val="800"/>
+              </a:spcAft>
+              <a:buSzPct val="100000"/>
+              <a:buChar char="•"/>
+            </a:pPr>
+            <a:r>
+              <a:rPr lang="en-US" sz="1400" dirty="0">
+                <a:solidFill>
+                  <a:srgbClr val="FFFFFF"/>
+                </a:solidFill>
+                <a:latin typeface="Calibri" pitchFamily="34" charset="0"/>
+                <a:ea typeface="Calibri" pitchFamily="34" charset="-122"/>
+                <a:cs typeface="Calibri" pitchFamily="34" charset="-120"/>
+              </a:rPr>
+              <a:t>Les couches 1 (L1) : les blockchains de base (Bitcoin, Ethereum, Solana, Tron, BNB Chain). Chacune a son propre système, ses propres validateurs, sa propre monnaie native.</a:t>
+            </a:r>
+            <a:endParaRPr lang="en-US" sz="1400" dirty="0"/>
+          </a:p>
+          <a:p>
+            <a:pPr marL="342900" indent="-342900">
+              <a:spcAft>
+                <a:spcPts val="800"/>
+              </a:spcAft>
+              <a:buSzPct val="100000"/>
+              <a:buChar char="•"/>
+            </a:pPr>
+            <a:r>
+              <a:rPr lang="en-US" sz="1400" dirty="0">
+                <a:solidFill>
+                  <a:srgbClr val="FFFFFF"/>
+                </a:solidFill>
+                <a:latin typeface="Calibri" pitchFamily="34" charset="0"/>
+                <a:ea typeface="Calibri" pitchFamily="34" charset="-122"/>
+                <a:cs typeface="Calibri" pitchFamily="34" charset="-120"/>
+              </a:rPr>
+              <a:t>Les couches 2 (L2) : des « surcouches » construites au-dessus d'une L1 pour la rendre plus rapide et moins chère. Exemple : Polygon et Arbitrum sont des L2 d'Ethereum.</a:t>
+            </a:r>
+            <a:endParaRPr lang="en-US" sz="1400" dirty="0"/>
+          </a:p>
+          <a:p>
+            <a:pPr marL="342900" indent="-342900">
+              <a:spcAft>
+                <a:spcPts val="800"/>
+              </a:spcAft>
+              <a:buSzPct val="100000"/>
+              <a:buChar char="•"/>
+            </a:pPr>
+            <a:r>
+              <a:rPr lang="en-US" sz="1400" dirty="0">
+                <a:solidFill>
+                  <a:srgbClr val="FFFFFF"/>
+                </a:solidFill>
+                <a:latin typeface="Calibri" pitchFamily="34" charset="0"/>
+                <a:ea typeface="Calibri" pitchFamily="34" charset="-122"/>
+                <a:cs typeface="Calibri" pitchFamily="34" charset="-120"/>
+              </a:rPr>
+              <a:t>Quand vous achetez de l'USDT sur Terex, vous choisirez sur quel réseau vous le recevez : TRC20 (sur Tron), ERC20 (sur Ethereum), BEP20 (sur BNB Chain), etc. On y reviendra en dé...</a:t>
+            </a:r>
+            <a:endParaRPr lang="en-US" sz="1400" dirty="0"/>
+          </a:p>
+        </p:txBody>
+      </p:sp>
+      <p:sp>
+        <p:nvSpPr>
+          <p:cNvPr id="6" name="Text 3"/>
+          <p:cNvSpPr txBox="1"/>
+          <p:nvPr/>
+        </p:nvSpPr>
+        <p:spPr>
+          <a:xfrm>
+            <a:off x="731520" y="4709160"/>
+            <a:ext cx="7680960" cy="274320"/>
+          </a:xfrm>
+          <a:prstGeom prst="rect">
+            <a:avLst/>
+          </a:prstGeom>
+          <a:noFill/>
+          <a:ln/>
+        </p:spPr>
+        <p:txBody>
+          <a:bodyPr wrap="square" lIns="0" tIns="0" rIns="0" bIns="0" rtlCol="0" anchor="ctr"/>
+          <a:lstStyle/>
+          <a:p>
+            <a:pPr algn="r" indent="0" marL="0">
+              <a:buNone/>
+            </a:pPr>
+            <a:r>
+              <a:rPr lang="en-US" sz="900" dirty="0">
+                <a:solidFill>
+                  <a:srgbClr val="64748B"/>
+                </a:solidFill>
+                <a:latin typeface="Calibri" pitchFamily="34" charset="0"/>
+                <a:ea typeface="Calibri" pitchFamily="34" charset="-122"/>
+                <a:cs typeface="Calibri" pitchFamily="34" charset="-120"/>
+              </a:rPr>
+              <a:t>Module 4 — Leçon 3</a:t>
+            </a:r>
+            <a:endParaRPr lang="en-US" sz="900" dirty="0"/>
+          </a:p>
+        </p:txBody>
+      </p:sp>
+    </p:spTree>
+  </p:cSld>
+  <p:clrMapOvr>
+    <a:masterClrMapping/>
+  </p:clrMapOvr>
+</p:sld>
+</file>
+
+<file path=ppt/slides/slide18.xml><?xml version="1.0" encoding="utf-8"?>
+<p:sld xmlns:a="http://schemas.openxmlformats.org/drawingml/2006/main" xmlns:r="http://schemas.openxmlformats.org/officeDocument/2006/relationships" xmlns:p="http://schemas.openxmlformats.org/presentationml/2006/main">
+  <p:cSld name="Slide 18">
+    <p:bg>
+      <p:bgPr>
+        <a:solidFill>
+          <a:srgbClr val="1A2332"/>
+        </a:solidFill>
+      </p:bgPr>
+    </p:bg>
+    <p:spTree>
+      <p:nvGrpSpPr>
+        <p:cNvPr id="1" name=""/>
+        <p:cNvGrpSpPr/>
+        <p:nvPr/>
+      </p:nvGrpSpPr>
+      <p:grpSpPr>
+        <a:xfrm>
+          <a:off x="0" y="0"/>
+          <a:ext cx="0" cy="0"/>
+          <a:chOff x="0" y="0"/>
+          <a:chExt cx="0" cy="0"/>
+        </a:xfrm>
+      </p:grpSpPr>
+      <p:pic>
+        <p:nvPicPr>
+          <p:cNvPr id="2" name="Image 0" descr="preencoded.png">    </p:cNvPr>
+          <p:cNvPicPr>
+            <a:picLocks noChangeAspect="1"/>
+          </p:cNvPicPr>
+          <p:nvPr/>
+        </p:nvPicPr>
+        <p:blipFill>
+          <a:blip r:embed="rId1"/>
+          <a:stretch>
+            <a:fillRect/>
+          </a:stretch>
+        </p:blipFill>
+        <p:spPr>
+          <a:xfrm>
+            <a:off x="731520" y="320040"/>
+            <a:ext cx="457200" cy="457200"/>
+          </a:xfrm>
+          <a:prstGeom prst="rect">
+            <a:avLst/>
+          </a:prstGeom>
+        </p:spPr>
+      </p:pic>
+      <p:sp>
+        <p:nvSpPr>
+          <p:cNvPr id="3" name="Text 0"/>
+          <p:cNvSpPr txBox="1"/>
+          <p:nvPr/>
+        </p:nvSpPr>
+        <p:spPr>
+          <a:xfrm>
+            <a:off x="1280160" y="365760"/>
+            <a:ext cx="2743200" cy="320040"/>
+          </a:xfrm>
+          <a:prstGeom prst="rect">
+            <a:avLst/>
+          </a:prstGeom>
+          <a:noFill/>
+          <a:ln/>
+        </p:spPr>
+        <p:txBody>
+          <a:bodyPr wrap="square" lIns="0" tIns="0" rIns="0" bIns="0" rtlCol="0" anchor="ctr"/>
+          <a:lstStyle/>
+          <a:p>
+            <a:pPr indent="0" marL="0">
+              <a:buNone/>
+            </a:pPr>
+            <a:r>
+              <a:rPr lang="en-US" sz="1200" b="1" spc="300" kern="0" dirty="0">
+                <a:solidFill>
+                  <a:srgbClr val="F59E0B"/>
+                </a:solidFill>
+                <a:latin typeface="Calibri" pitchFamily="34" charset="0"/>
+                <a:ea typeface="Calibri" pitchFamily="34" charset="-122"/>
+                <a:cs typeface="Calibri" pitchFamily="34" charset="-120"/>
+              </a:rPr>
+              <a:t>A RETENIR</a:t>
+            </a:r>
+            <a:endParaRPr lang="en-US" sz="1200" dirty="0"/>
+          </a:p>
+        </p:txBody>
+      </p:sp>
+      <p:sp>
+        <p:nvSpPr>
+          <p:cNvPr id="4" name="Text 1"/>
+          <p:cNvSpPr txBox="1"/>
+          <p:nvPr/>
+        </p:nvSpPr>
+        <p:spPr>
+          <a:xfrm>
+            <a:off x="731520" y="822960"/>
+            <a:ext cx="7680960" cy="457200"/>
+          </a:xfrm>
+          <a:prstGeom prst="rect">
+            <a:avLst/>
+          </a:prstGeom>
+          <a:noFill/>
+          <a:ln/>
+        </p:spPr>
+        <p:txBody>
+          <a:bodyPr wrap="square" lIns="0" tIns="0" rIns="0" bIns="0" rtlCol="0" anchor="ctr"/>
+          <a:lstStyle/>
+          <a:p>
+            <a:pPr indent="0" marL="0">
+              <a:buNone/>
+            </a:pPr>
+            <a:r>
+              <a:rPr lang="en-US" sz="2000" b="1" dirty="0">
+                <a:solidFill>
+                  <a:srgbClr val="FFFFFF"/>
+                </a:solidFill>
+                <a:latin typeface="Calibri" pitchFamily="34" charset="0"/>
+                <a:ea typeface="Calibri" pitchFamily="34" charset="-122"/>
+                <a:cs typeface="Calibri" pitchFamily="34" charset="-120"/>
+              </a:rPr>
+              <a:t>Blockchains publiques vs privées</a:t>
+            </a:r>
+            <a:endParaRPr lang="en-US" sz="2000" dirty="0"/>
+          </a:p>
+        </p:txBody>
+      </p:sp>
+      <p:sp>
+        <p:nvSpPr>
+          <p:cNvPr id="5" name="Shape 2"/>
+          <p:cNvSpPr/>
+          <p:nvPr/>
+        </p:nvSpPr>
+        <p:spPr>
+          <a:xfrm>
+            <a:off x="731520" y="1463040"/>
+            <a:ext cx="7680960" cy="548640"/>
+          </a:xfrm>
+          <a:prstGeom prst="roundRect">
+            <a:avLst>
+              <a:gd name="adj" fmla="val 13333"/>
+            </a:avLst>
+          </a:prstGeom>
+          <a:solidFill>
+            <a:srgbClr val="0F1419"/>
+          </a:solidFill>
+          <a:ln/>
+        </p:spPr>
+      </p:sp>
+      <p:sp>
+        <p:nvSpPr>
+          <p:cNvPr id="6" name="Text 3"/>
+          <p:cNvSpPr txBox="1"/>
+          <p:nvPr/>
+        </p:nvSpPr>
+        <p:spPr>
+          <a:xfrm>
+            <a:off x="914400" y="1463040"/>
+            <a:ext cx="411480" cy="548640"/>
+          </a:xfrm>
+          <a:prstGeom prst="roundRect">
+            <a:avLst>
+              <a:gd name="adj" fmla="val 48889"/>
+            </a:avLst>
+          </a:prstGeom>
+          <a:solidFill>
+            <a:srgbClr val="F59E0B"/>
+          </a:solidFill>
           <a:ln/>
         </p:spPr>
         <p:txBody>
@@ -3122,7 +5313,46 @@
               <a:buNone/>
             </a:pPr>
             <a:r>
-              <a:rPr lang="en-US" sz="3000" b="1" dirty="0">
+              <a:rPr lang="en-US" sz="1500" b="1" dirty="0">
+                <a:solidFill>
+                  <a:srgbClr val="0F1419"/>
+                </a:solidFill>
+                <a:latin typeface="Calibri" pitchFamily="34" charset="0"/>
+                <a:ea typeface="Calibri" pitchFamily="34" charset="-122"/>
+                <a:cs typeface="Calibri" pitchFamily="34" charset="-120"/>
+              </a:rPr>
+              <a:t>1</a:t>
+            </a:r>
+            <a:endParaRPr lang="en-US" sz="1500" dirty="0"/>
+          </a:p>
+        </p:txBody>
+      </p:sp>
+      <p:sp>
+        <p:nvSpPr>
+          <p:cNvPr id="7" name="Text 4"/>
+          <p:cNvSpPr txBox="1"/>
+          <p:nvPr/>
+        </p:nvSpPr>
+        <p:spPr>
+          <a:xfrm>
+            <a:off x="1508760" y="1463040"/>
+            <a:ext cx="6766560" cy="548640"/>
+          </a:xfrm>
+          <a:prstGeom prst="rect">
+            <a:avLst/>
+          </a:prstGeom>
+          <a:noFill/>
+          <a:ln/>
+        </p:spPr>
+        <p:txBody>
+          <a:bodyPr wrap="square" lIns="0" tIns="0" rIns="0" bIns="0" rtlCol="0" anchor="ctr"/>
+          <a:lstStyle/>
+          <a:p>
+            <a:pPr indent="0" marL="0">
+              <a:buNone/>
+            </a:pPr>
+            <a:r>
+              <a:rPr lang="en-US" sz="1300" dirty="0">
                 <a:solidFill>
                   <a:srgbClr val="FFFFFF"/>
                 </a:solidFill>
@@ -3130,27 +5360,53 @@
                 <a:ea typeface="Calibri" pitchFamily="34" charset="-122"/>
                 <a:cs typeface="Calibri" pitchFamily="34" charset="-120"/>
               </a:rPr>
-              <a:t>Module 4 termine</a:t>
-            </a:r>
-            <a:endParaRPr lang="en-US" sz="3000" dirty="0"/>
-          </a:p>
-        </p:txBody>
-      </p:sp>
-      <p:sp>
-        <p:nvSpPr>
-          <p:cNvPr id="3" name="Text 1"/>
+              <a:t>Les couches 1 (L1) : les blockchains de base (Bitcoin, Ethereum, Solana, Tron, BNB Chain). Chacune a son propre système, ses propres validateurs, s...</a:t>
+            </a:r>
+            <a:endParaRPr lang="en-US" sz="1300" dirty="0"/>
+          </a:p>
+        </p:txBody>
+      </p:sp>
+      <p:sp>
+        <p:nvSpPr>
+          <p:cNvPr id="8" name="Shape 5"/>
+          <p:cNvSpPr/>
+          <p:nvPr/>
+        </p:nvSpPr>
+        <p:spPr>
+          <a:xfrm>
+            <a:off x="731520" y="2103120"/>
+            <a:ext cx="7680960" cy="548640"/>
+          </a:xfrm>
+          <a:prstGeom prst="roundRect">
+            <a:avLst>
+              <a:gd name="adj" fmla="val 13333"/>
+            </a:avLst>
+          </a:prstGeom>
+          <a:solidFill>
+            <a:srgbClr val="0F1419"/>
+          </a:solidFill>
+          <a:ln/>
+        </p:spPr>
+      </p:sp>
+      <p:sp>
+        <p:nvSpPr>
+          <p:cNvPr id="9" name="Text 6"/>
           <p:cNvSpPr txBox="1"/>
           <p:nvPr/>
         </p:nvSpPr>
         <p:spPr>
           <a:xfrm>
-            <a:off x="1371600" y="2194560"/>
-            <a:ext cx="6400800" cy="457200"/>
-          </a:xfrm>
-          <a:prstGeom prst="rect">
-            <a:avLst/>
-          </a:prstGeom>
-          <a:noFill/>
+            <a:off x="914400" y="2103120"/>
+            <a:ext cx="411480" cy="548640"/>
+          </a:xfrm>
+          <a:prstGeom prst="roundRect">
+            <a:avLst>
+              <a:gd name="adj" fmla="val 48889"/>
+            </a:avLst>
+          </a:prstGeom>
+          <a:solidFill>
+            <a:srgbClr val="F59E0B"/>
+          </a:solidFill>
           <a:ln/>
         </p:spPr>
         <p:txBody>
@@ -3161,50 +5417,147 @@
               <a:buNone/>
             </a:pPr>
             <a:r>
-              <a:rPr lang="en-US" sz="1400" dirty="0">
-                <a:solidFill>
-                  <a:srgbClr val="94A3B8"/>
-                </a:solidFill>
-                <a:latin typeface="Calibri" pitchFamily="34" charset="0"/>
-                <a:ea typeface="Calibri" pitchFamily="34" charset="-122"/>
-                <a:cs typeface="Calibri" pitchFamily="34" charset="-120"/>
-              </a:rPr>
-              <a:t>Passez au module suivant pour continuer votre apprentissage.</a:t>
-            </a:r>
-            <a:endParaRPr lang="en-US" sz="1400" dirty="0"/>
-          </a:p>
-        </p:txBody>
-      </p:sp>
-      <p:sp>
-        <p:nvSpPr>
-          <p:cNvPr id="4" name="Shape 2"/>
+              <a:rPr lang="en-US" sz="1500" b="1" dirty="0">
+                <a:solidFill>
+                  <a:srgbClr val="0F1419"/>
+                </a:solidFill>
+                <a:latin typeface="Calibri" pitchFamily="34" charset="0"/>
+                <a:ea typeface="Calibri" pitchFamily="34" charset="-122"/>
+                <a:cs typeface="Calibri" pitchFamily="34" charset="-120"/>
+              </a:rPr>
+              <a:t>2</a:t>
+            </a:r>
+            <a:endParaRPr lang="en-US" sz="1500" dirty="0"/>
+          </a:p>
+        </p:txBody>
+      </p:sp>
+      <p:sp>
+        <p:nvSpPr>
+          <p:cNvPr id="10" name="Text 7"/>
+          <p:cNvSpPr txBox="1"/>
+          <p:nvPr/>
+        </p:nvSpPr>
+        <p:spPr>
+          <a:xfrm>
+            <a:off x="1508760" y="2103120"/>
+            <a:ext cx="6766560" cy="548640"/>
+          </a:xfrm>
+          <a:prstGeom prst="rect">
+            <a:avLst/>
+          </a:prstGeom>
+          <a:noFill/>
+          <a:ln/>
+        </p:spPr>
+        <p:txBody>
+          <a:bodyPr wrap="square" lIns="0" tIns="0" rIns="0" bIns="0" rtlCol="0" anchor="ctr"/>
+          <a:lstStyle/>
+          <a:p>
+            <a:pPr indent="0" marL="0">
+              <a:buNone/>
+            </a:pPr>
+            <a:r>
+              <a:rPr lang="en-US" sz="1300" dirty="0">
+                <a:solidFill>
+                  <a:srgbClr val="FFFFFF"/>
+                </a:solidFill>
+                <a:latin typeface="Calibri" pitchFamily="34" charset="0"/>
+                <a:ea typeface="Calibri" pitchFamily="34" charset="-122"/>
+                <a:cs typeface="Calibri" pitchFamily="34" charset="-120"/>
+              </a:rPr>
+              <a:t>Les couches 2 (L2) : des « surcouches » construites au-dessus d'une L1 pour la rendre plus rapide et moins chère. Exemple : Polygon et Arbitrum son...</a:t>
+            </a:r>
+            <a:endParaRPr lang="en-US" sz="1300" dirty="0"/>
+          </a:p>
+        </p:txBody>
+      </p:sp>
+    </p:spTree>
+  </p:cSld>
+  <p:clrMapOvr>
+    <a:masterClrMapping/>
+  </p:clrMapOvr>
+</p:sld>
+</file>
+
+<file path=ppt/slides/slide19.xml><?xml version="1.0" encoding="utf-8"?>
+<p:sld xmlns:a="http://schemas.openxmlformats.org/drawingml/2006/main" xmlns:r="http://schemas.openxmlformats.org/officeDocument/2006/relationships" xmlns:p="http://schemas.openxmlformats.org/presentationml/2006/main">
+  <p:cSld name="Slide 19">
+    <p:bg>
+      <p:bgPr>
+        <a:solidFill>
+          <a:srgbClr val="0F1419"/>
+        </a:solidFill>
+      </p:bgPr>
+    </p:bg>
+    <p:spTree>
+      <p:nvGrpSpPr>
+        <p:cNvPr id="1" name=""/>
+        <p:cNvGrpSpPr/>
+        <p:nvPr/>
+      </p:nvGrpSpPr>
+      <p:grpSpPr>
+        <a:xfrm>
+          <a:off x="0" y="0"/>
+          <a:ext cx="0" cy="0"/>
+          <a:chOff x="0" y="0"/>
+          <a:chExt cx="0" cy="0"/>
+        </a:xfrm>
+      </p:grpSpPr>
+      <p:sp>
+        <p:nvSpPr>
+          <p:cNvPr id="2" name="Shape 0"/>
           <p:cNvSpPr/>
           <p:nvPr/>
         </p:nvSpPr>
         <p:spPr>
           <a:xfrm>
-            <a:off x="3200400" y="2926080"/>
-            <a:ext cx="2743200" cy="54864"/>
-          </a:xfrm>
-          <a:prstGeom prst="rect">
+            <a:off x="2743200" y="457200"/>
+            <a:ext cx="3657600" cy="3657600"/>
+          </a:xfrm>
+          <a:prstGeom prst="ellipse">
             <a:avLst/>
           </a:prstGeom>
           <a:solidFill>
-            <a:srgbClr val="00BFA6"/>
+            <a:srgbClr val="F59E0B">
+              <a:alpha val="6000"/>
+            </a:srgbClr>
           </a:solidFill>
           <a:ln/>
         </p:spPr>
       </p:sp>
-      <p:sp>
-        <p:nvSpPr>
-          <p:cNvPr id="5" name="Text 3"/>
+      <p:pic>
+        <p:nvPicPr>
+          <p:cNvPr id="3" name="Image 0" descr="preencoded.png">    </p:cNvPr>
+          <p:cNvPicPr>
+            <a:picLocks noChangeAspect="1"/>
+          </p:cNvPicPr>
+          <p:nvPr/>
+        </p:nvPicPr>
+        <p:blipFill>
+          <a:blip r:embed="rId1"/>
+          <a:stretch>
+            <a:fillRect/>
+          </a:stretch>
+        </p:blipFill>
+        <p:spPr>
+          <a:xfrm>
+            <a:off x="3931920" y="914400"/>
+            <a:ext cx="1280160" cy="1280160"/>
+          </a:xfrm>
+          <a:prstGeom prst="rect">
+            <a:avLst/>
+          </a:prstGeom>
+        </p:spPr>
+      </p:pic>
+      <p:sp>
+        <p:nvSpPr>
+          <p:cNvPr id="4" name="Text 1"/>
           <p:cNvSpPr txBox="1"/>
           <p:nvPr/>
         </p:nvSpPr>
         <p:spPr>
           <a:xfrm>
-            <a:off x="2286000" y="3291840"/>
-            <a:ext cx="4572000" cy="365760"/>
+            <a:off x="731520" y="2377440"/>
+            <a:ext cx="7680960" cy="548640"/>
           </a:xfrm>
           <a:prstGeom prst="rect">
             <a:avLst/>
@@ -3220,7 +5573,105 @@
               <a:buNone/>
             </a:pPr>
             <a:r>
-              <a:rPr lang="en-US" sz="1200" spc="300" kern="0" dirty="0">
+              <a:rPr lang="en-US" sz="2800" b="1" dirty="0">
+                <a:solidFill>
+                  <a:srgbClr val="FFFFFF"/>
+                </a:solidFill>
+                <a:latin typeface="Calibri" pitchFamily="34" charset="0"/>
+                <a:ea typeface="Calibri" pitchFamily="34" charset="-122"/>
+                <a:cs typeface="Calibri" pitchFamily="34" charset="-120"/>
+              </a:rPr>
+              <a:t>Module 4 termine</a:t>
+            </a:r>
+            <a:endParaRPr lang="en-US" sz="2800" dirty="0"/>
+          </a:p>
+        </p:txBody>
+      </p:sp>
+      <p:sp>
+        <p:nvSpPr>
+          <p:cNvPr id="5" name="Text 2"/>
+          <p:cNvSpPr txBox="1"/>
+          <p:nvPr/>
+        </p:nvSpPr>
+        <p:spPr>
+          <a:xfrm>
+            <a:off x="1371600" y="3017520"/>
+            <a:ext cx="6400800" cy="365760"/>
+          </a:xfrm>
+          <a:prstGeom prst="rect">
+            <a:avLst/>
+          </a:prstGeom>
+          <a:noFill/>
+          <a:ln/>
+        </p:spPr>
+        <p:txBody>
+          <a:bodyPr wrap="square" lIns="0" tIns="0" rIns="0" bIns="0" rtlCol="0" anchor="ctr"/>
+          <a:lstStyle/>
+          <a:p>
+            <a:pPr algn="ctr" indent="0" marL="0">
+              <a:buNone/>
+            </a:pPr>
+            <a:r>
+              <a:rPr lang="en-US" sz="1300" dirty="0">
+                <a:solidFill>
+                  <a:srgbClr val="94A3B8"/>
+                </a:solidFill>
+                <a:latin typeface="Calibri" pitchFamily="34" charset="0"/>
+                <a:ea typeface="Calibri" pitchFamily="34" charset="-122"/>
+                <a:cs typeface="Calibri" pitchFamily="34" charset="-120"/>
+              </a:rPr>
+              <a:t>Passez au module suivant pour continuer votre apprentissage.</a:t>
+            </a:r>
+            <a:endParaRPr lang="en-US" sz="1300" dirty="0"/>
+          </a:p>
+        </p:txBody>
+      </p:sp>
+      <p:sp>
+        <p:nvSpPr>
+          <p:cNvPr id="6" name="Shape 3"/>
+          <p:cNvSpPr/>
+          <p:nvPr/>
+        </p:nvSpPr>
+        <p:spPr>
+          <a:xfrm>
+            <a:off x="3200400" y="3657600"/>
+            <a:ext cx="2743200" cy="36576"/>
+          </a:xfrm>
+          <a:prstGeom prst="rect">
+            <a:avLst/>
+          </a:prstGeom>
+          <a:solidFill>
+            <a:srgbClr val="F59E0B"/>
+          </a:solidFill>
+          <a:ln/>
+        </p:spPr>
+      </p:sp>
+      <p:sp>
+        <p:nvSpPr>
+          <p:cNvPr id="7" name="Text 4"/>
+          <p:cNvSpPr txBox="1"/>
+          <p:nvPr/>
+        </p:nvSpPr>
+        <p:spPr>
+          <a:xfrm>
+            <a:off x="2286000" y="3931920"/>
+            <a:ext cx="4572000" cy="320040"/>
+          </a:xfrm>
+          <a:prstGeom prst="rect">
+            <a:avLst/>
+          </a:prstGeom>
+          <a:noFill/>
+          <a:ln/>
+        </p:spPr>
+        <p:txBody>
+          <a:bodyPr wrap="square" lIns="0" tIns="0" rIns="0" bIns="0" rtlCol="0" anchor="ctr"/>
+          <a:lstStyle/>
+          <a:p>
+            <a:pPr algn="ctr" indent="0" marL="0">
+              <a:buNone/>
+            </a:pPr>
+            <a:r>
+              <a:rPr lang="en-US" sz="1100" spc="300" kern="0" dirty="0">
                 <a:solidFill>
                   <a:srgbClr val="64748B"/>
                 </a:solidFill>
@@ -3230,20 +5681,20 @@
               </a:rPr>
               <a:t>TEREX ACADEMY</a:t>
             </a:r>
-            <a:endParaRPr lang="en-US" sz="1200" dirty="0"/>
-          </a:p>
-        </p:txBody>
-      </p:sp>
-      <p:sp>
-        <p:nvSpPr>
-          <p:cNvPr id="6" name="Text 4"/>
+            <a:endParaRPr lang="en-US" sz="1100" dirty="0"/>
+          </a:p>
+        </p:txBody>
+      </p:sp>
+      <p:sp>
+        <p:nvSpPr>
+          <p:cNvPr id="8" name="Text 5"/>
           <p:cNvSpPr txBox="1"/>
           <p:nvPr/>
         </p:nvSpPr>
         <p:spPr>
           <a:xfrm>
-            <a:off x="2286000" y="3657600"/>
-            <a:ext cx="4572000" cy="320040"/>
+            <a:off x="2286000" y="4251960"/>
+            <a:ext cx="4572000" cy="274320"/>
           </a:xfrm>
           <a:prstGeom prst="rect">
             <a:avLst/>
@@ -3313,8 +5764,8 @@
         </p:nvSpPr>
         <p:spPr>
           <a:xfrm>
-            <a:off x="731520" y="457200"/>
-            <a:ext cx="2743200" cy="365760"/>
+            <a:off x="731520" y="365760"/>
+            <a:ext cx="2743200" cy="320040"/>
           </a:xfrm>
           <a:prstGeom prst="rect">
             <a:avLst/>
@@ -3332,7 +5783,7 @@
             <a:r>
               <a:rPr lang="en-US" sz="1200" b="1" spc="300" kern="0" dirty="0">
                 <a:solidFill>
-                  <a:srgbClr val="00BFA6"/>
+                  <a:srgbClr val="F59E0B"/>
                 </a:solidFill>
                 <a:latin typeface="Calibri" pitchFamily="34" charset="0"/>
                 <a:ea typeface="Calibri" pitchFamily="34" charset="-122"/>
@@ -3352,7 +5803,7 @@
         </p:nvSpPr>
         <p:spPr>
           <a:xfrm>
-            <a:off x="731520" y="868680"/>
+            <a:off x="731520" y="731520"/>
             <a:ext cx="4572000" cy="457200"/>
           </a:xfrm>
           <a:prstGeom prst="rect">
@@ -3385,14 +5836,36 @@
       </p:sp>
       <p:sp>
         <p:nvSpPr>
-          <p:cNvPr id="4" name="Text 2"/>
+          <p:cNvPr id="4" name="Shape 2"/>
+          <p:cNvSpPr/>
+          <p:nvPr/>
+        </p:nvSpPr>
+        <p:spPr>
+          <a:xfrm>
+            <a:off x="731520" y="1371600"/>
+            <a:ext cx="7680960" cy="475488"/>
+          </a:xfrm>
+          <a:prstGeom prst="roundRect">
+            <a:avLst>
+              <a:gd name="adj" fmla="val 15385"/>
+            </a:avLst>
+          </a:prstGeom>
+          <a:solidFill>
+            <a:srgbClr val="1A2332"/>
+          </a:solidFill>
+          <a:ln/>
+        </p:spPr>
+      </p:sp>
+      <p:sp>
+        <p:nvSpPr>
+          <p:cNvPr id="5" name="Text 3"/>
           <p:cNvSpPr txBox="1"/>
           <p:nvPr/>
         </p:nvSpPr>
         <p:spPr>
           <a:xfrm>
-            <a:off x="731520" y="1554480"/>
-            <a:ext cx="7680960" cy="3200400"/>
+            <a:off x="868680" y="1371600"/>
+            <a:ext cx="320040" cy="475488"/>
           </a:xfrm>
           <a:prstGeom prst="rect">
             <a:avLst/>
@@ -3401,17 +5874,77 @@
           <a:ln/>
         </p:spPr>
         <p:txBody>
-          <a:bodyPr wrap="square" lIns="0" tIns="0" rIns="0" bIns="0" rtlCol="0" anchor="t"/>
+          <a:bodyPr wrap="square" lIns="0" tIns="0" rIns="0" bIns="0" rtlCol="0" anchor="ctr"/>
+          <a:lstStyle/>
+          <a:p>
+            <a:pPr algn="ctr" indent="0" marL="0">
+              <a:buNone/>
+            </a:pPr>
+            <a:r>
+              <a:rPr lang="en-US" sz="1300" b="1" dirty="0">
+                <a:solidFill>
+                  <a:srgbClr val="F59E0B"/>
+                </a:solidFill>
+                <a:latin typeface="Calibri" pitchFamily="34" charset="0"/>
+                <a:ea typeface="Calibri" pitchFamily="34" charset="-122"/>
+                <a:cs typeface="Calibri" pitchFamily="34" charset="-120"/>
+              </a:rPr>
+              <a:t>1</a:t>
+            </a:r>
+            <a:endParaRPr lang="en-US" sz="1300" dirty="0"/>
+          </a:p>
+        </p:txBody>
+      </p:sp>
+      <p:pic>
+        <p:nvPicPr>
+          <p:cNvPr id="6" name="Image 0" descr="preencoded.png">    </p:cNvPr>
+          <p:cNvPicPr>
+            <a:picLocks noChangeAspect="1"/>
+          </p:cNvPicPr>
+          <p:nvPr/>
+        </p:nvPicPr>
+        <p:blipFill>
+          <a:blip r:embed="rId1"/>
+          <a:stretch>
+            <a:fillRect/>
+          </a:stretch>
+        </p:blipFill>
+        <p:spPr>
+          <a:xfrm>
+            <a:off x="1280160" y="1444752"/>
+            <a:ext cx="329184" cy="329184"/>
+          </a:xfrm>
+          <a:prstGeom prst="rect">
+            <a:avLst/>
+          </a:prstGeom>
+        </p:spPr>
+      </p:pic>
+      <p:sp>
+        <p:nvSpPr>
+          <p:cNvPr id="7" name="Text 4"/>
+          <p:cNvSpPr txBox="1"/>
+          <p:nvPr/>
+        </p:nvSpPr>
+        <p:spPr>
+          <a:xfrm>
+            <a:off x="1737360" y="1371600"/>
+            <a:ext cx="6492240" cy="475488"/>
+          </a:xfrm>
+          <a:prstGeom prst="rect">
+            <a:avLst/>
+          </a:prstGeom>
+          <a:noFill/>
+          <a:ln/>
+        </p:spPr>
+        <p:txBody>
+          <a:bodyPr wrap="square" lIns="0" tIns="0" rIns="0" bIns="0" rtlCol="0" anchor="ctr"/>
           <a:lstStyle/>
           <a:p>
             <a:pPr indent="0" marL="0">
-              <a:spcAft>
-                <a:spcPts val="1000"/>
-              </a:spcAft>
               <a:buNone/>
             </a:pPr>
             <a:r>
-              <a:rPr lang="en-US" sz="1500" dirty="0">
+              <a:rPr lang="en-US" sz="1300" dirty="0">
                 <a:solidFill>
                   <a:srgbClr val="FFFFFF"/>
                 </a:solidFill>
@@ -3419,19 +5952,123 @@
                 <a:ea typeface="Calibri" pitchFamily="34" charset="-122"/>
                 <a:cs typeface="Calibri" pitchFamily="34" charset="-120"/>
               </a:rPr>
-              <a:t>1.  Qu'est-ce qu'une blockchain, vraiment ?</a:t>
-            </a:r>
-            <a:endParaRPr lang="en-US" sz="1500" dirty="0"/>
-          </a:p>
+              <a:t>Qu'est-ce qu'une blockchain, vraiment ?</a:t>
+            </a:r>
+            <a:endParaRPr lang="en-US" sz="1300" dirty="0"/>
+          </a:p>
+        </p:txBody>
+      </p:sp>
+      <p:sp>
+        <p:nvSpPr>
+          <p:cNvPr id="8" name="Shape 5"/>
+          <p:cNvSpPr/>
+          <p:nvPr/>
+        </p:nvSpPr>
+        <p:spPr>
+          <a:xfrm>
+            <a:off x="731520" y="1920240"/>
+            <a:ext cx="7680960" cy="475488"/>
+          </a:xfrm>
+          <a:prstGeom prst="roundRect">
+            <a:avLst>
+              <a:gd name="adj" fmla="val 15385"/>
+            </a:avLst>
+          </a:prstGeom>
+          <a:solidFill>
+            <a:srgbClr val="1A2332"/>
+          </a:solidFill>
+          <a:ln/>
+        </p:spPr>
+      </p:sp>
+      <p:sp>
+        <p:nvSpPr>
+          <p:cNvPr id="9" name="Text 6"/>
+          <p:cNvSpPr txBox="1"/>
+          <p:nvPr/>
+        </p:nvSpPr>
+        <p:spPr>
+          <a:xfrm>
+            <a:off x="868680" y="1920240"/>
+            <a:ext cx="320040" cy="475488"/>
+          </a:xfrm>
+          <a:prstGeom prst="rect">
+            <a:avLst/>
+          </a:prstGeom>
+          <a:noFill/>
+          <a:ln/>
+        </p:spPr>
+        <p:txBody>
+          <a:bodyPr wrap="square" lIns="0" tIns="0" rIns="0" bIns="0" rtlCol="0" anchor="ctr"/>
+          <a:lstStyle/>
+          <a:p>
+            <a:pPr algn="ctr" indent="0" marL="0">
+              <a:buNone/>
+            </a:pPr>
+            <a:r>
+              <a:rPr lang="en-US" sz="1300" b="1" dirty="0">
+                <a:solidFill>
+                  <a:srgbClr val="F59E0B"/>
+                </a:solidFill>
+                <a:latin typeface="Calibri" pitchFamily="34" charset="0"/>
+                <a:ea typeface="Calibri" pitchFamily="34" charset="-122"/>
+                <a:cs typeface="Calibri" pitchFamily="34" charset="-120"/>
+              </a:rPr>
+              <a:t>2</a:t>
+            </a:r>
+            <a:endParaRPr lang="en-US" sz="1300" dirty="0"/>
+          </a:p>
+        </p:txBody>
+      </p:sp>
+      <p:pic>
+        <p:nvPicPr>
+          <p:cNvPr id="10" name="Image 1" descr="preencoded.png">    </p:cNvPr>
+          <p:cNvPicPr>
+            <a:picLocks noChangeAspect="1"/>
+          </p:cNvPicPr>
+          <p:nvPr/>
+        </p:nvPicPr>
+        <p:blipFill>
+          <a:blip r:embed="rId2"/>
+          <a:stretch>
+            <a:fillRect/>
+          </a:stretch>
+        </p:blipFill>
+        <p:spPr>
+          <a:xfrm>
+            <a:off x="1280160" y="1993392"/>
+            <a:ext cx="329184" cy="329184"/>
+          </a:xfrm>
+          <a:prstGeom prst="rect">
+            <a:avLst/>
+          </a:prstGeom>
+        </p:spPr>
+      </p:pic>
+      <p:sp>
+        <p:nvSpPr>
+          <p:cNvPr id="11" name="Text 7"/>
+          <p:cNvSpPr txBox="1"/>
+          <p:nvPr/>
+        </p:nvSpPr>
+        <p:spPr>
+          <a:xfrm>
+            <a:off x="1737360" y="1920240"/>
+            <a:ext cx="6492240" cy="475488"/>
+          </a:xfrm>
+          <a:prstGeom prst="rect">
+            <a:avLst/>
+          </a:prstGeom>
+          <a:noFill/>
+          <a:ln/>
+        </p:spPr>
+        <p:txBody>
+          <a:bodyPr wrap="square" lIns="0" tIns="0" rIns="0" bIns="0" rtlCol="0" anchor="ctr"/>
+          <a:lstStyle/>
           <a:p>
             <a:pPr indent="0" marL="0">
-              <a:spcAft>
-                <a:spcPts val="1000"/>
-              </a:spcAft>
               <a:buNone/>
             </a:pPr>
             <a:r>
-              <a:rPr lang="en-US" sz="1500" dirty="0">
+              <a:rPr lang="en-US" sz="1300" dirty="0">
                 <a:solidFill>
                   <a:srgbClr val="FFFFFF"/>
                 </a:solidFill>
@@ -3439,19 +6076,123 @@
                 <a:ea typeface="Calibri" pitchFamily="34" charset="-122"/>
                 <a:cs typeface="Calibri" pitchFamily="34" charset="-120"/>
               </a:rPr>
-              <a:t>2.  Un bloc, un mineur, une transaction</a:t>
-            </a:r>
-            <a:endParaRPr lang="en-US" sz="1500" dirty="0"/>
-          </a:p>
+              <a:t>Un bloc, un mineur, une transaction</a:t>
+            </a:r>
+            <a:endParaRPr lang="en-US" sz="1300" dirty="0"/>
+          </a:p>
+        </p:txBody>
+      </p:sp>
+      <p:sp>
+        <p:nvSpPr>
+          <p:cNvPr id="12" name="Shape 8"/>
+          <p:cNvSpPr/>
+          <p:nvPr/>
+        </p:nvSpPr>
+        <p:spPr>
+          <a:xfrm>
+            <a:off x="731520" y="2468880"/>
+            <a:ext cx="7680960" cy="475488"/>
+          </a:xfrm>
+          <a:prstGeom prst="roundRect">
+            <a:avLst>
+              <a:gd name="adj" fmla="val 15385"/>
+            </a:avLst>
+          </a:prstGeom>
+          <a:solidFill>
+            <a:srgbClr val="1A2332"/>
+          </a:solidFill>
+          <a:ln/>
+        </p:spPr>
+      </p:sp>
+      <p:sp>
+        <p:nvSpPr>
+          <p:cNvPr id="13" name="Text 9"/>
+          <p:cNvSpPr txBox="1"/>
+          <p:nvPr/>
+        </p:nvSpPr>
+        <p:spPr>
+          <a:xfrm>
+            <a:off x="868680" y="2468880"/>
+            <a:ext cx="320040" cy="475488"/>
+          </a:xfrm>
+          <a:prstGeom prst="rect">
+            <a:avLst/>
+          </a:prstGeom>
+          <a:noFill/>
+          <a:ln/>
+        </p:spPr>
+        <p:txBody>
+          <a:bodyPr wrap="square" lIns="0" tIns="0" rIns="0" bIns="0" rtlCol="0" anchor="ctr"/>
+          <a:lstStyle/>
+          <a:p>
+            <a:pPr algn="ctr" indent="0" marL="0">
+              <a:buNone/>
+            </a:pPr>
+            <a:r>
+              <a:rPr lang="en-US" sz="1300" b="1" dirty="0">
+                <a:solidFill>
+                  <a:srgbClr val="F59E0B"/>
+                </a:solidFill>
+                <a:latin typeface="Calibri" pitchFamily="34" charset="0"/>
+                <a:ea typeface="Calibri" pitchFamily="34" charset="-122"/>
+                <a:cs typeface="Calibri" pitchFamily="34" charset="-120"/>
+              </a:rPr>
+              <a:t>3</a:t>
+            </a:r>
+            <a:endParaRPr lang="en-US" sz="1300" dirty="0"/>
+          </a:p>
+        </p:txBody>
+      </p:sp>
+      <p:pic>
+        <p:nvPicPr>
+          <p:cNvPr id="14" name="Image 2" descr="preencoded.png">    </p:cNvPr>
+          <p:cNvPicPr>
+            <a:picLocks noChangeAspect="1"/>
+          </p:cNvPicPr>
+          <p:nvPr/>
+        </p:nvPicPr>
+        <p:blipFill>
+          <a:blip r:embed="rId3"/>
+          <a:stretch>
+            <a:fillRect/>
+          </a:stretch>
+        </p:blipFill>
+        <p:spPr>
+          <a:xfrm>
+            <a:off x="1280160" y="2542032"/>
+            <a:ext cx="329184" cy="329184"/>
+          </a:xfrm>
+          <a:prstGeom prst="rect">
+            <a:avLst/>
+          </a:prstGeom>
+        </p:spPr>
+      </p:pic>
+      <p:sp>
+        <p:nvSpPr>
+          <p:cNvPr id="15" name="Text 10"/>
+          <p:cNvSpPr txBox="1"/>
+          <p:nvPr/>
+        </p:nvSpPr>
+        <p:spPr>
+          <a:xfrm>
+            <a:off x="1737360" y="2468880"/>
+            <a:ext cx="6492240" cy="475488"/>
+          </a:xfrm>
+          <a:prstGeom prst="rect">
+            <a:avLst/>
+          </a:prstGeom>
+          <a:noFill/>
+          <a:ln/>
+        </p:spPr>
+        <p:txBody>
+          <a:bodyPr wrap="square" lIns="0" tIns="0" rIns="0" bIns="0" rtlCol="0" anchor="ctr"/>
+          <a:lstStyle/>
           <a:p>
             <a:pPr indent="0" marL="0">
-              <a:spcAft>
-                <a:spcPts val="1000"/>
-              </a:spcAft>
               <a:buNone/>
             </a:pPr>
             <a:r>
-              <a:rPr lang="en-US" sz="1500" dirty="0">
+              <a:rPr lang="en-US" sz="1300" dirty="0">
                 <a:solidFill>
                   <a:srgbClr val="FFFFFF"/>
                 </a:solidFill>
@@ -3459,9 +6200,9 @@
                 <a:ea typeface="Calibri" pitchFamily="34" charset="-122"/>
                 <a:cs typeface="Calibri" pitchFamily="34" charset="-120"/>
               </a:rPr>
-              <a:t>3.  Blockchains publiques vs privées</a:t>
-            </a:r>
-            <a:endParaRPr lang="en-US" sz="1500" dirty="0"/>
+              <a:t>Blockchains publiques vs privées</a:t>
+            </a:r>
+            <a:endParaRPr lang="en-US" sz="1300" dirty="0"/>
           </a:p>
         </p:txBody>
       </p:sp>
@@ -3497,35 +6238,105 @@
           <a:chExt cx="0" cy="0"/>
         </a:xfrm>
       </p:grpSpPr>
-      <p:sp>
-        <p:nvSpPr>
-          <p:cNvPr id="2" name="Shape 0"/>
+      <p:pic>
+        <p:nvPicPr>
+          <p:cNvPr id="2" name="Image 0" descr="preencoded.png">    </p:cNvPr>
+          <p:cNvPicPr>
+            <a:picLocks noChangeAspect="1"/>
+          </p:cNvPicPr>
+          <p:nvPr/>
+        </p:nvPicPr>
+        <p:blipFill>
+          <a:blip r:embed="rId1"/>
+          <a:stretch>
+            <a:fillRect/>
+          </a:stretch>
+        </p:blipFill>
+        <p:spPr>
+          <a:xfrm>
+            <a:off x="7315200" y="548640"/>
+            <a:ext cx="1280160" cy="1280160"/>
+          </a:xfrm>
+          <a:prstGeom prst="rect">
+            <a:avLst/>
+          </a:prstGeom>
+        </p:spPr>
+      </p:pic>
+      <p:pic>
+        <p:nvPicPr>
+          <p:cNvPr id="3" name="Image 1" descr="preencoded.png">    </p:cNvPr>
+          <p:cNvPicPr>
+            <a:picLocks noChangeAspect="1"/>
+          </p:cNvPicPr>
+          <p:nvPr/>
+        </p:nvPicPr>
+        <p:blipFill>
+          <a:blip r:embed="rId2"/>
+          <a:stretch>
+            <a:fillRect/>
+          </a:stretch>
+        </p:blipFill>
+        <p:spPr>
+          <a:xfrm>
+            <a:off x="7772400" y="2011680"/>
+            <a:ext cx="822960" cy="822960"/>
+          </a:xfrm>
+          <a:prstGeom prst="rect">
+            <a:avLst/>
+          </a:prstGeom>
+        </p:spPr>
+      </p:pic>
+      <p:sp>
+        <p:nvSpPr>
+          <p:cNvPr id="4" name="Shape 0"/>
           <p:cNvSpPr/>
           <p:nvPr/>
         </p:nvSpPr>
         <p:spPr>
           <a:xfrm>
-            <a:off x="548640" y="914400"/>
-            <a:ext cx="45720" cy="2560320"/>
-          </a:xfrm>
-          <a:prstGeom prst="rect">
+            <a:off x="6583680" y="-274320"/>
+            <a:ext cx="3200400" cy="3200400"/>
+          </a:xfrm>
+          <a:prstGeom prst="ellipse">
             <a:avLst/>
           </a:prstGeom>
           <a:solidFill>
-            <a:srgbClr val="00BFA6"/>
+            <a:srgbClr val="F59E0B">
+              <a:alpha val="6000"/>
+            </a:srgbClr>
           </a:solidFill>
           <a:ln/>
         </p:spPr>
       </p:sp>
       <p:sp>
         <p:nvSpPr>
-          <p:cNvPr id="3" name="Text 1"/>
+          <p:cNvPr id="5" name="Shape 1"/>
+          <p:cNvSpPr/>
+          <p:nvPr/>
+        </p:nvSpPr>
+        <p:spPr>
+          <a:xfrm>
+            <a:off x="731520" y="914400"/>
+            <a:ext cx="45720" cy="2194560"/>
+          </a:xfrm>
+          <a:prstGeom prst="rect">
+            <a:avLst/>
+          </a:prstGeom>
+          <a:solidFill>
+            <a:srgbClr val="F59E0B"/>
+          </a:solidFill>
+          <a:ln/>
+        </p:spPr>
+      </p:sp>
+      <p:sp>
+        <p:nvSpPr>
+          <p:cNvPr id="6" name="Text 2"/>
           <p:cNvSpPr txBox="1"/>
           <p:nvPr/>
         </p:nvSpPr>
         <p:spPr>
           <a:xfrm>
-            <a:off x="822960" y="1097280"/>
+            <a:off x="960120" y="914400"/>
             <a:ext cx="2743200" cy="365760"/>
           </a:xfrm>
           <a:prstGeom prst="rect">
@@ -3544,13 +6355,13 @@
             <a:r>
               <a:rPr lang="en-US" sz="1200" b="1" spc="200" kern="0" dirty="0">
                 <a:solidFill>
-                  <a:srgbClr val="00BFA6"/>
-                </a:solidFill>
-                <a:latin typeface="Calibri" pitchFamily="34" charset="0"/>
-                <a:ea typeface="Calibri" pitchFamily="34" charset="-122"/>
-                <a:cs typeface="Calibri" pitchFamily="34" charset="-120"/>
-              </a:rPr>
-              <a:t>Lecon 1 / 3</a:t>
+                  <a:srgbClr val="F59E0B"/>
+                </a:solidFill>
+                <a:latin typeface="Calibri" pitchFamily="34" charset="0"/>
+                <a:ea typeface="Calibri" pitchFamily="34" charset="-122"/>
+                <a:cs typeface="Calibri" pitchFamily="34" charset="-120"/>
+              </a:rPr>
+              <a:t>Leçon 1 / 3</a:t>
             </a:r>
             <a:endParaRPr lang="en-US" sz="1200" dirty="0"/>
           </a:p>
@@ -3558,14 +6369,14 @@
       </p:sp>
       <p:sp>
         <p:nvSpPr>
-          <p:cNvPr id="4" name="Text 2"/>
+          <p:cNvPr id="7" name="Text 3"/>
           <p:cNvSpPr txBox="1"/>
           <p:nvPr/>
         </p:nvSpPr>
         <p:spPr>
           <a:xfrm>
-            <a:off x="822960" y="1645920"/>
-            <a:ext cx="7498080" cy="1280160"/>
+            <a:off x="960120" y="1371600"/>
+            <a:ext cx="6217920" cy="1463040"/>
           </a:xfrm>
           <a:prstGeom prst="rect">
             <a:avLst/>
@@ -3581,7 +6392,7 @@
               <a:buNone/>
             </a:pPr>
             <a:r>
-              <a:rPr lang="en-US" sz="3000" b="1" dirty="0">
+              <a:rPr lang="en-US" sz="2800" b="1" dirty="0">
                 <a:solidFill>
                   <a:srgbClr val="FFFFFF"/>
                 </a:solidFill>
@@ -3591,19 +6402,19 @@
               </a:rPr>
               <a:t>Qu'est-ce qu'une blockchain, vraiment ?</a:t>
             </a:r>
-            <a:endParaRPr lang="en-US" sz="3000" dirty="0"/>
-          </a:p>
-        </p:txBody>
-      </p:sp>
-      <p:sp>
-        <p:nvSpPr>
-          <p:cNvPr id="5" name="Text 3"/>
+            <a:endParaRPr lang="en-US" sz="2800" dirty="0"/>
+          </a:p>
+        </p:txBody>
+      </p:sp>
+      <p:sp>
+        <p:nvSpPr>
+          <p:cNvPr id="8" name="Text 4"/>
           <p:cNvSpPr txBox="1"/>
           <p:nvPr/>
         </p:nvSpPr>
         <p:spPr>
           <a:xfrm>
-            <a:off x="822960" y="4206240"/>
+            <a:off x="960120" y="4114800"/>
             <a:ext cx="5486400" cy="320040"/>
           </a:xfrm>
           <a:prstGeom prst="rect">
@@ -3668,7 +6479,53 @@
       </p:grpSpPr>
       <p:sp>
         <p:nvSpPr>
-          <p:cNvPr id="2" name="Text 0"/>
+          <p:cNvPr id="2" name="Shape 0"/>
+          <p:cNvSpPr/>
+          <p:nvPr/>
+        </p:nvSpPr>
+        <p:spPr>
+          <a:xfrm>
+            <a:off x="7955280" y="182880"/>
+            <a:ext cx="640080" cy="640080"/>
+          </a:xfrm>
+          <a:prstGeom prst="ellipse">
+            <a:avLst/>
+          </a:prstGeom>
+          <a:solidFill>
+            <a:srgbClr val="F59E0B">
+              <a:alpha val="12000"/>
+            </a:srgbClr>
+          </a:solidFill>
+          <a:ln/>
+        </p:spPr>
+      </p:sp>
+      <p:pic>
+        <p:nvPicPr>
+          <p:cNvPr id="3" name="Image 0" descr="preencoded.png">    </p:cNvPr>
+          <p:cNvPicPr>
+            <a:picLocks noChangeAspect="1"/>
+          </p:cNvPicPr>
+          <p:nvPr/>
+        </p:nvPicPr>
+        <p:blipFill>
+          <a:blip r:embed="rId1"/>
+          <a:stretch>
+            <a:fillRect/>
+          </a:stretch>
+        </p:blipFill>
+        <p:spPr>
+          <a:xfrm>
+            <a:off x="8028432" y="256032"/>
+            <a:ext cx="493776" cy="493776"/>
+          </a:xfrm>
+          <a:prstGeom prst="rect">
+            <a:avLst/>
+          </a:prstGeom>
+        </p:spPr>
+      </p:pic>
+      <p:sp>
+        <p:nvSpPr>
+          <p:cNvPr id="4" name="Text 1"/>
           <p:cNvSpPr txBox="1"/>
           <p:nvPr/>
         </p:nvSpPr>
@@ -3703,7 +6560,7 @@
                 <a:ea typeface="Calibri" pitchFamily="34" charset="-122"/>
                 <a:cs typeface="Calibri" pitchFamily="34" charset="-120"/>
               </a:rPr>
-              <a:t>Imaginez un cahier de comptes de village. Le griot du village y note toutes les transactions : « Ali a donné 3 chèvres à Fatou », « Moussa a payé 500 CFA à Aminata ».</a:t>
+              <a:t>Imaginez un cahier de comptes de village.</a:t>
             </a:r>
             <a:endParaRPr lang="en-US" sz="1400" dirty="0"/>
           </a:p>
@@ -3724,7 +6581,7 @@
                 <a:ea typeface="Calibri" pitchFamily="34" charset="-122"/>
                 <a:cs typeface="Calibri" pitchFamily="34" charset="-120"/>
               </a:rPr>
-              <a:t>Problème : et si le griot ment ? Et s'il perd le cahier ? Et si quelqu'un déchire une page ?</a:t>
+              <a:t>Le griot du village y note toutes les transactions : « Ali a donné 3 chèvres à Fatou », « Moussa a payé 500 CFA à Aminata ».</a:t>
             </a:r>
             <a:endParaRPr lang="en-US" sz="1400" dirty="0"/>
           </a:p>
@@ -3745,15 +6602,78 @@
                 <a:ea typeface="Calibri" pitchFamily="34" charset="-122"/>
                 <a:cs typeface="Calibri" pitchFamily="34" charset="-120"/>
               </a:rPr>
-              <a:t>Maintenant, imaginez que tout le village possède une copie identique du cahier. À chaque nouvelle transaction, tout le monde crie ce qui vient de se passer, et chacun l'écrit da...</a:t>
+              <a:t>Problème : et si le griot ment ? Et s'il perd le cahier ? Et si quelqu'un déchire une page ?</a:t>
             </a:r>
             <a:endParaRPr lang="en-US" sz="1400" dirty="0"/>
           </a:p>
-        </p:txBody>
-      </p:sp>
-      <p:sp>
-        <p:nvSpPr>
-          <p:cNvPr id="3" name="Text 1"/>
+          <a:p>
+            <a:pPr marL="342900" indent="-342900">
+              <a:spcAft>
+                <a:spcPts val="800"/>
+              </a:spcAft>
+              <a:buSzPct val="100000"/>
+              <a:buChar char="•"/>
+            </a:pPr>
+            <a:r>
+              <a:rPr lang="en-US" sz="1400" dirty="0">
+                <a:solidFill>
+                  <a:srgbClr val="FFFFFF"/>
+                </a:solidFill>
+                <a:latin typeface="Calibri" pitchFamily="34" charset="0"/>
+                <a:ea typeface="Calibri" pitchFamily="34" charset="-122"/>
+                <a:cs typeface="Calibri" pitchFamily="34" charset="-120"/>
+              </a:rPr>
+              <a:t>Maintenant, imaginez que tout le village possède une copie identique du cahier.</a:t>
+            </a:r>
+            <a:endParaRPr lang="en-US" sz="1400" dirty="0"/>
+          </a:p>
+          <a:p>
+            <a:pPr marL="342900" indent="-342900">
+              <a:spcAft>
+                <a:spcPts val="800"/>
+              </a:spcAft>
+              <a:buSzPct val="100000"/>
+              <a:buChar char="•"/>
+            </a:pPr>
+            <a:r>
+              <a:rPr lang="en-US" sz="1400" dirty="0">
+                <a:solidFill>
+                  <a:srgbClr val="FFFFFF"/>
+                </a:solidFill>
+                <a:latin typeface="Calibri" pitchFamily="34" charset="0"/>
+                <a:ea typeface="Calibri" pitchFamily="34" charset="-122"/>
+                <a:cs typeface="Calibri" pitchFamily="34" charset="-120"/>
+              </a:rPr>
+              <a:t>À chaque nouvelle transaction, tout le monde crie ce qui vient de se passer, et chacun l'écrit dans son cahier.</a:t>
+            </a:r>
+            <a:endParaRPr lang="en-US" sz="1400" dirty="0"/>
+          </a:p>
+          <a:p>
+            <a:pPr marL="342900" indent="-342900">
+              <a:spcAft>
+                <a:spcPts val="800"/>
+              </a:spcAft>
+              <a:buSzPct val="100000"/>
+              <a:buChar char="•"/>
+            </a:pPr>
+            <a:r>
+              <a:rPr lang="en-US" sz="1400" dirty="0">
+                <a:solidFill>
+                  <a:srgbClr val="FFFFFF"/>
+                </a:solidFill>
+                <a:latin typeface="Calibri" pitchFamily="34" charset="0"/>
+                <a:ea typeface="Calibri" pitchFamily="34" charset="-122"/>
+                <a:cs typeface="Calibri" pitchFamily="34" charset="-120"/>
+              </a:rPr>
+              <a:t>Si un tricheur essaie de modifier son cahier, les autres le voient tout de suite : leur version ne correspond plus à la sienne.</a:t>
+            </a:r>
+            <a:endParaRPr lang="en-US" sz="1400" dirty="0"/>
+          </a:p>
+        </p:txBody>
+      </p:sp>
+      <p:sp>
+        <p:nvSpPr>
+          <p:cNvPr id="5" name="Text 2"/>
           <p:cNvSpPr txBox="1"/>
           <p:nvPr/>
         </p:nvSpPr>
@@ -3784,7 +6704,7 @@
                 <a:ea typeface="Calibri" pitchFamily="34" charset="-122"/>
                 <a:cs typeface="Calibri" pitchFamily="34" charset="-120"/>
               </a:rPr>
-              <a:t>Module 4 — Lecon 1</a:t>
+              <a:t>Module 4 — Leçon 1</a:t>
             </a:r>
             <a:endParaRPr lang="en-US" sz="900" dirty="0"/>
           </a:p>
@@ -3830,8 +6750,8 @@
         </p:nvSpPr>
         <p:spPr>
           <a:xfrm>
-            <a:off x="731520" y="365760"/>
-            <a:ext cx="7680960" cy="548640"/>
+            <a:off x="731520" y="274320"/>
+            <a:ext cx="7680960" cy="502920"/>
           </a:xfrm>
           <a:prstGeom prst="rect">
             <a:avLst/>
@@ -3847,9 +6767,9 @@
               <a:buNone/>
             </a:pPr>
             <a:r>
-              <a:rPr lang="en-US" sz="2200" b="1" dirty="0">
-                <a:solidFill>
-                  <a:srgbClr val="00BFA6"/>
+              <a:rPr lang="en-US" sz="2000" b="1" dirty="0">
+                <a:solidFill>
+                  <a:srgbClr val="F59E0B"/>
                 </a:solidFill>
                 <a:latin typeface="Calibri" pitchFamily="34" charset="0"/>
                 <a:ea typeface="Calibri" pitchFamily="34" charset="-122"/>
@@ -3857,7 +6777,7 @@
               </a:rPr>
               <a:t>C'est exactement ça, une blockchain.</a:t>
             </a:r>
-            <a:endParaRPr lang="en-US" sz="2200" dirty="0"/>
+            <a:endParaRPr lang="en-US" sz="2000" dirty="0"/>
           </a:p>
         </p:txBody>
       </p:sp>
@@ -3869,8 +6789,8 @@
         </p:nvSpPr>
         <p:spPr>
           <a:xfrm>
-            <a:off x="731520" y="1051560"/>
-            <a:ext cx="7680960" cy="3657600"/>
+            <a:off x="731520" y="1005840"/>
+            <a:ext cx="4206240" cy="3474720"/>
           </a:xfrm>
           <a:prstGeom prst="rect">
             <a:avLst/>
@@ -3884,13 +6804,13 @@
           <a:p>
             <a:pPr marL="342900" indent="-342900">
               <a:spcAft>
-                <a:spcPts val="800"/>
+                <a:spcPts val="600"/>
               </a:spcAft>
               <a:buSzPct val="100000"/>
               <a:buChar char="•"/>
             </a:pPr>
             <a:r>
-              <a:rPr lang="en-US" sz="1400" dirty="0">
+              <a:rPr lang="en-US" sz="1300" dirty="0">
                 <a:solidFill>
                   <a:srgbClr val="FFFFFF"/>
                 </a:solidFill>
@@ -3900,18 +6820,18 @@
               </a:rPr>
               <a:t>À l'échelle du monde :</a:t>
             </a:r>
-            <a:endParaRPr lang="en-US" sz="1400" dirty="0"/>
+            <a:endParaRPr lang="en-US" sz="1300" dirty="0"/>
           </a:p>
           <a:p>
             <a:pPr marL="342900" indent="-342900">
               <a:spcAft>
-                <a:spcPts val="800"/>
+                <a:spcPts val="600"/>
               </a:spcAft>
               <a:buSzPct val="100000"/>
               <a:buChar char="•"/>
             </a:pPr>
             <a:r>
-              <a:rPr lang="en-US" sz="1400" dirty="0">
+              <a:rPr lang="en-US" sz="1300" dirty="0">
                 <a:solidFill>
                   <a:srgbClr val="FFFFFF"/>
                 </a:solidFill>
@@ -3921,18 +6841,18 @@
               </a:rPr>
               <a:t>Le « cahier » = la blockchain.</a:t>
             </a:r>
-            <a:endParaRPr lang="en-US" sz="1400" dirty="0"/>
+            <a:endParaRPr lang="en-US" sz="1300" dirty="0"/>
           </a:p>
           <a:p>
             <a:pPr marL="342900" indent="-342900">
               <a:spcAft>
-                <a:spcPts val="800"/>
+                <a:spcPts val="600"/>
               </a:spcAft>
               <a:buSzPct val="100000"/>
               <a:buChar char="•"/>
             </a:pPr>
             <a:r>
-              <a:rPr lang="en-US" sz="1400" dirty="0">
+              <a:rPr lang="en-US" sz="1300" dirty="0">
                 <a:solidFill>
                   <a:srgbClr val="FFFFFF"/>
                 </a:solidFill>
@@ -3942,18 +6862,18 @@
               </a:rPr>
               <a:t>Les « villageois » = les nœuds (ordinateurs) du réseau. Il y en a des dizaines de milliers pour Bitcoin.</a:t>
             </a:r>
-            <a:endParaRPr lang="en-US" sz="1400" dirty="0"/>
+            <a:endParaRPr lang="en-US" sz="1300" dirty="0"/>
           </a:p>
           <a:p>
             <a:pPr marL="342900" indent="-342900">
               <a:spcAft>
-                <a:spcPts val="800"/>
+                <a:spcPts val="600"/>
               </a:spcAft>
               <a:buSzPct val="100000"/>
               <a:buChar char="•"/>
             </a:pPr>
             <a:r>
-              <a:rPr lang="en-US" sz="1400" dirty="0">
+              <a:rPr lang="en-US" sz="1300" dirty="0">
                 <a:solidFill>
                   <a:srgbClr val="FFFFFF"/>
                 </a:solidFill>
@@ -3963,18 +6883,82 @@
               </a:rPr>
               <a:t>Les « pages du cahier » = les blocs. Chaque bloc contient des centaines ou milliers de transactions.</a:t>
             </a:r>
-            <a:endParaRPr lang="en-US" sz="1400" dirty="0"/>
-          </a:p>
-          <a:p>
-            <a:pPr marL="342900" indent="-342900">
-              <a:spcAft>
-                <a:spcPts val="800"/>
-              </a:spcAft>
-              <a:buSzPct val="100000"/>
-              <a:buChar char="•"/>
-            </a:pPr>
-            <a:r>
-              <a:rPr lang="en-US" sz="1400" dirty="0">
+            <a:endParaRPr lang="en-US" sz="1300" dirty="0"/>
+          </a:p>
+        </p:txBody>
+      </p:sp>
+      <p:sp>
+        <p:nvSpPr>
+          <p:cNvPr id="4" name="Shape 2"/>
+          <p:cNvSpPr/>
+          <p:nvPr/>
+        </p:nvSpPr>
+        <p:spPr>
+          <a:xfrm>
+            <a:off x="5120640" y="1005840"/>
+            <a:ext cx="3474720" cy="640080"/>
+          </a:xfrm>
+          <a:prstGeom prst="roundRect">
+            <a:avLst>
+              <a:gd name="adj" fmla="val 14286"/>
+            </a:avLst>
+          </a:prstGeom>
+          <a:solidFill>
+            <a:srgbClr val="1A2332"/>
+          </a:solidFill>
+          <a:ln/>
+        </p:spPr>
+      </p:sp>
+      <p:pic>
+        <p:nvPicPr>
+          <p:cNvPr id="5" name="Image 0" descr="preencoded.png">    </p:cNvPr>
+          <p:cNvPicPr>
+            <a:picLocks noChangeAspect="1"/>
+          </p:cNvPicPr>
+          <p:nvPr/>
+        </p:nvPicPr>
+        <p:blipFill>
+          <a:blip r:embed="rId1"/>
+          <a:stretch>
+            <a:fillRect/>
+          </a:stretch>
+        </p:blipFill>
+        <p:spPr>
+          <a:xfrm>
+            <a:off x="5257800" y="1106424"/>
+            <a:ext cx="438912" cy="438912"/>
+          </a:xfrm>
+          <a:prstGeom prst="rect">
+            <a:avLst/>
+          </a:prstGeom>
+        </p:spPr>
+      </p:pic>
+      <p:sp>
+        <p:nvSpPr>
+          <p:cNvPr id="6" name="Text 3"/>
+          <p:cNvSpPr txBox="1"/>
+          <p:nvPr/>
+        </p:nvSpPr>
+        <p:spPr>
+          <a:xfrm>
+            <a:off x="5806440" y="1005840"/>
+            <a:ext cx="2651760" cy="640080"/>
+          </a:xfrm>
+          <a:prstGeom prst="rect">
+            <a:avLst/>
+          </a:prstGeom>
+          <a:noFill/>
+          <a:ln/>
+        </p:spPr>
+        <p:txBody>
+          <a:bodyPr wrap="square" lIns="0" tIns="0" rIns="0" bIns="0" rtlCol="0" anchor="ctr"/>
+          <a:lstStyle/>
+          <a:p>
+            <a:pPr indent="0" marL="0">
+              <a:buNone/>
+            </a:pPr>
+            <a:r>
+              <a:rPr lang="en-US" sz="1200" dirty="0">
                 <a:solidFill>
                   <a:srgbClr val="FFFFFF"/>
                 </a:solidFill>
@@ -3982,20 +6966,84 @@
                 <a:ea typeface="Calibri" pitchFamily="34" charset="-122"/>
                 <a:cs typeface="Calibri" pitchFamily="34" charset="-120"/>
               </a:rPr>
-              <a:t>Le « lien entre deux pages » = une signature cryptographique qui rend impossible de modifier une page sans modifier toutes les suivantes.</a:t>
-            </a:r>
-            <a:endParaRPr lang="en-US" sz="1400" dirty="0"/>
-          </a:p>
-          <a:p>
-            <a:pPr marL="342900" indent="-342900">
-              <a:spcAft>
-                <a:spcPts val="800"/>
-              </a:spcAft>
-              <a:buSzPct val="100000"/>
-              <a:buChar char="•"/>
-            </a:pPr>
-            <a:r>
-              <a:rPr lang="en-US" sz="1400" dirty="0">
+              <a:t>Le « lien entre deux pages » = une signature cryptographique qui rend impossi...</a:t>
+            </a:r>
+            <a:endParaRPr lang="en-US" sz="1200" dirty="0"/>
+          </a:p>
+        </p:txBody>
+      </p:sp>
+      <p:sp>
+        <p:nvSpPr>
+          <p:cNvPr id="7" name="Shape 4"/>
+          <p:cNvSpPr/>
+          <p:nvPr/>
+        </p:nvSpPr>
+        <p:spPr>
+          <a:xfrm>
+            <a:off x="5120640" y="1737360"/>
+            <a:ext cx="3474720" cy="640080"/>
+          </a:xfrm>
+          <a:prstGeom prst="roundRect">
+            <a:avLst>
+              <a:gd name="adj" fmla="val 14286"/>
+            </a:avLst>
+          </a:prstGeom>
+          <a:solidFill>
+            <a:srgbClr val="1A2332"/>
+          </a:solidFill>
+          <a:ln/>
+        </p:spPr>
+      </p:sp>
+      <p:pic>
+        <p:nvPicPr>
+          <p:cNvPr id="8" name="Image 1" descr="preencoded.png">    </p:cNvPr>
+          <p:cNvPicPr>
+            <a:picLocks noChangeAspect="1"/>
+          </p:cNvPicPr>
+          <p:nvPr/>
+        </p:nvPicPr>
+        <p:blipFill>
+          <a:blip r:embed="rId2"/>
+          <a:stretch>
+            <a:fillRect/>
+          </a:stretch>
+        </p:blipFill>
+        <p:spPr>
+          <a:xfrm>
+            <a:off x="5257800" y="1837944"/>
+            <a:ext cx="438912" cy="438912"/>
+          </a:xfrm>
+          <a:prstGeom prst="rect">
+            <a:avLst/>
+          </a:prstGeom>
+        </p:spPr>
+      </p:pic>
+      <p:sp>
+        <p:nvSpPr>
+          <p:cNvPr id="9" name="Text 5"/>
+          <p:cNvSpPr txBox="1"/>
+          <p:nvPr/>
+        </p:nvSpPr>
+        <p:spPr>
+          <a:xfrm>
+            <a:off x="5806440" y="1737360"/>
+            <a:ext cx="2651760" cy="640080"/>
+          </a:xfrm>
+          <a:prstGeom prst="rect">
+            <a:avLst/>
+          </a:prstGeom>
+          <a:noFill/>
+          <a:ln/>
+        </p:spPr>
+        <p:txBody>
+          <a:bodyPr wrap="square" lIns="0" tIns="0" rIns="0" bIns="0" rtlCol="0" anchor="ctr"/>
+          <a:lstStyle/>
+          <a:p>
+            <a:pPr indent="0" marL="0">
+              <a:buNone/>
+            </a:pPr>
+            <a:r>
+              <a:rPr lang="en-US" sz="1200" dirty="0">
                 <a:solidFill>
                   <a:srgbClr val="FFFFFF"/>
                 </a:solidFill>
@@ -4003,20 +7051,84 @@
                 <a:ea typeface="Calibri" pitchFamily="34" charset="-122"/>
                 <a:cs typeface="Calibri" pitchFamily="34" charset="-120"/>
               </a:rPr>
-              <a:t>Résultat : personne ne peut mentir, personne ne peut effacer, personne ne peut arrêter le réseau. Le cahier est immuable et public.</a:t>
-            </a:r>
-            <a:endParaRPr lang="en-US" sz="1400" dirty="0"/>
-          </a:p>
-          <a:p>
-            <a:pPr marL="342900" indent="-342900">
-              <a:spcAft>
-                <a:spcPts val="800"/>
-              </a:spcAft>
-              <a:buSzPct val="100000"/>
-              <a:buChar char="•"/>
-            </a:pPr>
-            <a:r>
-              <a:rPr lang="en-US" sz="1400" dirty="0">
+              <a:t>Résultat : personne ne peut mentir, personne ne peut effacer, personne ne peu...</a:t>
+            </a:r>
+            <a:endParaRPr lang="en-US" sz="1200" dirty="0"/>
+          </a:p>
+        </p:txBody>
+      </p:sp>
+      <p:sp>
+        <p:nvSpPr>
+          <p:cNvPr id="10" name="Shape 6"/>
+          <p:cNvSpPr/>
+          <p:nvPr/>
+        </p:nvSpPr>
+        <p:spPr>
+          <a:xfrm>
+            <a:off x="5120640" y="2468880"/>
+            <a:ext cx="3474720" cy="640080"/>
+          </a:xfrm>
+          <a:prstGeom prst="roundRect">
+            <a:avLst>
+              <a:gd name="adj" fmla="val 14286"/>
+            </a:avLst>
+          </a:prstGeom>
+          <a:solidFill>
+            <a:srgbClr val="1A2332"/>
+          </a:solidFill>
+          <a:ln/>
+        </p:spPr>
+      </p:sp>
+      <p:pic>
+        <p:nvPicPr>
+          <p:cNvPr id="11" name="Image 2" descr="preencoded.png">    </p:cNvPr>
+          <p:cNvPicPr>
+            <a:picLocks noChangeAspect="1"/>
+          </p:cNvPicPr>
+          <p:nvPr/>
+        </p:nvPicPr>
+        <p:blipFill>
+          <a:blip r:embed="rId3"/>
+          <a:stretch>
+            <a:fillRect/>
+          </a:stretch>
+        </p:blipFill>
+        <p:spPr>
+          <a:xfrm>
+            <a:off x="5257800" y="2569464"/>
+            <a:ext cx="438912" cy="438912"/>
+          </a:xfrm>
+          <a:prstGeom prst="rect">
+            <a:avLst/>
+          </a:prstGeom>
+        </p:spPr>
+      </p:pic>
+      <p:sp>
+        <p:nvSpPr>
+          <p:cNvPr id="12" name="Text 7"/>
+          <p:cNvSpPr txBox="1"/>
+          <p:nvPr/>
+        </p:nvSpPr>
+        <p:spPr>
+          <a:xfrm>
+            <a:off x="5806440" y="2468880"/>
+            <a:ext cx="2651760" cy="640080"/>
+          </a:xfrm>
+          <a:prstGeom prst="rect">
+            <a:avLst/>
+          </a:prstGeom>
+          <a:noFill/>
+          <a:ln/>
+        </p:spPr>
+        <p:txBody>
+          <a:bodyPr wrap="square" lIns="0" tIns="0" rIns="0" bIns="0" rtlCol="0" anchor="ctr"/>
+          <a:lstStyle/>
+          <a:p>
+            <a:pPr indent="0" marL="0">
+              <a:buNone/>
+            </a:pPr>
+            <a:r>
+              <a:rPr lang="en-US" sz="1200" dirty="0">
                 <a:solidFill>
                   <a:srgbClr val="FFFFFF"/>
                 </a:solidFill>
@@ -4024,48 +7136,9 @@
                 <a:ea typeface="Calibri" pitchFamily="34" charset="-122"/>
                 <a:cs typeface="Calibri" pitchFamily="34" charset="-120"/>
               </a:rPr>
-              <a:t>C'est cette propriété qui rend la blockchain si puissante — et si différente de tout ce qu'on connaissait avant.</a:t>
-            </a:r>
-            <a:endParaRPr lang="en-US" sz="1400" dirty="0"/>
-          </a:p>
-        </p:txBody>
-      </p:sp>
-      <p:sp>
-        <p:nvSpPr>
-          <p:cNvPr id="4" name="Text 2"/>
-          <p:cNvSpPr txBox="1"/>
-          <p:nvPr/>
-        </p:nvSpPr>
-        <p:spPr>
-          <a:xfrm>
-            <a:off x="731520" y="4709160"/>
-            <a:ext cx="7680960" cy="274320"/>
-          </a:xfrm>
-          <a:prstGeom prst="rect">
-            <a:avLst/>
-          </a:prstGeom>
-          <a:noFill/>
-          <a:ln/>
-        </p:spPr>
-        <p:txBody>
-          <a:bodyPr wrap="square" lIns="0" tIns="0" rIns="0" bIns="0" rtlCol="0" anchor="ctr"/>
-          <a:lstStyle/>
-          <a:p>
-            <a:pPr algn="r" indent="0" marL="0">
-              <a:buNone/>
-            </a:pPr>
-            <a:r>
-              <a:rPr lang="en-US" sz="900" dirty="0">
-                <a:solidFill>
-                  <a:srgbClr val="64748B"/>
-                </a:solidFill>
-                <a:latin typeface="Calibri" pitchFamily="34" charset="0"/>
-                <a:ea typeface="Calibri" pitchFamily="34" charset="-122"/>
-                <a:cs typeface="Calibri" pitchFamily="34" charset="-120"/>
-              </a:rPr>
-              <a:t>Module 4 — Lecon 1</a:t>
-            </a:r>
-            <a:endParaRPr lang="en-US" sz="900" dirty="0"/>
+              <a:t>C'est cette propriété qui rend la blockchain si puissante — et si différente ...</a:t>
+            </a:r>
+            <a:endParaRPr lang="en-US" sz="1200" dirty="0"/>
           </a:p>
         </p:txBody>
       </p:sp>
@@ -4101,16 +7174,40 @@
           <a:chExt cx="0" cy="0"/>
         </a:xfrm>
       </p:grpSpPr>
-      <p:sp>
-        <p:nvSpPr>
-          <p:cNvPr id="2" name="Text 0"/>
+      <p:pic>
+        <p:nvPicPr>
+          <p:cNvPr id="2" name="Image 0" descr="preencoded.png">    </p:cNvPr>
+          <p:cNvPicPr>
+            <a:picLocks noChangeAspect="1"/>
+          </p:cNvPicPr>
+          <p:nvPr/>
+        </p:nvPicPr>
+        <p:blipFill>
+          <a:blip r:embed="rId1"/>
+          <a:stretch>
+            <a:fillRect/>
+          </a:stretch>
+        </p:blipFill>
+        <p:spPr>
+          <a:xfrm>
+            <a:off x="731520" y="320040"/>
+            <a:ext cx="457200" cy="457200"/>
+          </a:xfrm>
+          <a:prstGeom prst="rect">
+            <a:avLst/>
+          </a:prstGeom>
+        </p:spPr>
+      </p:pic>
+      <p:sp>
+        <p:nvSpPr>
+          <p:cNvPr id="3" name="Text 0"/>
           <p:cNvSpPr txBox="1"/>
           <p:nvPr/>
         </p:nvSpPr>
         <p:spPr>
           <a:xfrm>
-            <a:off x="731520" y="457200"/>
-            <a:ext cx="2743200" cy="365760"/>
+            <a:off x="1280160" y="365760"/>
+            <a:ext cx="2743200" cy="320040"/>
           </a:xfrm>
           <a:prstGeom prst="rect">
             <a:avLst/>
@@ -4142,14 +7239,14 @@
       </p:sp>
       <p:sp>
         <p:nvSpPr>
-          <p:cNvPr id="3" name="Text 1"/>
+          <p:cNvPr id="4" name="Text 1"/>
           <p:cNvSpPr txBox="1"/>
           <p:nvPr/>
         </p:nvSpPr>
         <p:spPr>
           <a:xfrm>
-            <a:off x="731520" y="868680"/>
-            <a:ext cx="7680960" cy="502920"/>
+            <a:off x="731520" y="822960"/>
+            <a:ext cx="7680960" cy="457200"/>
           </a:xfrm>
           <a:prstGeom prst="rect">
             <a:avLst/>
@@ -4165,7 +7262,7 @@
               <a:buNone/>
             </a:pPr>
             <a:r>
-              <a:rPr lang="en-US" sz="2200" b="1" dirty="0">
+              <a:rPr lang="en-US" sz="2000" b="1" dirty="0">
                 <a:solidFill>
                   <a:srgbClr val="FFFFFF"/>
                 </a:solidFill>
@@ -4175,28 +7272,50 @@
               </a:rPr>
               <a:t>Qu'est-ce qu'une blockchain, vraiment ?</a:t>
             </a:r>
-            <a:endParaRPr lang="en-US" sz="2200" dirty="0"/>
-          </a:p>
-        </p:txBody>
-      </p:sp>
-      <p:sp>
-        <p:nvSpPr>
-          <p:cNvPr id="4" name="Text 2"/>
-          <p:cNvSpPr txBox="1"/>
-          <p:nvPr/>
-        </p:nvSpPr>
-        <p:spPr>
-          <a:xfrm>
-            <a:off x="731520" y="1554480"/>
-            <a:ext cx="457200" cy="548640"/>
+            <a:endParaRPr lang="en-US" sz="2000" dirty="0"/>
+          </a:p>
+        </p:txBody>
+      </p:sp>
+      <p:sp>
+        <p:nvSpPr>
+          <p:cNvPr id="5" name="Shape 2"/>
+          <p:cNvSpPr/>
+          <p:nvPr/>
+        </p:nvSpPr>
+        <p:spPr>
+          <a:xfrm>
+            <a:off x="731520" y="1463040"/>
+            <a:ext cx="7680960" cy="548640"/>
           </a:xfrm>
           <a:prstGeom prst="roundRect">
             <a:avLst>
-              <a:gd name="adj" fmla="val 50000"/>
+              <a:gd name="adj" fmla="val 13333"/>
             </a:avLst>
           </a:prstGeom>
           <a:solidFill>
-            <a:srgbClr val="00BFA6"/>
+            <a:srgbClr val="0F1419"/>
+          </a:solidFill>
+          <a:ln/>
+        </p:spPr>
+      </p:sp>
+      <p:sp>
+        <p:nvSpPr>
+          <p:cNvPr id="6" name="Text 3"/>
+          <p:cNvSpPr txBox="1"/>
+          <p:nvPr/>
+        </p:nvSpPr>
+        <p:spPr>
+          <a:xfrm>
+            <a:off x="914400" y="1463040"/>
+            <a:ext cx="411480" cy="548640"/>
+          </a:xfrm>
+          <a:prstGeom prst="roundRect">
+            <a:avLst>
+              <a:gd name="adj" fmla="val 48889"/>
+            </a:avLst>
+          </a:prstGeom>
+          <a:solidFill>
+            <a:srgbClr val="F59E0B"/>
           </a:solidFill>
           <a:ln/>
         </p:spPr>
@@ -4208,7 +7327,7 @@
               <a:buNone/>
             </a:pPr>
             <a:r>
-              <a:rPr lang="en-US" sz="1600" b="1" dirty="0">
+              <a:rPr lang="en-US" sz="1500" b="1" dirty="0">
                 <a:solidFill>
                   <a:srgbClr val="0F1419"/>
                 </a:solidFill>
@@ -4218,20 +7337,20 @@
               </a:rPr>
               <a:t>1</a:t>
             </a:r>
-            <a:endParaRPr lang="en-US" sz="1600" dirty="0"/>
-          </a:p>
-        </p:txBody>
-      </p:sp>
-      <p:sp>
-        <p:nvSpPr>
-          <p:cNvPr id="5" name="Text 3"/>
+            <a:endParaRPr lang="en-US" sz="1500" dirty="0"/>
+          </a:p>
+        </p:txBody>
+      </p:sp>
+      <p:sp>
+        <p:nvSpPr>
+          <p:cNvPr id="7" name="Text 4"/>
           <p:cNvSpPr txBox="1"/>
           <p:nvPr/>
         </p:nvSpPr>
         <p:spPr>
           <a:xfrm>
-            <a:off x="1371600" y="1554480"/>
-            <a:ext cx="7040880" cy="548640"/>
+            <a:off x="1508760" y="1463040"/>
+            <a:ext cx="6766560" cy="548640"/>
           </a:xfrm>
           <a:prstGeom prst="rect">
             <a:avLst/>
@@ -4247,7 +7366,7 @@
               <a:buNone/>
             </a:pPr>
             <a:r>
-              <a:rPr lang="en-US" sz="1400" dirty="0">
+              <a:rPr lang="en-US" sz="1300" dirty="0">
                 <a:solidFill>
                   <a:srgbClr val="FFFFFF"/>
                 </a:solidFill>
@@ -4257,28 +7376,50 @@
               </a:rPr>
               <a:t>Le « cahier » = la blockchain.</a:t>
             </a:r>
-            <a:endParaRPr lang="en-US" sz="1400" dirty="0"/>
-          </a:p>
-        </p:txBody>
-      </p:sp>
-      <p:sp>
-        <p:nvSpPr>
-          <p:cNvPr id="6" name="Text 4"/>
-          <p:cNvSpPr txBox="1"/>
-          <p:nvPr/>
-        </p:nvSpPr>
-        <p:spPr>
-          <a:xfrm>
-            <a:off x="731520" y="2212848"/>
-            <a:ext cx="457200" cy="548640"/>
+            <a:endParaRPr lang="en-US" sz="1300" dirty="0"/>
+          </a:p>
+        </p:txBody>
+      </p:sp>
+      <p:sp>
+        <p:nvSpPr>
+          <p:cNvPr id="8" name="Shape 5"/>
+          <p:cNvSpPr/>
+          <p:nvPr/>
+        </p:nvSpPr>
+        <p:spPr>
+          <a:xfrm>
+            <a:off x="731520" y="2103120"/>
+            <a:ext cx="7680960" cy="548640"/>
           </a:xfrm>
           <a:prstGeom prst="roundRect">
             <a:avLst>
-              <a:gd name="adj" fmla="val 50000"/>
+              <a:gd name="adj" fmla="val 13333"/>
             </a:avLst>
           </a:prstGeom>
           <a:solidFill>
-            <a:srgbClr val="00BFA6"/>
+            <a:srgbClr val="0F1419"/>
+          </a:solidFill>
+          <a:ln/>
+        </p:spPr>
+      </p:sp>
+      <p:sp>
+        <p:nvSpPr>
+          <p:cNvPr id="9" name="Text 6"/>
+          <p:cNvSpPr txBox="1"/>
+          <p:nvPr/>
+        </p:nvSpPr>
+        <p:spPr>
+          <a:xfrm>
+            <a:off x="914400" y="2103120"/>
+            <a:ext cx="411480" cy="548640"/>
+          </a:xfrm>
+          <a:prstGeom prst="roundRect">
+            <a:avLst>
+              <a:gd name="adj" fmla="val 48889"/>
+            </a:avLst>
+          </a:prstGeom>
+          <a:solidFill>
+            <a:srgbClr val="F59E0B"/>
           </a:solidFill>
           <a:ln/>
         </p:spPr>
@@ -4290,7 +7431,7 @@
               <a:buNone/>
             </a:pPr>
             <a:r>
-              <a:rPr lang="en-US" sz="1600" b="1" dirty="0">
+              <a:rPr lang="en-US" sz="1500" b="1" dirty="0">
                 <a:solidFill>
                   <a:srgbClr val="0F1419"/>
                 </a:solidFill>
@@ -4300,20 +7441,20 @@
               </a:rPr>
               <a:t>2</a:t>
             </a:r>
-            <a:endParaRPr lang="en-US" sz="1600" dirty="0"/>
-          </a:p>
-        </p:txBody>
-      </p:sp>
-      <p:sp>
-        <p:nvSpPr>
-          <p:cNvPr id="7" name="Text 5"/>
+            <a:endParaRPr lang="en-US" sz="1500" dirty="0"/>
+          </a:p>
+        </p:txBody>
+      </p:sp>
+      <p:sp>
+        <p:nvSpPr>
+          <p:cNvPr id="10" name="Text 7"/>
           <p:cNvSpPr txBox="1"/>
           <p:nvPr/>
         </p:nvSpPr>
         <p:spPr>
           <a:xfrm>
-            <a:off x="1371600" y="2212848"/>
-            <a:ext cx="7040880" cy="548640"/>
+            <a:off x="1508760" y="2103120"/>
+            <a:ext cx="6766560" cy="548640"/>
           </a:xfrm>
           <a:prstGeom prst="rect">
             <a:avLst/>
@@ -4329,7 +7470,7 @@
               <a:buNone/>
             </a:pPr>
             <a:r>
-              <a:rPr lang="en-US" sz="1400" dirty="0">
+              <a:rPr lang="en-US" sz="1300" dirty="0">
                 <a:solidFill>
                   <a:srgbClr val="FFFFFF"/>
                 </a:solidFill>
@@ -4339,28 +7480,50 @@
               </a:rPr>
               <a:t>Les « villageois » = les nœuds (ordinateurs) du réseau. Il y en a des dizaines de milliers pour Bitcoin.</a:t>
             </a:r>
-            <a:endParaRPr lang="en-US" sz="1400" dirty="0"/>
-          </a:p>
-        </p:txBody>
-      </p:sp>
-      <p:sp>
-        <p:nvSpPr>
-          <p:cNvPr id="8" name="Text 6"/>
-          <p:cNvSpPr txBox="1"/>
-          <p:nvPr/>
-        </p:nvSpPr>
-        <p:spPr>
-          <a:xfrm>
-            <a:off x="731520" y="2871216"/>
-            <a:ext cx="457200" cy="548640"/>
+            <a:endParaRPr lang="en-US" sz="1300" dirty="0"/>
+          </a:p>
+        </p:txBody>
+      </p:sp>
+      <p:sp>
+        <p:nvSpPr>
+          <p:cNvPr id="11" name="Shape 8"/>
+          <p:cNvSpPr/>
+          <p:nvPr/>
+        </p:nvSpPr>
+        <p:spPr>
+          <a:xfrm>
+            <a:off x="731520" y="2743200"/>
+            <a:ext cx="7680960" cy="548640"/>
           </a:xfrm>
           <a:prstGeom prst="roundRect">
             <a:avLst>
-              <a:gd name="adj" fmla="val 50000"/>
+              <a:gd name="adj" fmla="val 13333"/>
             </a:avLst>
           </a:prstGeom>
           <a:solidFill>
-            <a:srgbClr val="00BFA6"/>
+            <a:srgbClr val="0F1419"/>
+          </a:solidFill>
+          <a:ln/>
+        </p:spPr>
+      </p:sp>
+      <p:sp>
+        <p:nvSpPr>
+          <p:cNvPr id="12" name="Text 9"/>
+          <p:cNvSpPr txBox="1"/>
+          <p:nvPr/>
+        </p:nvSpPr>
+        <p:spPr>
+          <a:xfrm>
+            <a:off x="914400" y="2743200"/>
+            <a:ext cx="411480" cy="548640"/>
+          </a:xfrm>
+          <a:prstGeom prst="roundRect">
+            <a:avLst>
+              <a:gd name="adj" fmla="val 48889"/>
+            </a:avLst>
+          </a:prstGeom>
+          <a:solidFill>
+            <a:srgbClr val="F59E0B"/>
           </a:solidFill>
           <a:ln/>
         </p:spPr>
@@ -4372,7 +7535,7 @@
               <a:buNone/>
             </a:pPr>
             <a:r>
-              <a:rPr lang="en-US" sz="1600" b="1" dirty="0">
+              <a:rPr lang="en-US" sz="1500" b="1" dirty="0">
                 <a:solidFill>
                   <a:srgbClr val="0F1419"/>
                 </a:solidFill>
@@ -4382,20 +7545,20 @@
               </a:rPr>
               <a:t>3</a:t>
             </a:r>
-            <a:endParaRPr lang="en-US" sz="1600" dirty="0"/>
-          </a:p>
-        </p:txBody>
-      </p:sp>
-      <p:sp>
-        <p:nvSpPr>
-          <p:cNvPr id="9" name="Text 7"/>
+            <a:endParaRPr lang="en-US" sz="1500" dirty="0"/>
+          </a:p>
+        </p:txBody>
+      </p:sp>
+      <p:sp>
+        <p:nvSpPr>
+          <p:cNvPr id="13" name="Text 10"/>
           <p:cNvSpPr txBox="1"/>
           <p:nvPr/>
         </p:nvSpPr>
         <p:spPr>
           <a:xfrm>
-            <a:off x="1371600" y="2871216"/>
-            <a:ext cx="7040880" cy="548640"/>
+            <a:off x="1508760" y="2743200"/>
+            <a:ext cx="6766560" cy="548640"/>
           </a:xfrm>
           <a:prstGeom prst="rect">
             <a:avLst/>
@@ -4411,7 +7574,7 @@
               <a:buNone/>
             </a:pPr>
             <a:r>
-              <a:rPr lang="en-US" sz="1400" dirty="0">
+              <a:rPr lang="en-US" sz="1300" dirty="0">
                 <a:solidFill>
                   <a:srgbClr val="FFFFFF"/>
                 </a:solidFill>
@@ -4421,28 +7584,50 @@
               </a:rPr>
               <a:t>Les « pages du cahier » = les blocs. Chaque bloc contient des centaines ou milliers de transactions.</a:t>
             </a:r>
-            <a:endParaRPr lang="en-US" sz="1400" dirty="0"/>
-          </a:p>
-        </p:txBody>
-      </p:sp>
-      <p:sp>
-        <p:nvSpPr>
-          <p:cNvPr id="10" name="Text 8"/>
-          <p:cNvSpPr txBox="1"/>
-          <p:nvPr/>
-        </p:nvSpPr>
-        <p:spPr>
-          <a:xfrm>
-            <a:off x="731520" y="3529584"/>
-            <a:ext cx="457200" cy="548640"/>
+            <a:endParaRPr lang="en-US" sz="1300" dirty="0"/>
+          </a:p>
+        </p:txBody>
+      </p:sp>
+      <p:sp>
+        <p:nvSpPr>
+          <p:cNvPr id="14" name="Shape 11"/>
+          <p:cNvSpPr/>
+          <p:nvPr/>
+        </p:nvSpPr>
+        <p:spPr>
+          <a:xfrm>
+            <a:off x="731520" y="3383280"/>
+            <a:ext cx="7680960" cy="548640"/>
           </a:xfrm>
           <a:prstGeom prst="roundRect">
             <a:avLst>
-              <a:gd name="adj" fmla="val 50000"/>
+              <a:gd name="adj" fmla="val 13333"/>
             </a:avLst>
           </a:prstGeom>
           <a:solidFill>
-            <a:srgbClr val="00BFA6"/>
+            <a:srgbClr val="0F1419"/>
+          </a:solidFill>
+          <a:ln/>
+        </p:spPr>
+      </p:sp>
+      <p:sp>
+        <p:nvSpPr>
+          <p:cNvPr id="15" name="Text 12"/>
+          <p:cNvSpPr txBox="1"/>
+          <p:nvPr/>
+        </p:nvSpPr>
+        <p:spPr>
+          <a:xfrm>
+            <a:off x="914400" y="3383280"/>
+            <a:ext cx="411480" cy="548640"/>
+          </a:xfrm>
+          <a:prstGeom prst="roundRect">
+            <a:avLst>
+              <a:gd name="adj" fmla="val 48889"/>
+            </a:avLst>
+          </a:prstGeom>
+          <a:solidFill>
+            <a:srgbClr val="F59E0B"/>
           </a:solidFill>
           <a:ln/>
         </p:spPr>
@@ -4454,7 +7639,7 @@
               <a:buNone/>
             </a:pPr>
             <a:r>
-              <a:rPr lang="en-US" sz="1600" b="1" dirty="0">
+              <a:rPr lang="en-US" sz="1500" b="1" dirty="0">
                 <a:solidFill>
                   <a:srgbClr val="0F1419"/>
                 </a:solidFill>
@@ -4464,20 +7649,20 @@
               </a:rPr>
               <a:t>4</a:t>
             </a:r>
-            <a:endParaRPr lang="en-US" sz="1600" dirty="0"/>
-          </a:p>
-        </p:txBody>
-      </p:sp>
-      <p:sp>
-        <p:nvSpPr>
-          <p:cNvPr id="11" name="Text 9"/>
+            <a:endParaRPr lang="en-US" sz="1500" dirty="0"/>
+          </a:p>
+        </p:txBody>
+      </p:sp>
+      <p:sp>
+        <p:nvSpPr>
+          <p:cNvPr id="16" name="Text 13"/>
           <p:cNvSpPr txBox="1"/>
           <p:nvPr/>
         </p:nvSpPr>
         <p:spPr>
           <a:xfrm>
-            <a:off x="1371600" y="3529584"/>
-            <a:ext cx="7040880" cy="548640"/>
+            <a:off x="1508760" y="3383280"/>
+            <a:ext cx="6766560" cy="548640"/>
           </a:xfrm>
           <a:prstGeom prst="rect">
             <a:avLst/>
@@ -4493,7 +7678,7 @@
               <a:buNone/>
             </a:pPr>
             <a:r>
-              <a:rPr lang="en-US" sz="1400" dirty="0">
+              <a:rPr lang="en-US" sz="1300" dirty="0">
                 <a:solidFill>
                   <a:srgbClr val="FFFFFF"/>
                 </a:solidFill>
@@ -4503,7 +7688,7 @@
               </a:rPr>
               <a:t>Le « lien entre deux pages » = une signature cryptographique qui rend impossible de modifier une page sans modifier toutes les suivantes.</a:t>
             </a:r>
-            <a:endParaRPr lang="en-US" sz="1400" dirty="0"/>
+            <a:endParaRPr lang="en-US" sz="1300" dirty="0"/>
           </a:p>
         </p:txBody>
       </p:sp>
@@ -4539,35 +7724,105 @@
           <a:chExt cx="0" cy="0"/>
         </a:xfrm>
       </p:grpSpPr>
-      <p:sp>
-        <p:nvSpPr>
-          <p:cNvPr id="2" name="Shape 0"/>
+      <p:pic>
+        <p:nvPicPr>
+          <p:cNvPr id="2" name="Image 0" descr="preencoded.png">    </p:cNvPr>
+          <p:cNvPicPr>
+            <a:picLocks noChangeAspect="1"/>
+          </p:cNvPicPr>
+          <p:nvPr/>
+        </p:nvPicPr>
+        <p:blipFill>
+          <a:blip r:embed="rId1"/>
+          <a:stretch>
+            <a:fillRect/>
+          </a:stretch>
+        </p:blipFill>
+        <p:spPr>
+          <a:xfrm>
+            <a:off x="7315200" y="548640"/>
+            <a:ext cx="1280160" cy="1280160"/>
+          </a:xfrm>
+          <a:prstGeom prst="rect">
+            <a:avLst/>
+          </a:prstGeom>
+        </p:spPr>
+      </p:pic>
+      <p:pic>
+        <p:nvPicPr>
+          <p:cNvPr id="3" name="Image 1" descr="preencoded.png">    </p:cNvPr>
+          <p:cNvPicPr>
+            <a:picLocks noChangeAspect="1"/>
+          </p:cNvPicPr>
+          <p:nvPr/>
+        </p:nvPicPr>
+        <p:blipFill>
+          <a:blip r:embed="rId2"/>
+          <a:stretch>
+            <a:fillRect/>
+          </a:stretch>
+        </p:blipFill>
+        <p:spPr>
+          <a:xfrm>
+            <a:off x="7772400" y="2011680"/>
+            <a:ext cx="822960" cy="822960"/>
+          </a:xfrm>
+          <a:prstGeom prst="rect">
+            <a:avLst/>
+          </a:prstGeom>
+        </p:spPr>
+      </p:pic>
+      <p:sp>
+        <p:nvSpPr>
+          <p:cNvPr id="4" name="Shape 0"/>
           <p:cNvSpPr/>
           <p:nvPr/>
         </p:nvSpPr>
         <p:spPr>
           <a:xfrm>
-            <a:off x="548640" y="914400"/>
-            <a:ext cx="45720" cy="2560320"/>
-          </a:xfrm>
-          <a:prstGeom prst="rect">
+            <a:off x="6583680" y="-274320"/>
+            <a:ext cx="3200400" cy="3200400"/>
+          </a:xfrm>
+          <a:prstGeom prst="ellipse">
             <a:avLst/>
           </a:prstGeom>
           <a:solidFill>
-            <a:srgbClr val="00BFA6"/>
+            <a:srgbClr val="F59E0B">
+              <a:alpha val="6000"/>
+            </a:srgbClr>
           </a:solidFill>
           <a:ln/>
         </p:spPr>
       </p:sp>
       <p:sp>
         <p:nvSpPr>
-          <p:cNvPr id="3" name="Text 1"/>
+          <p:cNvPr id="5" name="Shape 1"/>
+          <p:cNvSpPr/>
+          <p:nvPr/>
+        </p:nvSpPr>
+        <p:spPr>
+          <a:xfrm>
+            <a:off x="731520" y="914400"/>
+            <a:ext cx="45720" cy="2194560"/>
+          </a:xfrm>
+          <a:prstGeom prst="rect">
+            <a:avLst/>
+          </a:prstGeom>
+          <a:solidFill>
+            <a:srgbClr val="F59E0B"/>
+          </a:solidFill>
+          <a:ln/>
+        </p:spPr>
+      </p:sp>
+      <p:sp>
+        <p:nvSpPr>
+          <p:cNvPr id="6" name="Text 2"/>
           <p:cNvSpPr txBox="1"/>
           <p:nvPr/>
         </p:nvSpPr>
         <p:spPr>
           <a:xfrm>
-            <a:off x="822960" y="1097280"/>
+            <a:off x="960120" y="914400"/>
             <a:ext cx="2743200" cy="365760"/>
           </a:xfrm>
           <a:prstGeom prst="rect">
@@ -4586,13 +7841,13 @@
             <a:r>
               <a:rPr lang="en-US" sz="1200" b="1" spc="200" kern="0" dirty="0">
                 <a:solidFill>
-                  <a:srgbClr val="00BFA6"/>
-                </a:solidFill>
-                <a:latin typeface="Calibri" pitchFamily="34" charset="0"/>
-                <a:ea typeface="Calibri" pitchFamily="34" charset="-122"/>
-                <a:cs typeface="Calibri" pitchFamily="34" charset="-120"/>
-              </a:rPr>
-              <a:t>Lecon 2 / 3</a:t>
+                  <a:srgbClr val="F59E0B"/>
+                </a:solidFill>
+                <a:latin typeface="Calibri" pitchFamily="34" charset="0"/>
+                <a:ea typeface="Calibri" pitchFamily="34" charset="-122"/>
+                <a:cs typeface="Calibri" pitchFamily="34" charset="-120"/>
+              </a:rPr>
+              <a:t>Leçon 2 / 3</a:t>
             </a:r>
             <a:endParaRPr lang="en-US" sz="1200" dirty="0"/>
           </a:p>
@@ -4600,14 +7855,14 @@
       </p:sp>
       <p:sp>
         <p:nvSpPr>
-          <p:cNvPr id="4" name="Text 2"/>
+          <p:cNvPr id="7" name="Text 3"/>
           <p:cNvSpPr txBox="1"/>
           <p:nvPr/>
         </p:nvSpPr>
         <p:spPr>
           <a:xfrm>
-            <a:off x="822960" y="1645920"/>
-            <a:ext cx="7498080" cy="1280160"/>
+            <a:off x="960120" y="1371600"/>
+            <a:ext cx="6217920" cy="1463040"/>
           </a:xfrm>
           <a:prstGeom prst="rect">
             <a:avLst/>
@@ -4623,7 +7878,7 @@
               <a:buNone/>
             </a:pPr>
             <a:r>
-              <a:rPr lang="en-US" sz="3000" b="1" dirty="0">
+              <a:rPr lang="en-US" sz="2800" b="1" dirty="0">
                 <a:solidFill>
                   <a:srgbClr val="FFFFFF"/>
                 </a:solidFill>
@@ -4633,19 +7888,19 @@
               </a:rPr>
               <a:t>Un bloc, un mineur, une transaction</a:t>
             </a:r>
-            <a:endParaRPr lang="en-US" sz="3000" dirty="0"/>
-          </a:p>
-        </p:txBody>
-      </p:sp>
-      <p:sp>
-        <p:nvSpPr>
-          <p:cNvPr id="5" name="Text 3"/>
+            <a:endParaRPr lang="en-US" sz="2800" dirty="0"/>
+          </a:p>
+        </p:txBody>
+      </p:sp>
+      <p:sp>
+        <p:nvSpPr>
+          <p:cNvPr id="8" name="Text 4"/>
           <p:cNvSpPr txBox="1"/>
           <p:nvPr/>
         </p:nvSpPr>
         <p:spPr>
           <a:xfrm>
-            <a:off x="822960" y="4206240"/>
+            <a:off x="960120" y="4114800"/>
             <a:ext cx="5486400" cy="320040"/>
           </a:xfrm>
           <a:prstGeom prst="rect">
@@ -4710,7 +7965,53 @@
       </p:grpSpPr>
       <p:sp>
         <p:nvSpPr>
-          <p:cNvPr id="2" name="Text 0"/>
+          <p:cNvPr id="2" name="Shape 0"/>
+          <p:cNvSpPr/>
+          <p:nvPr/>
+        </p:nvSpPr>
+        <p:spPr>
+          <a:xfrm>
+            <a:off x="7955280" y="182880"/>
+            <a:ext cx="640080" cy="640080"/>
+          </a:xfrm>
+          <a:prstGeom prst="ellipse">
+            <a:avLst/>
+          </a:prstGeom>
+          <a:solidFill>
+            <a:srgbClr val="F59E0B">
+              <a:alpha val="12000"/>
+            </a:srgbClr>
+          </a:solidFill>
+          <a:ln/>
+        </p:spPr>
+      </p:sp>
+      <p:pic>
+        <p:nvPicPr>
+          <p:cNvPr id="3" name="Image 0" descr="preencoded.png">    </p:cNvPr>
+          <p:cNvPicPr>
+            <a:picLocks noChangeAspect="1"/>
+          </p:cNvPicPr>
+          <p:nvPr/>
+        </p:nvPicPr>
+        <p:blipFill>
+          <a:blip r:embed="rId1"/>
+          <a:stretch>
+            <a:fillRect/>
+          </a:stretch>
+        </p:blipFill>
+        <p:spPr>
+          <a:xfrm>
+            <a:off x="8028432" y="256032"/>
+            <a:ext cx="493776" cy="493776"/>
+          </a:xfrm>
+          <a:prstGeom prst="rect">
+            <a:avLst/>
+          </a:prstGeom>
+        </p:spPr>
+      </p:pic>
+      <p:sp>
+        <p:nvSpPr>
+          <p:cNvPr id="4" name="Text 1"/>
           <p:cNvSpPr txBox="1"/>
           <p:nvPr/>
         </p:nvSpPr>
@@ -4766,7 +8067,7 @@
                 <a:ea typeface="Calibri" pitchFamily="34" charset="-122"/>
                 <a:cs typeface="Calibri" pitchFamily="34" charset="-120"/>
               </a:rPr>
-              <a:t>Avec votre clé privée (le mot de passe secret de votre portefeuille), vous signez : « J'envoie 10 USDT de mon adresse à celle de Fatou ». La signature prouve que c'est bien vous...</a:t>
+              <a:t>Avec votre clé privée (le mot de passe secret de votre portefeuille), vous signez : « J'envoie 10 USDT de mon adresse à celle de Fatou ».</a:t>
             </a:r>
             <a:endParaRPr lang="en-US" sz="1400" dirty="0"/>
           </a:p>
@@ -4787,57 +8088,15 @@
                 <a:ea typeface="Calibri" pitchFamily="34" charset="-122"/>
                 <a:cs typeface="Calibri" pitchFamily="34" charset="-120"/>
               </a:rPr>
-              <a:t>Elle est envoyée à tous les nœuds du monde en quelques secondes. Chaque nœud vérifie : « Est-ce que cette personne a bien 10 USDT ? Est-ce que sa signature est valide ? »</a:t>
+              <a:t>La signature prouve que c'est bien vous, sans révéler votre mot de passe.</a:t>
             </a:r>
             <a:endParaRPr lang="en-US" sz="1400" dirty="0"/>
           </a:p>
-          <a:p>
-            <a:pPr marL="342900" indent="-342900">
-              <a:spcAft>
-                <a:spcPts val="800"/>
-              </a:spcAft>
-              <a:buSzPct val="100000"/>
-              <a:buChar char="•"/>
-            </a:pPr>
-            <a:r>
-              <a:rPr lang="en-US" sz="1400" dirty="0">
-                <a:solidFill>
-                  <a:srgbClr val="FFFFFF"/>
-                </a:solidFill>
-                <a:latin typeface="Calibri" pitchFamily="34" charset="0"/>
-                <a:ea typeface="Calibri" pitchFamily="34" charset="-122"/>
-                <a:cs typeface="Calibri" pitchFamily="34" charset="-120"/>
-              </a:rPr>
-              <a:t>Les mineurs (ou « validateurs » sur certaines blockchains) rassemblent les transactions en attente et forment un bloc. Sur Bitcoin, un nouveau bloc est créé toutes les 10 minute...</a:t>
-            </a:r>
-            <a:endParaRPr lang="en-US" sz="1400" dirty="0"/>
-          </a:p>
-          <a:p>
-            <a:pPr marL="342900" indent="-342900">
-              <a:spcAft>
-                <a:spcPts val="800"/>
-              </a:spcAft>
-              <a:buSzPct val="100000"/>
-              <a:buChar char="•"/>
-            </a:pPr>
-            <a:r>
-              <a:rPr lang="en-US" sz="1400" dirty="0">
-                <a:solidFill>
-                  <a:srgbClr val="FFFFFF"/>
-                </a:solidFill>
-                <a:latin typeface="Calibri" pitchFamily="34" charset="0"/>
-                <a:ea typeface="Calibri" pitchFamily="34" charset="-122"/>
-                <a:cs typeface="Calibri" pitchFamily="34" charset="-120"/>
-              </a:rPr>
-              <a:t>Il résout un puzzle mathématique très coûteux en calcul (c'est ça, la « preuve de travail »). Le premier qui trouve la solution ajoute le bloc à la chaîne et reçoit une récompen...</a:t>
-            </a:r>
-            <a:endParaRPr lang="en-US" sz="1400" dirty="0"/>
-          </a:p>
-        </p:txBody>
-      </p:sp>
-      <p:sp>
-        <p:nvSpPr>
-          <p:cNvPr id="3" name="Text 1"/>
+        </p:txBody>
+      </p:sp>
+      <p:sp>
+        <p:nvSpPr>
+          <p:cNvPr id="5" name="Text 2"/>
           <p:cNvSpPr txBox="1"/>
           <p:nvPr/>
         </p:nvSpPr>
@@ -4868,7 +8127,7 @@
                 <a:ea typeface="Calibri" pitchFamily="34" charset="-122"/>
                 <a:cs typeface="Calibri" pitchFamily="34" charset="-120"/>
               </a:rPr>
-              <a:t>Module 4 — Lecon 2</a:t>
+              <a:t>Module 4 — Leçon 2</a:t>
             </a:r>
             <a:endParaRPr lang="en-US" sz="900" dirty="0"/>
           </a:p>
@@ -4914,8 +8173,8 @@
         </p:nvSpPr>
         <p:spPr>
           <a:xfrm>
-            <a:off x="731520" y="365760"/>
-            <a:ext cx="7680960" cy="548640"/>
+            <a:off x="731520" y="274320"/>
+            <a:ext cx="7680960" cy="502920"/>
           </a:xfrm>
           <a:prstGeom prst="rect">
             <a:avLst/>
@@ -4931,17 +8190,17 @@
               <a:buNone/>
             </a:pPr>
             <a:r>
-              <a:rPr lang="en-US" sz="2200" b="1" dirty="0">
-                <a:solidFill>
-                  <a:srgbClr val="00BFA6"/>
-                </a:solidFill>
-                <a:latin typeface="Calibri" pitchFamily="34" charset="0"/>
-                <a:ea typeface="Calibri" pitchFamily="34" charset="-122"/>
-                <a:cs typeface="Calibri" pitchFamily="34" charset="-120"/>
-              </a:rPr>
-              <a:t>Étape 5 — Le bloc est diffusé, tout le monde met à jour</a:t>
-            </a:r>
-            <a:endParaRPr lang="en-US" sz="2200" dirty="0"/>
+              <a:rPr lang="en-US" sz="2000" b="1" dirty="0">
+                <a:solidFill>
+                  <a:srgbClr val="F59E0B"/>
+                </a:solidFill>
+                <a:latin typeface="Calibri" pitchFamily="34" charset="0"/>
+                <a:ea typeface="Calibri" pitchFamily="34" charset="-122"/>
+                <a:cs typeface="Calibri" pitchFamily="34" charset="-120"/>
+              </a:rPr>
+              <a:t>Étape 2 — La transaction est diffusée sur le réseau</a:t>
+            </a:r>
+            <a:endParaRPr lang="en-US" sz="2000" dirty="0"/>
           </a:p>
         </p:txBody>
       </p:sp>
@@ -4953,8 +8212,8 @@
         </p:nvSpPr>
         <p:spPr>
           <a:xfrm>
-            <a:off x="731520" y="1051560"/>
-            <a:ext cx="7680960" cy="3657600"/>
+            <a:off x="731520" y="1005840"/>
+            <a:ext cx="4206240" cy="3474720"/>
           </a:xfrm>
           <a:prstGeom prst="rect">
             <a:avLst/>
@@ -4968,13 +8227,13 @@
           <a:p>
             <a:pPr marL="342900" indent="-342900">
               <a:spcAft>
-                <a:spcPts val="800"/>
+                <a:spcPts val="600"/>
               </a:spcAft>
               <a:buSzPct val="100000"/>
               <a:buChar char="•"/>
             </a:pPr>
             <a:r>
-              <a:rPr lang="en-US" sz="1400" dirty="0">
+              <a:rPr lang="en-US" sz="1300" dirty="0">
                 <a:solidFill>
                   <a:srgbClr val="FFFFFF"/>
                 </a:solidFill>
@@ -4982,20 +8241,20 @@
                 <a:ea typeface="Calibri" pitchFamily="34" charset="-122"/>
                 <a:cs typeface="Calibri" pitchFamily="34" charset="-120"/>
               </a:rPr>
-              <a:t>Tous les nœuds du réseau reçoivent le nouveau bloc, vérifient qu'il est valide, et l'ajoutent à leur copie de la blockchain. Votre transaction est désormais confirmée et permane...</a:t>
-            </a:r>
-            <a:endParaRPr lang="en-US" sz="1400" dirty="0"/>
+              <a:t>Elle est envoyée à tous les nœuds du monde en quelques secondes.</a:t>
+            </a:r>
+            <a:endParaRPr lang="en-US" sz="1300" dirty="0"/>
           </a:p>
           <a:p>
             <a:pPr marL="342900" indent="-342900">
               <a:spcAft>
-                <a:spcPts val="800"/>
+                <a:spcPts val="600"/>
               </a:spcAft>
               <a:buSzPct val="100000"/>
               <a:buChar char="•"/>
             </a:pPr>
             <a:r>
-              <a:rPr lang="en-US" sz="1400" dirty="0">
+              <a:rPr lang="en-US" sz="1300" dirty="0">
                 <a:solidFill>
                   <a:srgbClr val="FFFFFF"/>
                 </a:solidFill>
@@ -5003,20 +8262,84 @@
                 <a:ea typeface="Calibri" pitchFamily="34" charset="-122"/>
                 <a:cs typeface="Calibri" pitchFamily="34" charset="-120"/>
               </a:rPr>
-              <a:t>En tout : entre 3 secondes (Tron) et 60 minutes (Bitcoin) pour qu'une transaction soit totalement sûre.</a:t>
-            </a:r>
-            <a:endParaRPr lang="en-US" sz="1400" dirty="0"/>
-          </a:p>
-          <a:p>
-            <a:pPr marL="342900" indent="-342900">
-              <a:spcAft>
-                <a:spcPts val="800"/>
-              </a:spcAft>
-              <a:buSzPct val="100000"/>
-              <a:buChar char="•"/>
-            </a:pPr>
-            <a:r>
-              <a:rPr lang="en-US" sz="1400" dirty="0">
+              <a:t>Chaque nœud vérifie : « Est-ce que cette personne a bien 10 USDT ?</a:t>
+            </a:r>
+            <a:endParaRPr lang="en-US" sz="1300" dirty="0"/>
+          </a:p>
+        </p:txBody>
+      </p:sp>
+      <p:sp>
+        <p:nvSpPr>
+          <p:cNvPr id="4" name="Shape 2"/>
+          <p:cNvSpPr/>
+          <p:nvPr/>
+        </p:nvSpPr>
+        <p:spPr>
+          <a:xfrm>
+            <a:off x="5120640" y="1005840"/>
+            <a:ext cx="3474720" cy="640080"/>
+          </a:xfrm>
+          <a:prstGeom prst="roundRect">
+            <a:avLst>
+              <a:gd name="adj" fmla="val 14286"/>
+            </a:avLst>
+          </a:prstGeom>
+          <a:solidFill>
+            <a:srgbClr val="1A2332"/>
+          </a:solidFill>
+          <a:ln/>
+        </p:spPr>
+      </p:sp>
+      <p:pic>
+        <p:nvPicPr>
+          <p:cNvPr id="5" name="Image 0" descr="preencoded.png">    </p:cNvPr>
+          <p:cNvPicPr>
+            <a:picLocks noChangeAspect="1"/>
+          </p:cNvPicPr>
+          <p:nvPr/>
+        </p:nvPicPr>
+        <p:blipFill>
+          <a:blip r:embed="rId1"/>
+          <a:stretch>
+            <a:fillRect/>
+          </a:stretch>
+        </p:blipFill>
+        <p:spPr>
+          <a:xfrm>
+            <a:off x="5257800" y="1106424"/>
+            <a:ext cx="438912" cy="438912"/>
+          </a:xfrm>
+          <a:prstGeom prst="rect">
+            <a:avLst/>
+          </a:prstGeom>
+        </p:spPr>
+      </p:pic>
+      <p:sp>
+        <p:nvSpPr>
+          <p:cNvPr id="6" name="Text 3"/>
+          <p:cNvSpPr txBox="1"/>
+          <p:nvPr/>
+        </p:nvSpPr>
+        <p:spPr>
+          <a:xfrm>
+            <a:off x="5806440" y="1005840"/>
+            <a:ext cx="2651760" cy="640080"/>
+          </a:xfrm>
+          <a:prstGeom prst="rect">
+            <a:avLst/>
+          </a:prstGeom>
+          <a:noFill/>
+          <a:ln/>
+        </p:spPr>
+        <p:txBody>
+          <a:bodyPr wrap="square" lIns="0" tIns="0" rIns="0" bIns="0" rtlCol="0" anchor="ctr"/>
+          <a:lstStyle/>
+          <a:p>
+            <a:pPr indent="0" marL="0">
+              <a:buNone/>
+            </a:pPr>
+            <a:r>
+              <a:rPr lang="en-US" sz="1200" dirty="0">
                 <a:solidFill>
                   <a:srgbClr val="FFFFFF"/>
                 </a:solidFill>
@@ -5024,48 +8347,9 @@
                 <a:ea typeface="Calibri" pitchFamily="34" charset="-122"/>
                 <a:cs typeface="Calibri" pitchFamily="34" charset="-120"/>
               </a:rPr>
-              <a:t>Ce processus est ce qui rend impossible de « dépenser deux fois le même argent » — le fameux problème de la double dépense que Satoshi a résolu.</a:t>
-            </a:r>
-            <a:endParaRPr lang="en-US" sz="1400" dirty="0"/>
-          </a:p>
-        </p:txBody>
-      </p:sp>
-      <p:sp>
-        <p:nvSpPr>
-          <p:cNvPr id="4" name="Text 2"/>
-          <p:cNvSpPr txBox="1"/>
-          <p:nvPr/>
-        </p:nvSpPr>
-        <p:spPr>
-          <a:xfrm>
-            <a:off x="731520" y="4709160"/>
-            <a:ext cx="7680960" cy="274320"/>
-          </a:xfrm>
-          <a:prstGeom prst="rect">
-            <a:avLst/>
-          </a:prstGeom>
-          <a:noFill/>
-          <a:ln/>
-        </p:spPr>
-        <p:txBody>
-          <a:bodyPr wrap="square" lIns="0" tIns="0" rIns="0" bIns="0" rtlCol="0" anchor="ctr"/>
-          <a:lstStyle/>
-          <a:p>
-            <a:pPr algn="r" indent="0" marL="0">
-              <a:buNone/>
-            </a:pPr>
-            <a:r>
-              <a:rPr lang="en-US" sz="900" dirty="0">
-                <a:solidFill>
-                  <a:srgbClr val="64748B"/>
-                </a:solidFill>
-                <a:latin typeface="Calibri" pitchFamily="34" charset="0"/>
-                <a:ea typeface="Calibri" pitchFamily="34" charset="-122"/>
-                <a:cs typeface="Calibri" pitchFamily="34" charset="-120"/>
-              </a:rPr>
-              <a:t>Module 4 — Lecon 2</a:t>
-            </a:r>
-            <a:endParaRPr lang="en-US" sz="900" dirty="0"/>
+              <a:t>Est-ce que sa signature est valide ?</a:t>
+            </a:r>
+            <a:endParaRPr lang="en-US" sz="1200" dirty="0"/>
           </a:p>
         </p:txBody>
       </p:sp>

--- a/public/course-materials/pptx/Module-04-Comprendre-la-blockchain-sans-jargon.pptx
+++ b/public/course-materials/pptx/Module-04-Comprendre-la-blockchain-sans-jargon.pptx
@@ -2459,7 +2459,7 @@
     <p:bg>
       <p:bgPr>
         <a:solidFill>
-          <a:srgbClr val="0F1419"/>
+          <a:srgbClr val="0F1214"/>
         </a:solidFill>
       </p:bgPr>
     </p:bg>
@@ -2492,7 +2492,7 @@
             <a:avLst/>
           </a:prstGeom>
           <a:solidFill>
-            <a:srgbClr val="F59E0B">
+            <a:srgbClr val="3B968F">
               <a:alpha val="8000"/>
             </a:srgbClr>
           </a:solidFill>
@@ -2514,7 +2514,7 @@
             <a:avLst/>
           </a:prstGeom>
           <a:solidFill>
-            <a:srgbClr val="F59E0B">
+            <a:srgbClr val="3B968F">
               <a:alpha val="5000"/>
             </a:srgbClr>
           </a:solidFill>
@@ -2536,7 +2536,7 @@
             <a:avLst/>
           </a:prstGeom>
           <a:solidFill>
-            <a:srgbClr val="F59E0B"/>
+            <a:srgbClr val="3B968F"/>
           </a:solidFill>
           <a:ln/>
         </p:spPr>
@@ -2592,7 +2592,7 @@
             <a:r>
               <a:rPr lang="en-US" sz="1300" b="1" spc="400" kern="0" dirty="0">
                 <a:solidFill>
-                  <a:srgbClr val="F59E0B"/>
+                  <a:srgbClr val="3B968F"/>
                 </a:solidFill>
                 <a:latin typeface="Calibri" pitchFamily="34" charset="0"/>
                 <a:ea typeface="Calibri" pitchFamily="34" charset="-122"/>
@@ -2658,7 +2658,7 @@
             <a:avLst/>
           </a:prstGeom>
           <a:solidFill>
-            <a:srgbClr val="F59E0B"/>
+            <a:srgbClr val="3B968F"/>
           </a:solidFill>
           <a:ln/>
         </p:spPr>
@@ -2690,7 +2690,7 @@
             <a:r>
               <a:rPr lang="en-US" sz="1100" spc="300" kern="0" dirty="0">
                 <a:solidFill>
-                  <a:srgbClr val="64748B"/>
+                  <a:srgbClr val="5B6672"/>
                 </a:solidFill>
                 <a:latin typeface="Calibri" pitchFamily="34" charset="0"/>
                 <a:ea typeface="Calibri" pitchFamily="34" charset="-122"/>
@@ -2729,7 +2729,7 @@
             <a:r>
               <a:rPr lang="en-US" sz="1100" dirty="0">
                 <a:solidFill>
-                  <a:srgbClr val="94A3B8"/>
+                  <a:srgbClr val="8994A0"/>
                 </a:solidFill>
                 <a:latin typeface="Calibri" pitchFamily="34" charset="0"/>
                 <a:ea typeface="Calibri" pitchFamily="34" charset="-122"/>
@@ -2755,7 +2755,7 @@
     <p:bg>
       <p:bgPr>
         <a:solidFill>
-          <a:srgbClr val="0F1419"/>
+          <a:srgbClr val="0F1214"/>
         </a:solidFill>
       </p:bgPr>
     </p:bg>
@@ -2800,7 +2800,7 @@
             <a:r>
               <a:rPr lang="en-US" sz="2000" b="1" dirty="0">
                 <a:solidFill>
-                  <a:srgbClr val="F59E0B"/>
+                  <a:srgbClr val="3B968F"/>
                 </a:solidFill>
                 <a:latin typeface="Calibri" pitchFamily="34" charset="0"/>
                 <a:ea typeface="Calibri" pitchFamily="34" charset="-122"/>
@@ -2829,7 +2829,7 @@
             </a:avLst>
           </a:prstGeom>
           <a:solidFill>
-            <a:srgbClr val="1A2332"/>
+            <a:srgbClr val="1A2026"/>
           </a:solidFill>
           <a:ln/>
         </p:spPr>
@@ -2924,7 +2924,7 @@
             <a:r>
               <a:rPr lang="en-US" sz="900" dirty="0">
                 <a:solidFill>
-                  <a:srgbClr val="94A3B8"/>
+                  <a:srgbClr val="8994A0"/>
                 </a:solidFill>
                 <a:latin typeface="Calibri" pitchFamily="34" charset="0"/>
                 <a:ea typeface="Calibri" pitchFamily="34" charset="-122"/>
@@ -2953,7 +2953,7 @@
             </a:avLst>
           </a:prstGeom>
           <a:solidFill>
-            <a:srgbClr val="1A2332"/>
+            <a:srgbClr val="1A2026"/>
           </a:solidFill>
           <a:ln/>
         </p:spPr>
@@ -3048,7 +3048,7 @@
             <a:r>
               <a:rPr lang="en-US" sz="900" dirty="0">
                 <a:solidFill>
-                  <a:srgbClr val="94A3B8"/>
+                  <a:srgbClr val="8994A0"/>
                 </a:solidFill>
                 <a:latin typeface="Calibri" pitchFamily="34" charset="0"/>
                 <a:ea typeface="Calibri" pitchFamily="34" charset="-122"/>
@@ -3077,7 +3077,7 @@
             </a:avLst>
           </a:prstGeom>
           <a:solidFill>
-            <a:srgbClr val="1A2332"/>
+            <a:srgbClr val="1A2026"/>
           </a:solidFill>
           <a:ln/>
         </p:spPr>
@@ -3159,7 +3159,7 @@
     <p:bg>
       <p:bgPr>
         <a:solidFill>
-          <a:srgbClr val="0F1419"/>
+          <a:srgbClr val="0F1214"/>
         </a:solidFill>
       </p:bgPr>
     </p:bg>
@@ -3192,7 +3192,7 @@
             <a:avLst/>
           </a:prstGeom>
           <a:solidFill>
-            <a:srgbClr val="F59E0B">
+            <a:srgbClr val="3B968F">
               <a:alpha val="12000"/>
             </a:srgbClr>
           </a:solidFill>
@@ -3250,7 +3250,7 @@
             <a:r>
               <a:rPr lang="en-US" sz="2000" b="1" dirty="0">
                 <a:solidFill>
-                  <a:srgbClr val="F59E0B"/>
+                  <a:srgbClr val="3B968F"/>
                 </a:solidFill>
                 <a:latin typeface="Calibri" pitchFamily="34" charset="0"/>
                 <a:ea typeface="Calibri" pitchFamily="34" charset="-122"/>
@@ -3353,7 +3353,7 @@
             <a:r>
               <a:rPr lang="en-US" sz="900" dirty="0">
                 <a:solidFill>
-                  <a:srgbClr val="64748B"/>
+                  <a:srgbClr val="5B6672"/>
                 </a:solidFill>
                 <a:latin typeface="Calibri" pitchFamily="34" charset="0"/>
                 <a:ea typeface="Calibri" pitchFamily="34" charset="-122"/>
@@ -3379,7 +3379,7 @@
     <p:bg>
       <p:bgPr>
         <a:solidFill>
-          <a:srgbClr val="0F1419"/>
+          <a:srgbClr val="0F1214"/>
         </a:solidFill>
       </p:bgPr>
     </p:bg>
@@ -3424,7 +3424,7 @@
             <a:r>
               <a:rPr lang="en-US" sz="2000" b="1" dirty="0">
                 <a:solidFill>
-                  <a:srgbClr val="F59E0B"/>
+                  <a:srgbClr val="3B968F"/>
                 </a:solidFill>
                 <a:latin typeface="Calibri" pitchFamily="34" charset="0"/>
                 <a:ea typeface="Calibri" pitchFamily="34" charset="-122"/>
@@ -3517,7 +3517,7 @@
             </a:avLst>
           </a:prstGeom>
           <a:solidFill>
-            <a:srgbClr val="1A2332"/>
+            <a:srgbClr val="1A2026"/>
           </a:solidFill>
           <a:ln/>
         </p:spPr>
@@ -3602,7 +3602,7 @@
             </a:avLst>
           </a:prstGeom>
           <a:solidFill>
-            <a:srgbClr val="1A2332"/>
+            <a:srgbClr val="1A2026"/>
           </a:solidFill>
           <a:ln/>
         </p:spPr>
@@ -3684,7 +3684,7 @@
     <p:bg>
       <p:bgPr>
         <a:solidFill>
-          <a:srgbClr val="0D2137"/>
+          <a:srgbClr val="12181D"/>
         </a:solidFill>
       </p:bgPr>
     </p:bg>
@@ -3765,7 +3765,7 @@
             <a:avLst/>
           </a:prstGeom>
           <a:solidFill>
-            <a:srgbClr val="F59E0B">
+            <a:srgbClr val="3B968F">
               <a:alpha val="6000"/>
             </a:srgbClr>
           </a:solidFill>
@@ -3787,7 +3787,7 @@
             <a:avLst/>
           </a:prstGeom>
           <a:solidFill>
-            <a:srgbClr val="F59E0B"/>
+            <a:srgbClr val="3B968F"/>
           </a:solidFill>
           <a:ln/>
         </p:spPr>
@@ -3819,7 +3819,7 @@
             <a:r>
               <a:rPr lang="en-US" sz="1200" b="1" spc="200" kern="0" dirty="0">
                 <a:solidFill>
-                  <a:srgbClr val="F59E0B"/>
+                  <a:srgbClr val="3B968F"/>
                 </a:solidFill>
                 <a:latin typeface="Calibri" pitchFamily="34" charset="0"/>
                 <a:ea typeface="Calibri" pitchFamily="34" charset="-122"/>
@@ -3897,7 +3897,7 @@
             <a:r>
               <a:rPr lang="en-US" sz="1100" dirty="0">
                 <a:solidFill>
-                  <a:srgbClr val="64748B"/>
+                  <a:srgbClr val="5B6672"/>
                 </a:solidFill>
                 <a:latin typeface="Calibri" pitchFamily="34" charset="0"/>
                 <a:ea typeface="Calibri" pitchFamily="34" charset="-122"/>
@@ -3923,7 +3923,7 @@
     <p:bg>
       <p:bgPr>
         <a:solidFill>
-          <a:srgbClr val="0F1419"/>
+          <a:srgbClr val="0F1214"/>
         </a:solidFill>
       </p:bgPr>
     </p:bg>
@@ -3956,7 +3956,7 @@
             <a:avLst/>
           </a:prstGeom>
           <a:solidFill>
-            <a:srgbClr val="F59E0B">
+            <a:srgbClr val="3B968F">
               <a:alpha val="12000"/>
             </a:srgbClr>
           </a:solidFill>
@@ -4057,7 +4057,7 @@
             <a:r>
               <a:rPr lang="en-US" sz="900" dirty="0">
                 <a:solidFill>
-                  <a:srgbClr val="64748B"/>
+                  <a:srgbClr val="5B6672"/>
                 </a:solidFill>
                 <a:latin typeface="Calibri" pitchFamily="34" charset="0"/>
                 <a:ea typeface="Calibri" pitchFamily="34" charset="-122"/>
@@ -4083,7 +4083,7 @@
     <p:bg>
       <p:bgPr>
         <a:solidFill>
-          <a:srgbClr val="0F1419"/>
+          <a:srgbClr val="0F1214"/>
         </a:solidFill>
       </p:bgPr>
     </p:bg>
@@ -4128,7 +4128,7 @@
             <a:r>
               <a:rPr lang="en-US" sz="2000" b="1" dirty="0">
                 <a:solidFill>
-                  <a:srgbClr val="F59E0B"/>
+                  <a:srgbClr val="3B968F"/>
                 </a:solidFill>
                 <a:latin typeface="Calibri" pitchFamily="34" charset="0"/>
                 <a:ea typeface="Calibri" pitchFamily="34" charset="-122"/>
@@ -4221,7 +4221,7 @@
             </a:avLst>
           </a:prstGeom>
           <a:solidFill>
-            <a:srgbClr val="1A2332"/>
+            <a:srgbClr val="1A2026"/>
           </a:solidFill>
           <a:ln/>
         </p:spPr>
@@ -4306,7 +4306,7 @@
             </a:avLst>
           </a:prstGeom>
           <a:solidFill>
-            <a:srgbClr val="1A2332"/>
+            <a:srgbClr val="1A2026"/>
           </a:solidFill>
           <a:ln/>
         </p:spPr>
@@ -4388,7 +4388,7 @@
     <p:bg>
       <p:bgPr>
         <a:solidFill>
-          <a:srgbClr val="0F1419"/>
+          <a:srgbClr val="0F1214"/>
         </a:solidFill>
       </p:bgPr>
     </p:bg>
@@ -4433,7 +4433,7 @@
             <a:r>
               <a:rPr lang="en-US" sz="2000" b="1" dirty="0">
                 <a:solidFill>
-                  <a:srgbClr val="F59E0B"/>
+                  <a:srgbClr val="3B968F"/>
                 </a:solidFill>
                 <a:latin typeface="Calibri" pitchFamily="34" charset="0"/>
                 <a:ea typeface="Calibri" pitchFamily="34" charset="-122"/>
@@ -4462,7 +4462,7 @@
             </a:avLst>
           </a:prstGeom>
           <a:solidFill>
-            <a:srgbClr val="1A2332"/>
+            <a:srgbClr val="1A2026"/>
           </a:solidFill>
           <a:ln/>
         </p:spPr>
@@ -4547,7 +4547,7 @@
             </a:avLst>
           </a:prstGeom>
           <a:solidFill>
-            <a:srgbClr val="1A2332"/>
+            <a:srgbClr val="1A2026"/>
           </a:solidFill>
           <a:ln/>
         </p:spPr>
@@ -4632,7 +4632,7 @@
             </a:avLst>
           </a:prstGeom>
           <a:solidFill>
-            <a:srgbClr val="1A2332"/>
+            <a:srgbClr val="1A2026"/>
           </a:solidFill>
           <a:ln/>
         </p:spPr>
@@ -4727,7 +4727,7 @@
             <a:r>
               <a:rPr lang="en-US" sz="900" dirty="0">
                 <a:solidFill>
-                  <a:srgbClr val="94A3B8"/>
+                  <a:srgbClr val="8994A0"/>
                 </a:solidFill>
                 <a:latin typeface="Calibri" pitchFamily="34" charset="0"/>
                 <a:ea typeface="Calibri" pitchFamily="34" charset="-122"/>
@@ -4756,7 +4756,7 @@
             </a:avLst>
           </a:prstGeom>
           <a:solidFill>
-            <a:srgbClr val="1A2332"/>
+            <a:srgbClr val="1A2026"/>
           </a:solidFill>
           <a:ln/>
         </p:spPr>
@@ -4838,7 +4838,7 @@
     <p:bg>
       <p:bgPr>
         <a:solidFill>
-          <a:srgbClr val="0F1419"/>
+          <a:srgbClr val="0F1214"/>
         </a:solidFill>
       </p:bgPr>
     </p:bg>
@@ -4871,7 +4871,7 @@
             <a:avLst/>
           </a:prstGeom>
           <a:solidFill>
-            <a:srgbClr val="F59E0B">
+            <a:srgbClr val="3B968F">
               <a:alpha val="12000"/>
             </a:srgbClr>
           </a:solidFill>
@@ -4929,7 +4929,7 @@
             <a:r>
               <a:rPr lang="en-US" sz="2000" b="1" dirty="0">
                 <a:solidFill>
-                  <a:srgbClr val="F59E0B"/>
+                  <a:srgbClr val="3B968F"/>
                 </a:solidFill>
                 <a:latin typeface="Calibri" pitchFamily="34" charset="0"/>
                 <a:ea typeface="Calibri" pitchFamily="34" charset="-122"/>
@@ -5116,7 +5116,7 @@
             <a:r>
               <a:rPr lang="en-US" sz="900" dirty="0">
                 <a:solidFill>
-                  <a:srgbClr val="64748B"/>
+                  <a:srgbClr val="5B6672"/>
                 </a:solidFill>
                 <a:latin typeface="Calibri" pitchFamily="34" charset="0"/>
                 <a:ea typeface="Calibri" pitchFamily="34" charset="-122"/>
@@ -5142,7 +5142,7 @@
     <p:bg>
       <p:bgPr>
         <a:solidFill>
-          <a:srgbClr val="1A2332"/>
+          <a:srgbClr val="1A2026"/>
         </a:solidFill>
       </p:bgPr>
     </p:bg>
@@ -5211,7 +5211,7 @@
             <a:r>
               <a:rPr lang="en-US" sz="1200" b="1" spc="300" kern="0" dirty="0">
                 <a:solidFill>
-                  <a:srgbClr val="F59E0B"/>
+                  <a:srgbClr val="5BC1B8"/>
                 </a:solidFill>
                 <a:latin typeface="Calibri" pitchFamily="34" charset="0"/>
                 <a:ea typeface="Calibri" pitchFamily="34" charset="-122"/>
@@ -5279,7 +5279,7 @@
             </a:avLst>
           </a:prstGeom>
           <a:solidFill>
-            <a:srgbClr val="0F1419"/>
+            <a:srgbClr val="0F1214"/>
           </a:solidFill>
           <a:ln/>
         </p:spPr>
@@ -5301,7 +5301,7 @@
             </a:avLst>
           </a:prstGeom>
           <a:solidFill>
-            <a:srgbClr val="F59E0B"/>
+            <a:srgbClr val="3B968F"/>
           </a:solidFill>
           <a:ln/>
         </p:spPr>
@@ -5315,7 +5315,7 @@
             <a:r>
               <a:rPr lang="en-US" sz="1500" b="1" dirty="0">
                 <a:solidFill>
-                  <a:srgbClr val="0F1419"/>
+                  <a:srgbClr val="0F1214"/>
                 </a:solidFill>
                 <a:latin typeface="Calibri" pitchFamily="34" charset="0"/>
                 <a:ea typeface="Calibri" pitchFamily="34" charset="-122"/>
@@ -5383,7 +5383,7 @@
             </a:avLst>
           </a:prstGeom>
           <a:solidFill>
-            <a:srgbClr val="0F1419"/>
+            <a:srgbClr val="0F1214"/>
           </a:solidFill>
           <a:ln/>
         </p:spPr>
@@ -5405,7 +5405,7 @@
             </a:avLst>
           </a:prstGeom>
           <a:solidFill>
-            <a:srgbClr val="F59E0B"/>
+            <a:srgbClr val="3B968F"/>
           </a:solidFill>
           <a:ln/>
         </p:spPr>
@@ -5419,7 +5419,7 @@
             <a:r>
               <a:rPr lang="en-US" sz="1500" b="1" dirty="0">
                 <a:solidFill>
-                  <a:srgbClr val="0F1419"/>
+                  <a:srgbClr val="0F1214"/>
                 </a:solidFill>
                 <a:latin typeface="Calibri" pitchFamily="34" charset="0"/>
                 <a:ea typeface="Calibri" pitchFamily="34" charset="-122"/>
@@ -5484,7 +5484,7 @@
     <p:bg>
       <p:bgPr>
         <a:solidFill>
-          <a:srgbClr val="0F1419"/>
+          <a:srgbClr val="0F1214"/>
         </a:solidFill>
       </p:bgPr>
     </p:bg>
@@ -5517,7 +5517,7 @@
             <a:avLst/>
           </a:prstGeom>
           <a:solidFill>
-            <a:srgbClr val="F59E0B">
+            <a:srgbClr val="3B968F">
               <a:alpha val="6000"/>
             </a:srgbClr>
           </a:solidFill>
@@ -5614,7 +5614,7 @@
             <a:r>
               <a:rPr lang="en-US" sz="1300" dirty="0">
                 <a:solidFill>
-                  <a:srgbClr val="94A3B8"/>
+                  <a:srgbClr val="8994A0"/>
                 </a:solidFill>
                 <a:latin typeface="Calibri" pitchFamily="34" charset="0"/>
                 <a:ea typeface="Calibri" pitchFamily="34" charset="-122"/>
@@ -5641,7 +5641,7 @@
             <a:avLst/>
           </a:prstGeom>
           <a:solidFill>
-            <a:srgbClr val="F59E0B"/>
+            <a:srgbClr val="3B968F"/>
           </a:solidFill>
           <a:ln/>
         </p:spPr>
@@ -5673,7 +5673,7 @@
             <a:r>
               <a:rPr lang="en-US" sz="1100" spc="300" kern="0" dirty="0">
                 <a:solidFill>
-                  <a:srgbClr val="64748B"/>
+                  <a:srgbClr val="5B6672"/>
                 </a:solidFill>
                 <a:latin typeface="Calibri" pitchFamily="34" charset="0"/>
                 <a:ea typeface="Calibri" pitchFamily="34" charset="-122"/>
@@ -5712,7 +5712,7 @@
             <a:r>
               <a:rPr lang="en-US" sz="1100" dirty="0">
                 <a:solidFill>
-                  <a:srgbClr val="009E8B"/>
+                  <a:srgbClr val="000000"/>
                 </a:solidFill>
                 <a:latin typeface="Calibri" pitchFamily="34" charset="0"/>
                 <a:ea typeface="Calibri" pitchFamily="34" charset="-122"/>
@@ -5738,7 +5738,7 @@
     <p:bg>
       <p:bgPr>
         <a:solidFill>
-          <a:srgbClr val="0F1419"/>
+          <a:srgbClr val="0F1214"/>
         </a:solidFill>
       </p:bgPr>
     </p:bg>
@@ -5783,7 +5783,7 @@
             <a:r>
               <a:rPr lang="en-US" sz="1200" b="1" spc="300" kern="0" dirty="0">
                 <a:solidFill>
-                  <a:srgbClr val="F59E0B"/>
+                  <a:srgbClr val="3B968F"/>
                 </a:solidFill>
                 <a:latin typeface="Calibri" pitchFamily="34" charset="0"/>
                 <a:ea typeface="Calibri" pitchFamily="34" charset="-122"/>
@@ -5851,7 +5851,7 @@
             </a:avLst>
           </a:prstGeom>
           <a:solidFill>
-            <a:srgbClr val="1A2332"/>
+            <a:srgbClr val="1A2026"/>
           </a:solidFill>
           <a:ln/>
         </p:spPr>
@@ -5883,7 +5883,7 @@
             <a:r>
               <a:rPr lang="en-US" sz="1300" b="1" dirty="0">
                 <a:solidFill>
-                  <a:srgbClr val="F59E0B"/>
+                  <a:srgbClr val="3B968F"/>
                 </a:solidFill>
                 <a:latin typeface="Calibri" pitchFamily="34" charset="0"/>
                 <a:ea typeface="Calibri" pitchFamily="34" charset="-122"/>
@@ -5975,7 +5975,7 @@
             </a:avLst>
           </a:prstGeom>
           <a:solidFill>
-            <a:srgbClr val="1A2332"/>
+            <a:srgbClr val="1A2026"/>
           </a:solidFill>
           <a:ln/>
         </p:spPr>
@@ -6007,7 +6007,7 @@
             <a:r>
               <a:rPr lang="en-US" sz="1300" b="1" dirty="0">
                 <a:solidFill>
-                  <a:srgbClr val="F59E0B"/>
+                  <a:srgbClr val="3B968F"/>
                 </a:solidFill>
                 <a:latin typeface="Calibri" pitchFamily="34" charset="0"/>
                 <a:ea typeface="Calibri" pitchFamily="34" charset="-122"/>
@@ -6099,7 +6099,7 @@
             </a:avLst>
           </a:prstGeom>
           <a:solidFill>
-            <a:srgbClr val="1A2332"/>
+            <a:srgbClr val="1A2026"/>
           </a:solidFill>
           <a:ln/>
         </p:spPr>
@@ -6131,7 +6131,7 @@
             <a:r>
               <a:rPr lang="en-US" sz="1300" b="1" dirty="0">
                 <a:solidFill>
-                  <a:srgbClr val="F59E0B"/>
+                  <a:srgbClr val="3B968F"/>
                 </a:solidFill>
                 <a:latin typeface="Calibri" pitchFamily="34" charset="0"/>
                 <a:ea typeface="Calibri" pitchFamily="34" charset="-122"/>
@@ -6220,7 +6220,7 @@
     <p:bg>
       <p:bgPr>
         <a:solidFill>
-          <a:srgbClr val="0D2137"/>
+          <a:srgbClr val="12181D"/>
         </a:solidFill>
       </p:bgPr>
     </p:bg>
@@ -6301,7 +6301,7 @@
             <a:avLst/>
           </a:prstGeom>
           <a:solidFill>
-            <a:srgbClr val="F59E0B">
+            <a:srgbClr val="3B968F">
               <a:alpha val="6000"/>
             </a:srgbClr>
           </a:solidFill>
@@ -6323,7 +6323,7 @@
             <a:avLst/>
           </a:prstGeom>
           <a:solidFill>
-            <a:srgbClr val="F59E0B"/>
+            <a:srgbClr val="3B968F"/>
           </a:solidFill>
           <a:ln/>
         </p:spPr>
@@ -6355,7 +6355,7 @@
             <a:r>
               <a:rPr lang="en-US" sz="1200" b="1" spc="200" kern="0" dirty="0">
                 <a:solidFill>
-                  <a:srgbClr val="F59E0B"/>
+                  <a:srgbClr val="3B968F"/>
                 </a:solidFill>
                 <a:latin typeface="Calibri" pitchFamily="34" charset="0"/>
                 <a:ea typeface="Calibri" pitchFamily="34" charset="-122"/>
@@ -6433,7 +6433,7 @@
             <a:r>
               <a:rPr lang="en-US" sz="1100" dirty="0">
                 <a:solidFill>
-                  <a:srgbClr val="64748B"/>
+                  <a:srgbClr val="5B6672"/>
                 </a:solidFill>
                 <a:latin typeface="Calibri" pitchFamily="34" charset="0"/>
                 <a:ea typeface="Calibri" pitchFamily="34" charset="-122"/>
@@ -6459,7 +6459,7 @@
     <p:bg>
       <p:bgPr>
         <a:solidFill>
-          <a:srgbClr val="0F1419"/>
+          <a:srgbClr val="0F1214"/>
         </a:solidFill>
       </p:bgPr>
     </p:bg>
@@ -6492,7 +6492,7 @@
             <a:avLst/>
           </a:prstGeom>
           <a:solidFill>
-            <a:srgbClr val="F59E0B">
+            <a:srgbClr val="3B968F">
               <a:alpha val="12000"/>
             </a:srgbClr>
           </a:solidFill>
@@ -6698,7 +6698,7 @@
             <a:r>
               <a:rPr lang="en-US" sz="900" dirty="0">
                 <a:solidFill>
-                  <a:srgbClr val="64748B"/>
+                  <a:srgbClr val="5B6672"/>
                 </a:solidFill>
                 <a:latin typeface="Calibri" pitchFamily="34" charset="0"/>
                 <a:ea typeface="Calibri" pitchFamily="34" charset="-122"/>
@@ -6724,7 +6724,7 @@
     <p:bg>
       <p:bgPr>
         <a:solidFill>
-          <a:srgbClr val="0F1419"/>
+          <a:srgbClr val="0F1214"/>
         </a:solidFill>
       </p:bgPr>
     </p:bg>
@@ -6769,7 +6769,7 @@
             <a:r>
               <a:rPr lang="en-US" sz="2000" b="1" dirty="0">
                 <a:solidFill>
-                  <a:srgbClr val="F59E0B"/>
+                  <a:srgbClr val="3B968F"/>
                 </a:solidFill>
                 <a:latin typeface="Calibri" pitchFamily="34" charset="0"/>
                 <a:ea typeface="Calibri" pitchFamily="34" charset="-122"/>
@@ -6904,7 +6904,7 @@
             </a:avLst>
           </a:prstGeom>
           <a:solidFill>
-            <a:srgbClr val="1A2332"/>
+            <a:srgbClr val="1A2026"/>
           </a:solidFill>
           <a:ln/>
         </p:spPr>
@@ -6989,7 +6989,7 @@
             </a:avLst>
           </a:prstGeom>
           <a:solidFill>
-            <a:srgbClr val="1A2332"/>
+            <a:srgbClr val="1A2026"/>
           </a:solidFill>
           <a:ln/>
         </p:spPr>
@@ -7074,7 +7074,7 @@
             </a:avLst>
           </a:prstGeom>
           <a:solidFill>
-            <a:srgbClr val="1A2332"/>
+            <a:srgbClr val="1A2026"/>
           </a:solidFill>
           <a:ln/>
         </p:spPr>
@@ -7156,7 +7156,7 @@
     <p:bg>
       <p:bgPr>
         <a:solidFill>
-          <a:srgbClr val="1A2332"/>
+          <a:srgbClr val="1A2026"/>
         </a:solidFill>
       </p:bgPr>
     </p:bg>
@@ -7225,7 +7225,7 @@
             <a:r>
               <a:rPr lang="en-US" sz="1200" b="1" spc="300" kern="0" dirty="0">
                 <a:solidFill>
-                  <a:srgbClr val="F59E0B"/>
+                  <a:srgbClr val="5BC1B8"/>
                 </a:solidFill>
                 <a:latin typeface="Calibri" pitchFamily="34" charset="0"/>
                 <a:ea typeface="Calibri" pitchFamily="34" charset="-122"/>
@@ -7293,7 +7293,7 @@
             </a:avLst>
           </a:prstGeom>
           <a:solidFill>
-            <a:srgbClr val="0F1419"/>
+            <a:srgbClr val="0F1214"/>
           </a:solidFill>
           <a:ln/>
         </p:spPr>
@@ -7315,7 +7315,7 @@
             </a:avLst>
           </a:prstGeom>
           <a:solidFill>
-            <a:srgbClr val="F59E0B"/>
+            <a:srgbClr val="3B968F"/>
           </a:solidFill>
           <a:ln/>
         </p:spPr>
@@ -7329,7 +7329,7 @@
             <a:r>
               <a:rPr lang="en-US" sz="1500" b="1" dirty="0">
                 <a:solidFill>
-                  <a:srgbClr val="0F1419"/>
+                  <a:srgbClr val="0F1214"/>
                 </a:solidFill>
                 <a:latin typeface="Calibri" pitchFamily="34" charset="0"/>
                 <a:ea typeface="Calibri" pitchFamily="34" charset="-122"/>
@@ -7397,7 +7397,7 @@
             </a:avLst>
           </a:prstGeom>
           <a:solidFill>
-            <a:srgbClr val="0F1419"/>
+            <a:srgbClr val="0F1214"/>
           </a:solidFill>
           <a:ln/>
         </p:spPr>
@@ -7419,7 +7419,7 @@
             </a:avLst>
           </a:prstGeom>
           <a:solidFill>
-            <a:srgbClr val="F59E0B"/>
+            <a:srgbClr val="3B968F"/>
           </a:solidFill>
           <a:ln/>
         </p:spPr>
@@ -7433,7 +7433,7 @@
             <a:r>
               <a:rPr lang="en-US" sz="1500" b="1" dirty="0">
                 <a:solidFill>
-                  <a:srgbClr val="0F1419"/>
+                  <a:srgbClr val="0F1214"/>
                 </a:solidFill>
                 <a:latin typeface="Calibri" pitchFamily="34" charset="0"/>
                 <a:ea typeface="Calibri" pitchFamily="34" charset="-122"/>
@@ -7501,7 +7501,7 @@
             </a:avLst>
           </a:prstGeom>
           <a:solidFill>
-            <a:srgbClr val="0F1419"/>
+            <a:srgbClr val="0F1214"/>
           </a:solidFill>
           <a:ln/>
         </p:spPr>
@@ -7523,7 +7523,7 @@
             </a:avLst>
           </a:prstGeom>
           <a:solidFill>
-            <a:srgbClr val="F59E0B"/>
+            <a:srgbClr val="3B968F"/>
           </a:solidFill>
           <a:ln/>
         </p:spPr>
@@ -7537,7 +7537,7 @@
             <a:r>
               <a:rPr lang="en-US" sz="1500" b="1" dirty="0">
                 <a:solidFill>
-                  <a:srgbClr val="0F1419"/>
+                  <a:srgbClr val="0F1214"/>
                 </a:solidFill>
                 <a:latin typeface="Calibri" pitchFamily="34" charset="0"/>
                 <a:ea typeface="Calibri" pitchFamily="34" charset="-122"/>
@@ -7605,7 +7605,7 @@
             </a:avLst>
           </a:prstGeom>
           <a:solidFill>
-            <a:srgbClr val="0F1419"/>
+            <a:srgbClr val="0F1214"/>
           </a:solidFill>
           <a:ln/>
         </p:spPr>
@@ -7627,7 +7627,7 @@
             </a:avLst>
           </a:prstGeom>
           <a:solidFill>
-            <a:srgbClr val="F59E0B"/>
+            <a:srgbClr val="3B968F"/>
           </a:solidFill>
           <a:ln/>
         </p:spPr>
@@ -7641,7 +7641,7 @@
             <a:r>
               <a:rPr lang="en-US" sz="1500" b="1" dirty="0">
                 <a:solidFill>
-                  <a:srgbClr val="0F1419"/>
+                  <a:srgbClr val="0F1214"/>
                 </a:solidFill>
                 <a:latin typeface="Calibri" pitchFamily="34" charset="0"/>
                 <a:ea typeface="Calibri" pitchFamily="34" charset="-122"/>
@@ -7706,7 +7706,7 @@
     <p:bg>
       <p:bgPr>
         <a:solidFill>
-          <a:srgbClr val="0D2137"/>
+          <a:srgbClr val="12181D"/>
         </a:solidFill>
       </p:bgPr>
     </p:bg>
@@ -7787,7 +7787,7 @@
             <a:avLst/>
           </a:prstGeom>
           <a:solidFill>
-            <a:srgbClr val="F59E0B">
+            <a:srgbClr val="3B968F">
               <a:alpha val="6000"/>
             </a:srgbClr>
           </a:solidFill>
@@ -7809,7 +7809,7 @@
             <a:avLst/>
           </a:prstGeom>
           <a:solidFill>
-            <a:srgbClr val="F59E0B"/>
+            <a:srgbClr val="3B968F"/>
           </a:solidFill>
           <a:ln/>
         </p:spPr>
@@ -7841,7 +7841,7 @@
             <a:r>
               <a:rPr lang="en-US" sz="1200" b="1" spc="200" kern="0" dirty="0">
                 <a:solidFill>
-                  <a:srgbClr val="F59E0B"/>
+                  <a:srgbClr val="3B968F"/>
                 </a:solidFill>
                 <a:latin typeface="Calibri" pitchFamily="34" charset="0"/>
                 <a:ea typeface="Calibri" pitchFamily="34" charset="-122"/>
@@ -7919,7 +7919,7 @@
             <a:r>
               <a:rPr lang="en-US" sz="1100" dirty="0">
                 <a:solidFill>
-                  <a:srgbClr val="64748B"/>
+                  <a:srgbClr val="5B6672"/>
                 </a:solidFill>
                 <a:latin typeface="Calibri" pitchFamily="34" charset="0"/>
                 <a:ea typeface="Calibri" pitchFamily="34" charset="-122"/>
@@ -7945,7 +7945,7 @@
     <p:bg>
       <p:bgPr>
         <a:solidFill>
-          <a:srgbClr val="0F1419"/>
+          <a:srgbClr val="0F1214"/>
         </a:solidFill>
       </p:bgPr>
     </p:bg>
@@ -7978,7 +7978,7 @@
             <a:avLst/>
           </a:prstGeom>
           <a:solidFill>
-            <a:srgbClr val="F59E0B">
+            <a:srgbClr val="3B968F">
               <a:alpha val="12000"/>
             </a:srgbClr>
           </a:solidFill>
@@ -8121,7 +8121,7 @@
             <a:r>
               <a:rPr lang="en-US" sz="900" dirty="0">
                 <a:solidFill>
-                  <a:srgbClr val="64748B"/>
+                  <a:srgbClr val="5B6672"/>
                 </a:solidFill>
                 <a:latin typeface="Calibri" pitchFamily="34" charset="0"/>
                 <a:ea typeface="Calibri" pitchFamily="34" charset="-122"/>
@@ -8147,7 +8147,7 @@
     <p:bg>
       <p:bgPr>
         <a:solidFill>
-          <a:srgbClr val="0F1419"/>
+          <a:srgbClr val="0F1214"/>
         </a:solidFill>
       </p:bgPr>
     </p:bg>
@@ -8192,7 +8192,7 @@
             <a:r>
               <a:rPr lang="en-US" sz="2000" b="1" dirty="0">
                 <a:solidFill>
-                  <a:srgbClr val="F59E0B"/>
+                  <a:srgbClr val="3B968F"/>
                 </a:solidFill>
                 <a:latin typeface="Calibri" pitchFamily="34" charset="0"/>
                 <a:ea typeface="Calibri" pitchFamily="34" charset="-122"/>
@@ -8285,7 +8285,7 @@
             </a:avLst>
           </a:prstGeom>
           <a:solidFill>
-            <a:srgbClr val="1A2332"/>
+            <a:srgbClr val="1A2026"/>
           </a:solidFill>
           <a:ln/>
         </p:spPr>
